--- a/lecons/F2/09_F2_M1_FS03_Products_Gathered_from_the_Wild_in_Cameroon.pptx
+++ b/lecons/F2/09_F2_M1_FS03_Products_Gathered_from_the_Wild_in_Cameroon.pptx
@@ -56,9 +56,13 @@
     <p:sldId id="304" r:id="rId50"/>
     <p:sldId id="305" r:id="rId51"/>
     <p:sldId id="306" r:id="rId52"/>
+    <p:sldId id="307" r:id="rId53"/>
+    <p:sldId id="308" r:id="rId54"/>
+    <p:sldId id="309" r:id="rId55"/>
+    <p:sldId id="310" r:id="rId56"/>
   </p:sldIdLst>
   <p:notesMasterIdLst>
-    <p:notesMasterId r:id="rId53"/>
+    <p:notesMasterId r:id="rId57"/>
   </p:notesMasterIdLst>
   <p:sldSz cx="12192000" cy="6858000"/>
   <p:notesSz cx="6858000" cy="12192000"/>
@@ -640,7 +644,7 @@
           <a:p>
             <a:r>
               <a:rPr lang="en-US" dirty="0"/>
-              <a:t>Listen carefully to this situation from real life. In the market of Garoua, Aïcha sees eru leaves, njangsa seeds, bush mango, honey and bitter cola that come from the forests of the South. The trader says she earns her living from these products. Think about it, because I am going to ask you some questions.</a:t>
+              <a:t>Listen carefully to this situation from real life. In the market of Garoua, Aïcha sees eru leaves, njangsa seeds, bush mango, honey and bitter cola. The trader says that she earns her living from these products. Aïcha asks: "Where do these products come from, and why are they so important?" Think about it, because I am going to ask you some questions.</a:t>
             </a:r>
             <a:endParaRPr lang="en-US" dirty="0"/>
           </a:p>
@@ -816,7 +820,7 @@
           <a:p>
             <a:r>
               <a:rPr lang="en-US" dirty="0"/>
-              <a:t>Good. Aïcha wants to know the products gathered from the wild.</a:t>
+              <a:t>Good. Aïcha does not know where these products come from and why they are important.</a:t>
             </a:r>
             <a:endParaRPr lang="en-US" dirty="0"/>
           </a:p>
@@ -992,7 +996,7 @@
           <a:p>
             <a:r>
               <a:rPr lang="en-US" dirty="0"/>
-              <a:t>Good. Eru, njangsa and bush mango (also bitter cola, honey).</a:t>
+              <a:t>Good. Eru, njangsa and bush mango (also bitter cola and honey).</a:t>
             </a:r>
             <a:endParaRPr lang="en-US" dirty="0"/>
           </a:p>
@@ -1432,7 +1436,7 @@
           <a:p>
             <a:r>
               <a:rPr lang="en-US" dirty="0"/>
-              <a:t>Activity 1. Look carefully at this picture: wild products in a market. Observe every detail before I ask the question.</a:t>
+              <a:t>Activity 1. Look carefully at this picture: products in a market. Observe every detail before I ask the question.</a:t>
             </a:r>
             <a:endParaRPr lang="en-US" dirty="0"/>
           </a:p>
@@ -1608,7 +1612,7 @@
           <a:p>
             <a:r>
               <a:rPr lang="en-US" dirty="0"/>
-              <a:t>Here is the question for Activity 1: Name four products gathered from the wild in Cameroon. Take one minute to think and write your answer in your rough notebook.</a:t>
+              <a:t>Here is the question for Activity 1: Were these products planted by farmers? Take one minute to think and write your answer in your rough notebook.</a:t>
             </a:r>
             <a:endParaRPr lang="en-US" dirty="0"/>
           </a:p>
@@ -1696,7 +1700,7 @@
           <a:p>
             <a:r>
               <a:rPr lang="en-US" dirty="0"/>
-              <a:t>Let us check the answer together. Eru, njangsa, bush mango and bitter cola (also honey, shea nuts, mushrooms).</a:t>
+              <a:t>Let us check the answer together. No, they are gathered from the wild: eru, njangsa, bush mango and bitter cola.</a:t>
             </a:r>
             <a:endParaRPr lang="en-US" dirty="0"/>
           </a:p>
@@ -1784,7 +1788,7 @@
           <a:p>
             <a:r>
               <a:rPr lang="en-US" dirty="0"/>
-              <a:t>Activity 2. Look carefully at this picture: a shea tree. Observe every detail before I ask the question.</a:t>
+              <a:t>Activity 2. Look carefully at this picture: a tree of the northern savanna. Observe every detail before I ask the question.</a:t>
             </a:r>
             <a:endParaRPr lang="en-US" dirty="0"/>
           </a:p>
@@ -1872,7 +1876,7 @@
           <a:p>
             <a:r>
               <a:rPr lang="en-US" dirty="0"/>
-              <a:t>Here is the question for Activity 2: Which wild product of the North is made from the shea tree? Take one minute to think and write your answer in your rough notebook.</a:t>
+              <a:t>Here is the question for Activity 2: Which product of the North is made from the nuts of this tree? Take one minute to think and write your answer in your rough notebook.</a:t>
             </a:r>
             <a:endParaRPr lang="en-US" dirty="0"/>
           </a:p>
@@ -2136,7 +2140,7 @@
           <a:p>
             <a:r>
               <a:rPr lang="en-US" dirty="0"/>
-              <a:t>Here is the question for Activity 3: How are honey and fruits collected from the wild? Take one minute to think and write your answer in your rough notebook.</a:t>
+              <a:t>Here is the question for Activity 3: Where do people find wild honey? Take one minute to think and write your answer in your rough notebook.</a:t>
             </a:r>
             <a:endParaRPr lang="en-US" dirty="0"/>
           </a:p>
@@ -2224,7 +2228,7 @@
           <a:p>
             <a:r>
               <a:rPr lang="en-US" dirty="0"/>
-              <a:t>Let us check the answer together. Honey is taken from hives in trees; fruits and nuts are picked from the ground or trees.</a:t>
+              <a:t>Let us check the answer together. In hives of wild bees in trees and rocks.</a:t>
             </a:r>
             <a:endParaRPr lang="en-US" dirty="0"/>
           </a:p>
@@ -2400,7 +2404,7 @@
           <a:p>
             <a:r>
               <a:rPr lang="en-US" dirty="0"/>
-              <a:t>Here is the question for Activity 4: How are wild products economically important? Take one minute to think and write your answer in your rough notebook.</a:t>
+              <a:t>Here is the question for Activity 4: How do wild products help the families that sell them? Take one minute to think and write your answer in your rough notebook.</a:t>
             </a:r>
             <a:endParaRPr lang="en-US" dirty="0"/>
           </a:p>
@@ -2488,7 +2492,7 @@
           <a:p>
             <a:r>
               <a:rPr lang="en-US" dirty="0"/>
-              <a:t>Our topic is Man in his Environment, and the sub-topic is Exploitation of Resources in the Natural Environment. The key notions we shall use today are: non-timber forest products, njangsa, eru, bush mango, bitter cola, gathering. At the end, you should be able to do this: learners are able to identify wild products of Cameroon and explain their importance.</a:t>
+              <a:t>Our topic is Man in his Environment, and the sub-topic is Exploitation of Resources in the Natural Environment. The key notions we shall use today are: non-timber forest products, gathering. At the end, you should be able to do this: learners are able to identify wild products of Cameroon and explain their importance.</a:t>
             </a:r>
             <a:endParaRPr lang="en-US" dirty="0"/>
           </a:p>
@@ -2576,7 +2580,7 @@
           <a:p>
             <a:r>
               <a:rPr lang="en-US" dirty="0"/>
-              <a:t>Let us check the answer together. They are sold for income and some, like eru, are exported to Nigeria and Europe.</a:t>
+              <a:t>Let us check the answer together. They give them money to buy food and pay school fees.</a:t>
             </a:r>
             <a:endParaRPr lang="en-US" dirty="0"/>
           </a:p>
@@ -2752,7 +2756,7 @@
           <a:p>
             <a:r>
               <a:rPr lang="en-US" dirty="0"/>
-              <a:t>Here is the question for Activity 5: Give one socio-cultural use of wild products. Take one minute to think and write your answer in your rough notebook.</a:t>
+              <a:t>Here is the question for Activity 5: When are cola nuts and bitter cola shared? Take one minute to think and write your answer in your rough notebook.</a:t>
             </a:r>
             <a:endParaRPr lang="en-US" dirty="0"/>
           </a:p>
@@ -2840,7 +2844,7 @@
           <a:p>
             <a:r>
               <a:rPr lang="en-US" dirty="0"/>
-              <a:t>Let us check the answer together. Bitter cola and cola nuts are shared at ceremonies; many plants are used as traditional medicine.</a:t>
+              <a:t>Let us check the answer together. At ceremonies such as weddings and funerals.</a:t>
             </a:r>
             <a:endParaRPr lang="en-US" dirty="0"/>
           </a:p>
@@ -3016,7 +3020,7 @@
           <a:p>
             <a:r>
               <a:rPr lang="en-US" dirty="0"/>
-              <a:t>Let us copy the definitions. The key terms of this lesson are defined as follows. On this slide we have Wild product. Write each point on a new line, with the key term first, and explain it in your own words when we revise.</a:t>
+              <a:t>Let us copy the definitions. The key terms of this lesson are defined as follows. On this slide we have Wild product and Gathering. Write each point on a new line, with the key term first, and explain it in your own words when we revise.</a:t>
             </a:r>
             <a:endParaRPr lang="en-US" dirty="0"/>
           </a:p>
@@ -3104,7 +3108,7 @@
           <a:p>
             <a:r>
               <a:rPr lang="en-US" dirty="0"/>
-              <a:t>Let us copy Identification. Cameroon has the following wild products. On this slide we have Leaves and seeds and Nuts and fruits. Write each point on a new line, with the key term first, and explain it in your own words when we revise. When you finish, we go to the next slide.</a:t>
+              <a:t>Let us copy Identification of the Products. Cameroon has the following wild products. Copy the point on Eru and njangsa on the left, then draw the diagram on the right: wild products in a market. Give it a title and label it clearly.</a:t>
             </a:r>
             <a:endParaRPr lang="en-US" dirty="0"/>
           </a:p>
@@ -3192,7 +3196,7 @@
           <a:p>
             <a:r>
               <a:rPr lang="en-US" dirty="0"/>
-              <a:t>We continue with Identification. On this slide we have Other products. Write each point on a new line, with the key term first, and explain it in your own words when we revise.</a:t>
+              <a:t>We continue with Identification of the Products. On this slide we have Bush mango and bitter cola. Write each point on a new line, with the key term first, and explain it in your own words when we revise.</a:t>
             </a:r>
             <a:endParaRPr lang="en-US" dirty="0"/>
           </a:p>
@@ -3280,7 +3284,7 @@
           <a:p>
             <a:r>
               <a:rPr lang="en-US" dirty="0"/>
-              <a:t>Let us copy Methods of Collection. Wild products are collected in the following ways. On this slide we have Picking and Processing. Write each point on a new line, with the key term first, and explain it in your own words when we revise.</a:t>
+              <a:t>Copy the point on Shea nuts on the left, then draw the diagram on the right: a shea tree. Give it a title and label it clearly.</a:t>
             </a:r>
             <a:endParaRPr lang="en-US" dirty="0"/>
           </a:p>
@@ -3368,7 +3372,7 @@
           <a:p>
             <a:r>
               <a:rPr lang="en-US" dirty="0"/>
-              <a:t>Let us copy Importance. Wild products are important in the following ways. On this slide we have Economic importance and Socio-cultural importance. Write each point on a new line, with the key term first, and explain it in your own words when we revise.</a:t>
+              <a:t>Copy the point on Honey and medicinal plants on the left, then draw the diagram on the right: a bee. Give it a title and label it clearly.</a:t>
             </a:r>
             <a:endParaRPr lang="en-US" dirty="0"/>
           </a:p>
@@ -3544,7 +3548,7 @@
           <a:p>
             <a:r>
               <a:rPr lang="en-US" dirty="0"/>
-              <a:t>Now let us check what you have understood. Question 1: Name four wild products of Cameroon. Answer in your exercise book.</a:t>
+              <a:t>Let us copy Methods of Collection and Processing. Wild products are collected and processed in the following ways. On this slide we have Picking and Harvesting honey. Write each point on a new line, with the key term first, and explain it in your own words when we revise. When you finish, we go to the next slide.</a:t>
             </a:r>
             <a:endParaRPr lang="en-US" dirty="0"/>
           </a:p>
@@ -3632,7 +3636,7 @@
           <a:p>
             <a:r>
               <a:rPr lang="en-US" dirty="0"/>
-              <a:t>The expected answer is: eru, njangsa, bush mango and bitter cola. If you got it right, well done.</a:t>
+              <a:t>We continue with Methods of Collection and Processing. On this slide we have Drying and cracking and Pressing and boiling. Write each point on a new line, with the key term first, and explain it in your own words when we revise.</a:t>
             </a:r>
             <a:endParaRPr lang="en-US" dirty="0"/>
           </a:p>
@@ -3720,7 +3724,7 @@
           <a:p>
             <a:r>
               <a:rPr lang="en-US" dirty="0"/>
-              <a:t>Now let us check what you have understood. Question 2: Give one economic importance. Answer in your exercise book.</a:t>
+              <a:t>Let us copy Socio-cultural and Economic Importance. Wild products are important in the following ways. Copy the point on Income on the left, then draw the diagram on the right: a market. Give it a title and label it clearly.</a:t>
             </a:r>
             <a:endParaRPr lang="en-US" dirty="0"/>
           </a:p>
@@ -3808,7 +3812,7 @@
           <a:p>
             <a:r>
               <a:rPr lang="en-US" dirty="0"/>
-              <a:t>The expected answer is: they give income to families. If you got it right, well done.</a:t>
+              <a:t>We continue with Socio-cultural and Economic Importance. On this slide we have Exports, Food and Ceremonies and medicine. Write each point on a new line, with the key term first, and explain it in your own words when we revise.</a:t>
             </a:r>
             <a:endParaRPr lang="en-US" dirty="0"/>
           </a:p>
@@ -3896,7 +3900,7 @@
           <a:p>
             <a:r>
               <a:rPr lang="en-US" dirty="0"/>
-              <a:t>For those who need more practice, fill in the blanks in your exercise book. The answers are: number 1, shea; number 2, eru; number 3, medicine.</a:t>
+              <a:t>Now let us check what you have understood. Question 1: Name four wild products of Cameroon. Answer in your exercise book.</a:t>
             </a:r>
             <a:endParaRPr lang="en-US" dirty="0"/>
           </a:p>
@@ -3984,7 +3988,7 @@
           <a:p>
             <a:r>
               <a:rPr lang="en-US" dirty="0"/>
-              <a:t>For your homework: Visit the market and write the price of three wild products. We shall correct it at the beginning of our next lesson.</a:t>
+              <a:t>The expected answer is: eru, njangsa, bush mango and bitter cola. If you got it right, well done.</a:t>
             </a:r>
             <a:endParaRPr lang="en-US" dirty="0"/>
           </a:p>
@@ -4072,7 +4076,7 @@
           <a:p>
             <a:r>
               <a:rPr lang="en-US" dirty="0"/>
-              <a:t>Our next lesson will be on Practical Work 3: Identification of the Biological Resources of Cameroon. Thank you for your attention, and see you next time.</a:t>
+              <a:t>Now let us check what you have understood. Question 2: Give one economic importance. Answer in your exercise book.</a:t>
             </a:r>
             <a:endParaRPr lang="en-US" dirty="0"/>
           </a:p>
@@ -4160,7 +4164,7 @@
           <a:p>
             <a:r>
               <a:rPr lang="en-US" dirty="0"/>
-              <a:t>Let us play the bilingual game. I say a word in English, and you give me the French word. Then we do the reverse.</a:t>
+              <a:t>The expected answer is: they give income to families. If you got it right, well done.</a:t>
             </a:r>
             <a:endParaRPr lang="en-US" dirty="0"/>
           </a:p>
@@ -4248,7 +4252,7 @@
           <a:p>
             <a:r>
               <a:rPr lang="en-US" dirty="0"/>
-              <a:t>I record this information in the official logbook of the class after the lesson.</a:t>
+              <a:t>For those who need more practice, fill in the blanks in your exercise book. The answers are: number 1, shea; number 2, eru; number 3, medicine.</a:t>
             </a:r>
             <a:endParaRPr lang="en-US" dirty="0"/>
           </a:p>
@@ -4336,7 +4340,7 @@
           <a:p>
             <a:r>
               <a:rPr lang="en-US" dirty="0"/>
-              <a:t>I complete the second page of the logbook: the matter taught, the evaluation, the homework and the attendance.</a:t>
+              <a:t>For your homework: Visit the market and write the price of three wild products. We shall correct it at the beginning of our next lesson.</a:t>
             </a:r>
             <a:endParaRPr lang="en-US" dirty="0"/>
           </a:p>
@@ -4512,7 +4516,7 @@
           <a:p>
             <a:r>
               <a:rPr lang="en-US" dirty="0"/>
-              <a:t>This slide is for me, the teacher: it gives the timing of the lesson and what to do if the projector is not available.</a:t>
+              <a:t>Our next lesson will be on Practical Work 3: Identification of the Biological Resources of Cameroon. Thank you for your attention, and see you next time.</a:t>
             </a:r>
             <a:endParaRPr lang="en-US" dirty="0"/>
           </a:p>
@@ -4600,7 +4604,7 @@
           <a:p>
             <a:r>
               <a:rPr lang="en-US" dirty="0"/>
-              <a:t>These are the references and picture credits used to prepare this lesson.</a:t>
+              <a:t>Let us play the bilingual game. I say a word in English, and you give me the French word. Then we do the reverse.</a:t>
             </a:r>
             <a:endParaRPr lang="en-US" dirty="0"/>
           </a:p>
@@ -4624,6 +4628,358 @@
             <a:fld id="{F7021451-1387-4CA6-816F-3879F97B5CBC}" type="slidenum">
               <a:rPr lang="en-US"/>
               <a:t>51</a:t>
+            </a:fld>
+            <a:endParaRPr lang="en-US"/>
+          </a:p>
+        </p:txBody>
+      </p:sp>
+    </p:spTree>
+    <p:extLst>
+      <p:ext uri="{BB962C8B-B14F-4D97-AF65-F5344CB8AC3E}">
+        <p14:creationId xmlns:p14="http://schemas.microsoft.com/office/powerpoint/2010/main" val="1024086991"/>
+      </p:ext>
+    </p:extLst>
+  </p:cSld>
+  <p:clrMapOvr>
+    <a:masterClrMapping/>
+  </p:clrMapOvr>
+</p:notes>
+</file>
+
+<file path=ppt/notesSlides/notesSlide52.xml><?xml version="1.0" encoding="utf-8"?>
+<p:notes xmlns:a="http://schemas.openxmlformats.org/drawingml/2006/main" xmlns:r="http://schemas.openxmlformats.org/officeDocument/2006/relationships" xmlns:p="http://schemas.openxmlformats.org/presentationml/2006/main">
+  <p:cSld>
+    <p:spTree>
+      <p:nvGrpSpPr>
+        <p:cNvPr id="1" name=""/>
+        <p:cNvGrpSpPr/>
+        <p:nvPr/>
+      </p:nvGrpSpPr>
+      <p:grpSpPr>
+        <a:xfrm>
+          <a:off x="0" y="0"/>
+          <a:ext cx="0" cy="0"/>
+          <a:chOff x="0" y="0"/>
+          <a:chExt cx="0" cy="0"/>
+        </a:xfrm>
+      </p:grpSpPr>
+      <p:sp>
+        <p:nvSpPr>
+          <p:cNvPr id="2" name="Slide Image Placeholder 1"/>
+          <p:cNvSpPr>
+            <a:spLocks noGrp="1" noRot="1" noChangeAspect="1"/>
+          </p:cNvSpPr>
+          <p:nvPr>
+            <p:ph type="sldImg"/>
+          </p:nvPr>
+        </p:nvSpPr>
+        <p:spPr/>
+      </p:sp>
+      <p:sp>
+        <p:nvSpPr>
+          <p:cNvPr id="3" name="Notes Placeholder 2"/>
+          <p:cNvSpPr>
+            <a:spLocks noGrp="1"/>
+          </p:cNvSpPr>
+          <p:nvPr>
+            <p:ph type="body" idx="1"/>
+          </p:nvPr>
+        </p:nvSpPr>
+        <p:spPr/>
+        <p:txBody>
+          <a:bodyPr/>
+          <a:lstStyle/>
+          <a:p>
+            <a:r>
+              <a:rPr lang="en-US" dirty="0"/>
+              <a:t>I record this information in the official logbook of the class after the lesson.</a:t>
+            </a:r>
+            <a:endParaRPr lang="en-US" dirty="0"/>
+          </a:p>
+        </p:txBody>
+      </p:sp>
+      <p:sp>
+        <p:nvSpPr>
+          <p:cNvPr id="4" name="Slide Number Placeholder 3"/>
+          <p:cNvSpPr>
+            <a:spLocks noGrp="1"/>
+          </p:cNvSpPr>
+          <p:nvPr>
+            <p:ph type="sldNum" sz="quarter" idx="10"/>
+          </p:nvPr>
+        </p:nvSpPr>
+        <p:spPr/>
+        <p:txBody>
+          <a:bodyPr/>
+          <a:lstStyle/>
+          <a:p>
+            <a:fld id="{F7021451-1387-4CA6-816F-3879F97B5CBC}" type="slidenum">
+              <a:rPr lang="en-US"/>
+              <a:t>52</a:t>
+            </a:fld>
+            <a:endParaRPr lang="en-US"/>
+          </a:p>
+        </p:txBody>
+      </p:sp>
+    </p:spTree>
+    <p:extLst>
+      <p:ext uri="{BB962C8B-B14F-4D97-AF65-F5344CB8AC3E}">
+        <p14:creationId xmlns:p14="http://schemas.microsoft.com/office/powerpoint/2010/main" val="1024086991"/>
+      </p:ext>
+    </p:extLst>
+  </p:cSld>
+  <p:clrMapOvr>
+    <a:masterClrMapping/>
+  </p:clrMapOvr>
+</p:notes>
+</file>
+
+<file path=ppt/notesSlides/notesSlide53.xml><?xml version="1.0" encoding="utf-8"?>
+<p:notes xmlns:a="http://schemas.openxmlformats.org/drawingml/2006/main" xmlns:r="http://schemas.openxmlformats.org/officeDocument/2006/relationships" xmlns:p="http://schemas.openxmlformats.org/presentationml/2006/main">
+  <p:cSld>
+    <p:spTree>
+      <p:nvGrpSpPr>
+        <p:cNvPr id="1" name=""/>
+        <p:cNvGrpSpPr/>
+        <p:nvPr/>
+      </p:nvGrpSpPr>
+      <p:grpSpPr>
+        <a:xfrm>
+          <a:off x="0" y="0"/>
+          <a:ext cx="0" cy="0"/>
+          <a:chOff x="0" y="0"/>
+          <a:chExt cx="0" cy="0"/>
+        </a:xfrm>
+      </p:grpSpPr>
+      <p:sp>
+        <p:nvSpPr>
+          <p:cNvPr id="2" name="Slide Image Placeholder 1"/>
+          <p:cNvSpPr>
+            <a:spLocks noGrp="1" noRot="1" noChangeAspect="1"/>
+          </p:cNvSpPr>
+          <p:nvPr>
+            <p:ph type="sldImg"/>
+          </p:nvPr>
+        </p:nvSpPr>
+        <p:spPr/>
+      </p:sp>
+      <p:sp>
+        <p:nvSpPr>
+          <p:cNvPr id="3" name="Notes Placeholder 2"/>
+          <p:cNvSpPr>
+            <a:spLocks noGrp="1"/>
+          </p:cNvSpPr>
+          <p:nvPr>
+            <p:ph type="body" idx="1"/>
+          </p:nvPr>
+        </p:nvSpPr>
+        <p:spPr/>
+        <p:txBody>
+          <a:bodyPr/>
+          <a:lstStyle/>
+          <a:p>
+            <a:r>
+              <a:rPr lang="en-US" dirty="0"/>
+              <a:t>I complete the second page of the logbook: the matter taught, the evaluation, the homework and the attendance.</a:t>
+            </a:r>
+            <a:endParaRPr lang="en-US" dirty="0"/>
+          </a:p>
+        </p:txBody>
+      </p:sp>
+      <p:sp>
+        <p:nvSpPr>
+          <p:cNvPr id="4" name="Slide Number Placeholder 3"/>
+          <p:cNvSpPr>
+            <a:spLocks noGrp="1"/>
+          </p:cNvSpPr>
+          <p:nvPr>
+            <p:ph type="sldNum" sz="quarter" idx="10"/>
+          </p:nvPr>
+        </p:nvSpPr>
+        <p:spPr/>
+        <p:txBody>
+          <a:bodyPr/>
+          <a:lstStyle/>
+          <a:p>
+            <a:fld id="{F7021451-1387-4CA6-816F-3879F97B5CBC}" type="slidenum">
+              <a:rPr lang="en-US"/>
+              <a:t>53</a:t>
+            </a:fld>
+            <a:endParaRPr lang="en-US"/>
+          </a:p>
+        </p:txBody>
+      </p:sp>
+    </p:spTree>
+    <p:extLst>
+      <p:ext uri="{BB962C8B-B14F-4D97-AF65-F5344CB8AC3E}">
+        <p14:creationId xmlns:p14="http://schemas.microsoft.com/office/powerpoint/2010/main" val="1024086991"/>
+      </p:ext>
+    </p:extLst>
+  </p:cSld>
+  <p:clrMapOvr>
+    <a:masterClrMapping/>
+  </p:clrMapOvr>
+</p:notes>
+</file>
+
+<file path=ppt/notesSlides/notesSlide54.xml><?xml version="1.0" encoding="utf-8"?>
+<p:notes xmlns:a="http://schemas.openxmlformats.org/drawingml/2006/main" xmlns:r="http://schemas.openxmlformats.org/officeDocument/2006/relationships" xmlns:p="http://schemas.openxmlformats.org/presentationml/2006/main">
+  <p:cSld>
+    <p:spTree>
+      <p:nvGrpSpPr>
+        <p:cNvPr id="1" name=""/>
+        <p:cNvGrpSpPr/>
+        <p:nvPr/>
+      </p:nvGrpSpPr>
+      <p:grpSpPr>
+        <a:xfrm>
+          <a:off x="0" y="0"/>
+          <a:ext cx="0" cy="0"/>
+          <a:chOff x="0" y="0"/>
+          <a:chExt cx="0" cy="0"/>
+        </a:xfrm>
+      </p:grpSpPr>
+      <p:sp>
+        <p:nvSpPr>
+          <p:cNvPr id="2" name="Slide Image Placeholder 1"/>
+          <p:cNvSpPr>
+            <a:spLocks noGrp="1" noRot="1" noChangeAspect="1"/>
+          </p:cNvSpPr>
+          <p:nvPr>
+            <p:ph type="sldImg"/>
+          </p:nvPr>
+        </p:nvSpPr>
+        <p:spPr/>
+      </p:sp>
+      <p:sp>
+        <p:nvSpPr>
+          <p:cNvPr id="3" name="Notes Placeholder 2"/>
+          <p:cNvSpPr>
+            <a:spLocks noGrp="1"/>
+          </p:cNvSpPr>
+          <p:nvPr>
+            <p:ph type="body" idx="1"/>
+          </p:nvPr>
+        </p:nvSpPr>
+        <p:spPr/>
+        <p:txBody>
+          <a:bodyPr/>
+          <a:lstStyle/>
+          <a:p>
+            <a:r>
+              <a:rPr lang="en-US" dirty="0"/>
+              <a:t>This slide is for me, the teacher: it gives the timing of the lesson and what to do if the projector is not available.</a:t>
+            </a:r>
+            <a:endParaRPr lang="en-US" dirty="0"/>
+          </a:p>
+        </p:txBody>
+      </p:sp>
+      <p:sp>
+        <p:nvSpPr>
+          <p:cNvPr id="4" name="Slide Number Placeholder 3"/>
+          <p:cNvSpPr>
+            <a:spLocks noGrp="1"/>
+          </p:cNvSpPr>
+          <p:nvPr>
+            <p:ph type="sldNum" sz="quarter" idx="10"/>
+          </p:nvPr>
+        </p:nvSpPr>
+        <p:spPr/>
+        <p:txBody>
+          <a:bodyPr/>
+          <a:lstStyle/>
+          <a:p>
+            <a:fld id="{F7021451-1387-4CA6-816F-3879F97B5CBC}" type="slidenum">
+              <a:rPr lang="en-US"/>
+              <a:t>54</a:t>
+            </a:fld>
+            <a:endParaRPr lang="en-US"/>
+          </a:p>
+        </p:txBody>
+      </p:sp>
+    </p:spTree>
+    <p:extLst>
+      <p:ext uri="{BB962C8B-B14F-4D97-AF65-F5344CB8AC3E}">
+        <p14:creationId xmlns:p14="http://schemas.microsoft.com/office/powerpoint/2010/main" val="1024086991"/>
+      </p:ext>
+    </p:extLst>
+  </p:cSld>
+  <p:clrMapOvr>
+    <a:masterClrMapping/>
+  </p:clrMapOvr>
+</p:notes>
+</file>
+
+<file path=ppt/notesSlides/notesSlide55.xml><?xml version="1.0" encoding="utf-8"?>
+<p:notes xmlns:a="http://schemas.openxmlformats.org/drawingml/2006/main" xmlns:r="http://schemas.openxmlformats.org/officeDocument/2006/relationships" xmlns:p="http://schemas.openxmlformats.org/presentationml/2006/main">
+  <p:cSld>
+    <p:spTree>
+      <p:nvGrpSpPr>
+        <p:cNvPr id="1" name=""/>
+        <p:cNvGrpSpPr/>
+        <p:nvPr/>
+      </p:nvGrpSpPr>
+      <p:grpSpPr>
+        <a:xfrm>
+          <a:off x="0" y="0"/>
+          <a:ext cx="0" cy="0"/>
+          <a:chOff x="0" y="0"/>
+          <a:chExt cx="0" cy="0"/>
+        </a:xfrm>
+      </p:grpSpPr>
+      <p:sp>
+        <p:nvSpPr>
+          <p:cNvPr id="2" name="Slide Image Placeholder 1"/>
+          <p:cNvSpPr>
+            <a:spLocks noGrp="1" noRot="1" noChangeAspect="1"/>
+          </p:cNvSpPr>
+          <p:nvPr>
+            <p:ph type="sldImg"/>
+          </p:nvPr>
+        </p:nvSpPr>
+        <p:spPr/>
+      </p:sp>
+      <p:sp>
+        <p:nvSpPr>
+          <p:cNvPr id="3" name="Notes Placeholder 2"/>
+          <p:cNvSpPr>
+            <a:spLocks noGrp="1"/>
+          </p:cNvSpPr>
+          <p:nvPr>
+            <p:ph type="body" idx="1"/>
+          </p:nvPr>
+        </p:nvSpPr>
+        <p:spPr/>
+        <p:txBody>
+          <a:bodyPr/>
+          <a:lstStyle/>
+          <a:p>
+            <a:r>
+              <a:rPr lang="en-US" dirty="0"/>
+              <a:t>These are the references and picture credits used to prepare this lesson.</a:t>
+            </a:r>
+            <a:endParaRPr lang="en-US" dirty="0"/>
+          </a:p>
+        </p:txBody>
+      </p:sp>
+      <p:sp>
+        <p:nvSpPr>
+          <p:cNvPr id="4" name="Slide Number Placeholder 3"/>
+          <p:cNvSpPr>
+            <a:spLocks noGrp="1"/>
+          </p:cNvSpPr>
+          <p:nvPr>
+            <p:ph type="sldNum" sz="quarter" idx="10"/>
+          </p:nvPr>
+        </p:nvSpPr>
+        <p:spPr/>
+        <p:txBody>
+          <a:bodyPr/>
+          <a:lstStyle/>
+          <a:p>
+            <a:fld id="{F7021451-1387-4CA6-816F-3879F97B5CBC}" type="slidenum">
+              <a:rPr lang="en-US"/>
+              <a:t>55</a:t>
             </a:fld>
             <a:endParaRPr lang="en-US"/>
           </a:p>
@@ -4864,7 +5220,7 @@
           <a:p>
             <a:r>
               <a:rPr lang="en-US" dirty="0"/>
-              <a:t>By the end of this lesson, you should be able to do three things. Number 1: identify products gathered from the wild in Cameroon. Number 2: describe methods of collection. Number 3: explain their socio-cultural and economic importance.</a:t>
+              <a:t>By the end of this lesson, you should be able to do three things. Number 1: identify products gathered from the wild in Cameroon. Number 2: describe the methods of collection and processing. Number 3: explain their socio-cultural and economic importance.</a:t>
             </a:r>
             <a:endParaRPr lang="en-US" dirty="0"/>
           </a:p>
@@ -6332,7 +6688,7 @@
         <p:spPr>
           <a:xfrm>
             <a:off x="0" y="658368"/>
-            <a:ext cx="3840480" cy="5833872"/>
+            <a:ext cx="2468880" cy="5833872"/>
           </a:xfrm>
           <a:prstGeom prst="rect">
             <a:avLst/>
@@ -6347,8 +6703,8 @@
         </p:nvSpPr>
         <p:spPr>
           <a:xfrm>
-            <a:off x="4069080" y="1005840"/>
-            <a:ext cx="7802575" cy="731520"/>
+            <a:off x="2697480" y="1005840"/>
+            <a:ext cx="9174175" cy="731520"/>
           </a:xfrm>
           <a:prstGeom prst="rect">
             <a:avLst/>
@@ -6388,8 +6744,8 @@
         </p:nvSpPr>
         <p:spPr>
           <a:xfrm>
-            <a:off x="4069080" y="1783080"/>
-            <a:ext cx="7802575" cy="4663440"/>
+            <a:off x="2697480" y="1783080"/>
+            <a:ext cx="9174175" cy="4663440"/>
           </a:xfrm>
           <a:prstGeom prst="rect">
             <a:avLst/>
@@ -6416,7 +6772,7 @@
                 <a:ea typeface="Times New Roman" pitchFamily="34" charset="-122"/>
                 <a:cs typeface="Times New Roman" pitchFamily="34" charset="-120"/>
               </a:rPr>
-              <a:t>In the market of Garoua, Aïcha sees eru leaves, njangsa seeds, bush mango, honey and bitter cola that come from the forests of the South. The trader says she earns her living from these products.</a:t>
+              <a:t>In the market of Garoua, Aïcha sees eru leaves, njangsa seeds, bush mango, honey and bitter cola. The trader says that she earns her living from these products. Aïcha asks: "Where do these products come from, and why are they so important?"</a:t>
             </a:r>
             <a:endParaRPr lang="en-US" sz="4000" dirty="0"/>
           </a:p>
@@ -6854,7 +7210,7 @@
                 <a:ea typeface="Times New Roman" pitchFamily="34" charset="-122"/>
                 <a:cs typeface="Times New Roman" pitchFamily="34" charset="-120"/>
               </a:rPr>
-              <a:t>Aïcha wants to know the products gathered from the wild.</a:t>
+              <a:t>Aïcha does not know where these products come from and why they are important.</a:t>
             </a:r>
             <a:endParaRPr lang="en-US" sz="4000" dirty="0"/>
           </a:p>
@@ -7292,7 +7648,7 @@
                 <a:ea typeface="Times New Roman" pitchFamily="34" charset="-122"/>
                 <a:cs typeface="Times New Roman" pitchFamily="34" charset="-120"/>
               </a:rPr>
-              <a:t>Eru, njangsa and bush mango (also bitter cola, honey).</a:t>
+              <a:t>Eru, njangsa and bush mango (also bitter cola and honey).</a:t>
             </a:r>
             <a:endParaRPr lang="en-US" sz="4000" dirty="0"/>
           </a:p>
@@ -8382,7 +8738,7 @@
                 <a:ea typeface="Times New Roman" pitchFamily="34" charset="-122"/>
                 <a:cs typeface="Times New Roman" pitchFamily="34" charset="-120"/>
               </a:rPr>
-              <a:t>Wild products in a market.</a:t>
+              <a:t>Products in a market.</a:t>
             </a:r>
             <a:endParaRPr lang="en-US" sz="1800" dirty="0"/>
           </a:p>
@@ -9196,7 +9552,7 @@
                 <a:ea typeface="Times New Roman" pitchFamily="34" charset="-122"/>
                 <a:cs typeface="Times New Roman" pitchFamily="34" charset="-120"/>
               </a:rPr>
-              <a:t>Name four products gathered from the wild in Cameroon.</a:t>
+              <a:t>Were these products planted by farmers?</a:t>
             </a:r>
             <a:endParaRPr lang="en-US" sz="4000" dirty="0"/>
           </a:p>
@@ -9415,7 +9771,7 @@
                 <a:ea typeface="Times New Roman" pitchFamily="34" charset="-122"/>
                 <a:cs typeface="Times New Roman" pitchFamily="34" charset="-120"/>
               </a:rPr>
-              <a:t>Eru, njangsa, bush mango and bitter cola (also honey, shea nuts, mushrooms).</a:t>
+              <a:t>No, they are gathered from the wild: eru, njangsa, bush mango and bitter cola.</a:t>
             </a:r>
             <a:endParaRPr lang="en-US" sz="4000" dirty="0"/>
           </a:p>
@@ -9629,7 +9985,7 @@
                 <a:ea typeface="Times New Roman" pitchFamily="34" charset="-122"/>
                 <a:cs typeface="Times New Roman" pitchFamily="34" charset="-120"/>
               </a:rPr>
-              <a:t>A shea tree.</a:t>
+              <a:t>A tree of the northern savanna.</a:t>
             </a:r>
             <a:endParaRPr lang="en-US" sz="1800" dirty="0"/>
           </a:p>
@@ -9848,7 +10204,7 @@
                 <a:ea typeface="Times New Roman" pitchFamily="34" charset="-122"/>
                 <a:cs typeface="Times New Roman" pitchFamily="34" charset="-120"/>
               </a:rPr>
-              <a:t>Which wild product of the North is made from the shea tree?</a:t>
+              <a:t>Which product of the North is made from the nuts of this tree?</a:t>
             </a:r>
             <a:endParaRPr lang="en-US" sz="4000" dirty="0"/>
           </a:p>
@@ -10179,7 +10535,7 @@
                 <a:ea typeface="Calibri" pitchFamily="34" charset="-122"/>
                 <a:cs typeface="Calibri" pitchFamily="34" charset="-120"/>
               </a:rPr>
-              <a:t>2. METHODS OF COLLECTION</a:t>
+              <a:t>2. COLLECTION</a:t>
             </a:r>
             <a:endParaRPr lang="en-US" sz="1400" dirty="0"/>
           </a:p>
@@ -10393,7 +10749,7 @@
                 <a:ea typeface="Calibri" pitchFamily="34" charset="-122"/>
                 <a:cs typeface="Calibri" pitchFamily="34" charset="-120"/>
               </a:rPr>
-              <a:t>2. METHODS OF COLLECTION</a:t>
+              <a:t>2. COLLECTION</a:t>
             </a:r>
             <a:endParaRPr lang="en-US" sz="1400" dirty="0"/>
           </a:p>
@@ -10500,7 +10856,7 @@
                 <a:ea typeface="Times New Roman" pitchFamily="34" charset="-122"/>
                 <a:cs typeface="Times New Roman" pitchFamily="34" charset="-120"/>
               </a:rPr>
-              <a:t>How are honey and fruits collected from the wild?</a:t>
+              <a:t>Where do people find wild honey?</a:t>
             </a:r>
             <a:endParaRPr lang="en-US" sz="4000" dirty="0"/>
           </a:p>
@@ -10612,7 +10968,7 @@
                 <a:ea typeface="Calibri" pitchFamily="34" charset="-122"/>
                 <a:cs typeface="Calibri" pitchFamily="34" charset="-120"/>
               </a:rPr>
-              <a:t>2. METHODS OF COLLECTION</a:t>
+              <a:t>2. COLLECTION</a:t>
             </a:r>
             <a:endParaRPr lang="en-US" sz="1400" dirty="0"/>
           </a:p>
@@ -10719,7 +11075,7 @@
                 <a:ea typeface="Times New Roman" pitchFamily="34" charset="-122"/>
                 <a:cs typeface="Times New Roman" pitchFamily="34" charset="-120"/>
               </a:rPr>
-              <a:t>Honey is taken from hives in trees; fruits and nuts are picked from the ground or trees.</a:t>
+              <a:t>In hives of wild bees in trees and rocks.</a:t>
             </a:r>
             <a:endParaRPr lang="en-US" sz="4000" dirty="0"/>
           </a:p>
@@ -11152,7 +11508,7 @@
                 <a:ea typeface="Times New Roman" pitchFamily="34" charset="-122"/>
                 <a:cs typeface="Times New Roman" pitchFamily="34" charset="-120"/>
               </a:rPr>
-              <a:t>How are wild products economically important?</a:t>
+              <a:t>How do wild products help the families that sell them?</a:t>
             </a:r>
             <a:endParaRPr lang="en-US" sz="4000" dirty="0"/>
           </a:p>
@@ -11835,7 +12191,7 @@
                           <a:ea typeface="Calibri" pitchFamily="34" charset="-122"/>
                           <a:cs typeface="Calibri" pitchFamily="34" charset="-120"/>
                         </a:rPr>
-                        <a:t>Non-timber forest products, njangsa, eru, bush mango, bitter cola, gathering.</a:t>
+                        <a:t>Non-timber forest products, gathering.</a:t>
                       </a:r>
                       <a:endParaRPr lang="en-US" sz="1700" dirty="0">
                         <a:latin typeface="Calibri" charset="0"/>
@@ -11973,7 +12329,7 @@
                           <a:ea typeface="Calibri" pitchFamily="34" charset="-122"/>
                           <a:cs typeface="Calibri" pitchFamily="34" charset="-120"/>
                         </a:rPr>
-                        <a:t>Identification of various products (njangsa, eru, bush mango, bitter cola, etc.); methods of collection and processing; socio-cultural and economic importance.</a:t>
+                        <a:t>Identification of various products (njangsa, eru, bush mango, bitter cola, etc.); methods of collection and processing; the socio-cultural and economic importance of these products.</a:t>
                       </a:r>
                       <a:endParaRPr lang="en-US" sz="1700" dirty="0">
                         <a:latin typeface="Calibri" charset="0"/>
@@ -12380,7 +12736,7 @@
                 <a:ea typeface="Times New Roman" pitchFamily="34" charset="-122"/>
                 <a:cs typeface="Times New Roman" pitchFamily="34" charset="-120"/>
               </a:rPr>
-              <a:t>They are sold for income and some, like eru, are exported to Nigeria and Europe.</a:t>
+              <a:t>They give them money to buy food and pay school fees.</a:t>
             </a:r>
             <a:endParaRPr lang="en-US" sz="4000" dirty="0"/>
           </a:p>
@@ -12813,7 +13169,7 @@
                 <a:ea typeface="Times New Roman" pitchFamily="34" charset="-122"/>
                 <a:cs typeface="Times New Roman" pitchFamily="34" charset="-120"/>
               </a:rPr>
-              <a:t>Give one socio-cultural use of wild products.</a:t>
+              <a:t>When are cola nuts and bitter cola shared?</a:t>
             </a:r>
             <a:endParaRPr lang="en-US" sz="4000" dirty="0"/>
           </a:p>
@@ -13032,7 +13388,7 @@
                 <a:ea typeface="Times New Roman" pitchFamily="34" charset="-122"/>
                 <a:cs typeface="Times New Roman" pitchFamily="34" charset="-120"/>
               </a:rPr>
-              <a:t>Bitter cola and cola nuts are shared at ceremonies; many plants are used as traditional medicine.</a:t>
+              <a:t>At ceremonies such as weddings and funerals.</a:t>
             </a:r>
             <a:endParaRPr lang="en-US" sz="4000" dirty="0"/>
           </a:p>
@@ -13426,7 +13782,7 @@
         <p:spPr>
           <a:xfrm>
             <a:off x="0" y="658368"/>
-            <a:ext cx="5120640" cy="5833872"/>
+            <a:ext cx="3840480" cy="5833872"/>
           </a:xfrm>
           <a:prstGeom prst="rect">
             <a:avLst/>
@@ -13441,8 +13797,8 @@
         </p:nvSpPr>
         <p:spPr>
           <a:xfrm>
-            <a:off x="5349240" y="1005840"/>
-            <a:ext cx="6522415" cy="731520"/>
+            <a:off x="4069080" y="1005840"/>
+            <a:ext cx="7802575" cy="731520"/>
           </a:xfrm>
           <a:prstGeom prst="rect">
             <a:avLst/>
@@ -13482,8 +13838,8 @@
         </p:nvSpPr>
         <p:spPr>
           <a:xfrm>
-            <a:off x="5349240" y="1783080"/>
-            <a:ext cx="6522415" cy="4663440"/>
+            <a:off x="4069080" y="1783080"/>
+            <a:ext cx="7802575" cy="4663440"/>
           </a:xfrm>
           <a:prstGeom prst="rect">
             <a:avLst/>
@@ -13548,6 +13904,43 @@
                 <a:cs typeface="Times New Roman" pitchFamily="34" charset="-120"/>
               </a:rPr>
               <a:t>It is a plant or animal product collected from nature without being cultivated.</a:t>
+            </a:r>
+            <a:endParaRPr lang="en-US" sz="4000" dirty="0"/>
+          </a:p>
+          <a:p>
+            <a:pPr algn="l" indent="0" marL="0">
+              <a:spcAft>
+                <a:spcPts val="800"/>
+              </a:spcAft>
+              <a:buNone/>
+            </a:pPr>
+            <a:r>
+              <a:rPr lang="en-US" sz="4000" b="1" dirty="0">
+                <a:solidFill>
+                  <a:srgbClr val="111111"/>
+                </a:solidFill>
+                <a:latin typeface="Times New Roman" pitchFamily="34" charset="0"/>
+                <a:ea typeface="Times New Roman" pitchFamily="34" charset="-122"/>
+                <a:cs typeface="Times New Roman" pitchFamily="34" charset="-120"/>
+              </a:rPr>
+              <a:t>Gathering: </a:t>
+            </a:r>
+            <a:pPr algn="l" indent="0" marL="0">
+              <a:spcAft>
+                <a:spcPts val="800"/>
+              </a:spcAft>
+              <a:buNone/>
+            </a:pPr>
+            <a:r>
+              <a:rPr lang="en-US" sz="4000" dirty="0">
+                <a:solidFill>
+                  <a:srgbClr val="111111"/>
+                </a:solidFill>
+                <a:latin typeface="Times New Roman" pitchFamily="34" charset="0"/>
+                <a:ea typeface="Times New Roman" pitchFamily="34" charset="-122"/>
+                <a:cs typeface="Times New Roman" pitchFamily="34" charset="-120"/>
+              </a:rPr>
+              <a:t>It is the collection of wild products.</a:t>
             </a:r>
             <a:endParaRPr lang="en-US" sz="4000" dirty="0"/>
           </a:p>
@@ -13665,9 +14058,129 @@
           </a:p>
         </p:txBody>
       </p:sp>
+      <p:sp>
+        <p:nvSpPr>
+          <p:cNvPr id="3" name="Text 1"/>
+          <p:cNvSpPr/>
+          <p:nvPr/>
+        </p:nvSpPr>
+        <p:spPr>
+          <a:xfrm>
+            <a:off x="365760" y="1005840"/>
+            <a:ext cx="11460175" cy="731520"/>
+          </a:xfrm>
+          <a:prstGeom prst="rect">
+            <a:avLst/>
+          </a:prstGeom>
+          <a:noFill/>
+          <a:ln/>
+        </p:spPr>
+        <p:txBody>
+          <a:bodyPr wrap="square" lIns="0" tIns="0" rIns="0" bIns="0" rtlCol="0" anchor="ctr">
+            <a:normAutofit/>
+          </a:bodyPr>
+          <a:lstStyle/>
+          <a:p>
+            <a:pPr algn="ctr" indent="0" marL="0">
+              <a:buNone/>
+            </a:pPr>
+            <a:r>
+              <a:rPr lang="en-US" sz="3600" b="1" dirty="0">
+                <a:solidFill>
+                  <a:srgbClr val="990011"/>
+                </a:solidFill>
+                <a:latin typeface="Times New Roman" pitchFamily="34" charset="0"/>
+                <a:ea typeface="Times New Roman" pitchFamily="34" charset="-122"/>
+                <a:cs typeface="Times New Roman" pitchFamily="34" charset="-120"/>
+              </a:rPr>
+              <a:t>1. Identification of the Products</a:t>
+            </a:r>
+            <a:endParaRPr lang="en-US" sz="3600" dirty="0"/>
+          </a:p>
+        </p:txBody>
+      </p:sp>
+      <p:sp>
+        <p:nvSpPr>
+          <p:cNvPr id="4" name="Text 2"/>
+          <p:cNvSpPr/>
+          <p:nvPr/>
+        </p:nvSpPr>
+        <p:spPr>
+          <a:xfrm>
+            <a:off x="365760" y="1783080"/>
+            <a:ext cx="4846320" cy="4617720"/>
+          </a:xfrm>
+          <a:prstGeom prst="rect">
+            <a:avLst/>
+          </a:prstGeom>
+          <a:noFill/>
+          <a:ln/>
+        </p:spPr>
+        <p:txBody>
+          <a:bodyPr wrap="square" lIns="0" tIns="0" rIns="0" bIns="0" rtlCol="0" anchor="t"/>
+          <a:lstStyle/>
+          <a:p>
+            <a:pPr algn="l" indent="0" marL="0">
+              <a:spcAft>
+                <a:spcPts val="800"/>
+              </a:spcAft>
+              <a:buNone/>
+            </a:pPr>
+            <a:r>
+              <a:rPr lang="en-US" sz="3600" i="1" dirty="0">
+                <a:solidFill>
+                  <a:srgbClr val="111111"/>
+                </a:solidFill>
+                <a:latin typeface="Times New Roman" pitchFamily="34" charset="0"/>
+                <a:ea typeface="Times New Roman" pitchFamily="34" charset="-122"/>
+                <a:cs typeface="Times New Roman" pitchFamily="34" charset="-120"/>
+              </a:rPr>
+              <a:t>Cameroon has the following wild products:</a:t>
+            </a:r>
+            <a:endParaRPr lang="en-US" sz="3600" dirty="0"/>
+          </a:p>
+          <a:p>
+            <a:pPr algn="l" indent="0" marL="0">
+              <a:spcAft>
+                <a:spcPts val="800"/>
+              </a:spcAft>
+              <a:buNone/>
+            </a:pPr>
+            <a:r>
+              <a:rPr lang="en-US" sz="3600" b="1" dirty="0">
+                <a:solidFill>
+                  <a:srgbClr val="111111"/>
+                </a:solidFill>
+                <a:latin typeface="Times New Roman" pitchFamily="34" charset="0"/>
+                <a:ea typeface="Times New Roman" pitchFamily="34" charset="-122"/>
+                <a:cs typeface="Times New Roman" pitchFamily="34" charset="-120"/>
+              </a:rPr>
+              <a:t>Eru and njangsa: </a:t>
+            </a:r>
+            <a:pPr algn="l" indent="0" marL="0">
+              <a:spcAft>
+                <a:spcPts val="800"/>
+              </a:spcAft>
+              <a:buNone/>
+            </a:pPr>
+            <a:r>
+              <a:rPr lang="en-US" sz="3600" dirty="0">
+                <a:solidFill>
+                  <a:srgbClr val="111111"/>
+                </a:solidFill>
+                <a:latin typeface="Times New Roman" pitchFamily="34" charset="0"/>
+                <a:ea typeface="Times New Roman" pitchFamily="34" charset="-122"/>
+                <a:cs typeface="Times New Roman" pitchFamily="34" charset="-120"/>
+              </a:rPr>
+              <a:t>Eru is a forest leaf eaten as a vegetable, and njangsa seeds are used to make sauces.</a:t>
+            </a:r>
+            <a:endParaRPr lang="en-US" sz="3600" dirty="0"/>
+          </a:p>
+        </p:txBody>
+      </p:sp>
       <p:pic>
         <p:nvPicPr>
-          <p:cNvPr id="3" name="Image 0" descr="/home/claude/f4/img/minesec_sheet.png">    </p:cNvPr>
+          <p:cNvPr id="5" name="Image 0" descr="/home/claude/f4/img/v2/lsa_herbs.jpg">    </p:cNvPr>
           <p:cNvPicPr>
             <a:picLocks noChangeAspect="1"/>
           </p:cNvPicPr>
@@ -13681,8 +14194,8 @@
         </p:blipFill>
         <p:spPr>
           <a:xfrm>
-            <a:off x="0" y="658368"/>
-            <a:ext cx="3840480" cy="5833872"/>
+            <a:off x="5349240" y="2071212"/>
+            <a:ext cx="6659575" cy="3693983"/>
           </a:xfrm>
           <a:prstGeom prst="rect">
             <a:avLst/>
@@ -13691,14 +14204,14 @@
       </p:pic>
       <p:sp>
         <p:nvSpPr>
-          <p:cNvPr id="4" name="Text 1"/>
+          <p:cNvPr id="6" name="Text 3"/>
           <p:cNvSpPr/>
           <p:nvPr/>
         </p:nvSpPr>
         <p:spPr>
           <a:xfrm>
-            <a:off x="4069080" y="1005840"/>
-            <a:ext cx="7802575" cy="731520"/>
+            <a:off x="5349240" y="6089904"/>
+            <a:ext cx="6659575" cy="347472"/>
           </a:xfrm>
           <a:prstGeom prst="rect">
             <a:avLst/>
@@ -13707,142 +14220,24 @@
           <a:ln/>
         </p:spPr>
         <p:txBody>
-          <a:bodyPr wrap="square" lIns="0" tIns="0" rIns="0" bIns="0" rtlCol="0" anchor="ctr">
-            <a:normAutofit/>
-          </a:bodyPr>
+          <a:bodyPr wrap="square" lIns="0" tIns="0" rIns="0" bIns="0" rtlCol="0" anchor="ctr"/>
           <a:lstStyle/>
           <a:p>
             <a:pPr algn="ctr" indent="0" marL="0">
               <a:buNone/>
             </a:pPr>
             <a:r>
-              <a:rPr lang="en-US" sz="3600" b="1" dirty="0">
-                <a:solidFill>
-                  <a:srgbClr val="990011"/>
+              <a:rPr lang="en-US" sz="1600" i="1" dirty="0">
+                <a:solidFill>
+                  <a:srgbClr val="555555"/>
                 </a:solidFill>
                 <a:latin typeface="Times New Roman" pitchFamily="34" charset="0"/>
                 <a:ea typeface="Times New Roman" pitchFamily="34" charset="-122"/>
                 <a:cs typeface="Times New Roman" pitchFamily="34" charset="-120"/>
               </a:rPr>
-              <a:t>1. Identification</a:t>
-            </a:r>
-            <a:endParaRPr lang="en-US" sz="3600" dirty="0"/>
-          </a:p>
-        </p:txBody>
-      </p:sp>
-      <p:sp>
-        <p:nvSpPr>
-          <p:cNvPr id="5" name="Text 2"/>
-          <p:cNvSpPr/>
-          <p:nvPr/>
-        </p:nvSpPr>
-        <p:spPr>
-          <a:xfrm>
-            <a:off x="4069080" y="1783080"/>
-            <a:ext cx="7802575" cy="4663440"/>
-          </a:xfrm>
-          <a:prstGeom prst="rect">
-            <a:avLst/>
-          </a:prstGeom>
-          <a:noFill/>
-          <a:ln/>
-        </p:spPr>
-        <p:txBody>
-          <a:bodyPr wrap="square" lIns="0" tIns="0" rIns="0" bIns="0" rtlCol="0" anchor="t"/>
-          <a:lstStyle/>
-          <a:p>
-            <a:pPr algn="l" indent="0" marL="0">
-              <a:spcAft>
-                <a:spcPts val="800"/>
-              </a:spcAft>
-              <a:buNone/>
-            </a:pPr>
-            <a:r>
-              <a:rPr lang="en-US" sz="4000" i="1" dirty="0">
-                <a:solidFill>
-                  <a:srgbClr val="111111"/>
-                </a:solidFill>
-                <a:latin typeface="Times New Roman" pitchFamily="34" charset="0"/>
-                <a:ea typeface="Times New Roman" pitchFamily="34" charset="-122"/>
-                <a:cs typeface="Times New Roman" pitchFamily="34" charset="-120"/>
-              </a:rPr>
-              <a:t>Cameroon has the following wild products:</a:t>
-            </a:r>
-            <a:endParaRPr lang="en-US" sz="4000" dirty="0"/>
-          </a:p>
-          <a:p>
-            <a:pPr algn="l" indent="0" marL="0">
-              <a:spcAft>
-                <a:spcPts val="800"/>
-              </a:spcAft>
-              <a:buNone/>
-            </a:pPr>
-            <a:r>
-              <a:rPr lang="en-US" sz="4000" b="1" dirty="0">
-                <a:solidFill>
-                  <a:srgbClr val="111111"/>
-                </a:solidFill>
-                <a:latin typeface="Times New Roman" pitchFamily="34" charset="0"/>
-                <a:ea typeface="Times New Roman" pitchFamily="34" charset="-122"/>
-                <a:cs typeface="Times New Roman" pitchFamily="34" charset="-120"/>
-              </a:rPr>
-              <a:t>Leaves and seeds: </a:t>
-            </a:r>
-            <a:pPr algn="l" indent="0" marL="0">
-              <a:spcAft>
-                <a:spcPts val="800"/>
-              </a:spcAft>
-              <a:buNone/>
-            </a:pPr>
-            <a:r>
-              <a:rPr lang="en-US" sz="4000" dirty="0">
-                <a:solidFill>
-                  <a:srgbClr val="111111"/>
-                </a:solidFill>
-                <a:latin typeface="Times New Roman" pitchFamily="34" charset="0"/>
-                <a:ea typeface="Times New Roman" pitchFamily="34" charset="-122"/>
-                <a:cs typeface="Times New Roman" pitchFamily="34" charset="-120"/>
-              </a:rPr>
-              <a:t>Eru, njangsa and bush mango are used in cooking.</a:t>
-            </a:r>
-            <a:endParaRPr lang="en-US" sz="4000" dirty="0"/>
-          </a:p>
-          <a:p>
-            <a:pPr algn="l" indent="0" marL="0">
-              <a:spcAft>
-                <a:spcPts val="800"/>
-              </a:spcAft>
-              <a:buNone/>
-            </a:pPr>
-            <a:r>
-              <a:rPr lang="en-US" sz="4000" b="1" dirty="0">
-                <a:solidFill>
-                  <a:srgbClr val="111111"/>
-                </a:solidFill>
-                <a:latin typeface="Times New Roman" pitchFamily="34" charset="0"/>
-                <a:ea typeface="Times New Roman" pitchFamily="34" charset="-122"/>
-                <a:cs typeface="Times New Roman" pitchFamily="34" charset="-120"/>
-              </a:rPr>
-              <a:t>Nuts and fruits: </a:t>
-            </a:r>
-            <a:pPr algn="l" indent="0" marL="0">
-              <a:spcAft>
-                <a:spcPts val="800"/>
-              </a:spcAft>
-              <a:buNone/>
-            </a:pPr>
-            <a:r>
-              <a:rPr lang="en-US" sz="4000" dirty="0">
-                <a:solidFill>
-                  <a:srgbClr val="111111"/>
-                </a:solidFill>
-                <a:latin typeface="Times New Roman" pitchFamily="34" charset="0"/>
-                <a:ea typeface="Times New Roman" pitchFamily="34" charset="-122"/>
-                <a:cs typeface="Times New Roman" pitchFamily="34" charset="-120"/>
-              </a:rPr>
-              <a:t>Bitter cola, cola nuts and shea nuts are gathered.</a:t>
-            </a:r>
-            <a:endParaRPr lang="en-US" sz="4000" dirty="0"/>
+              <a:t>Illustration: wild products in a market</a:t>
+            </a:r>
+            <a:endParaRPr lang="en-US" sz="1600" dirty="0"/>
           </a:p>
         </p:txBody>
       </p:sp>
@@ -14017,7 +14412,7 @@
                 <a:ea typeface="Times New Roman" pitchFamily="34" charset="-122"/>
                 <a:cs typeface="Times New Roman" pitchFamily="34" charset="-120"/>
               </a:rPr>
-              <a:t>1. Identification (continued)</a:t>
+              <a:t>1. Identification of the Products</a:t>
             </a:r>
             <a:endParaRPr lang="en-US" sz="3600" dirty="0"/>
           </a:p>
@@ -14059,7 +14454,7 @@
                 <a:ea typeface="Times New Roman" pitchFamily="34" charset="-122"/>
                 <a:cs typeface="Times New Roman" pitchFamily="34" charset="-120"/>
               </a:rPr>
-              <a:t>Other products: </a:t>
+              <a:t>Bush mango and bitter cola: </a:t>
             </a:r>
             <a:pPr algn="l" indent="0" marL="0">
               <a:spcAft>
@@ -14076,7 +14471,7 @@
                 <a:ea typeface="Times New Roman" pitchFamily="34" charset="-122"/>
                 <a:cs typeface="Times New Roman" pitchFamily="34" charset="-120"/>
               </a:rPr>
-              <a:t>Honey, mushrooms, medicinal plants and rattan are also collected.</a:t>
+              <a:t>Bush mango seeds thicken sauces, and bitter cola nuts are chewed.</a:t>
             </a:r>
             <a:endParaRPr lang="en-US" sz="4000" dirty="0"/>
           </a:p>
@@ -14194,9 +14589,109 @@
           </a:p>
         </p:txBody>
       </p:sp>
+      <p:sp>
+        <p:nvSpPr>
+          <p:cNvPr id="3" name="Text 1"/>
+          <p:cNvSpPr/>
+          <p:nvPr/>
+        </p:nvSpPr>
+        <p:spPr>
+          <a:xfrm>
+            <a:off x="365760" y="1005840"/>
+            <a:ext cx="11460175" cy="731520"/>
+          </a:xfrm>
+          <a:prstGeom prst="rect">
+            <a:avLst/>
+          </a:prstGeom>
+          <a:noFill/>
+          <a:ln/>
+        </p:spPr>
+        <p:txBody>
+          <a:bodyPr wrap="square" lIns="0" tIns="0" rIns="0" bIns="0" rtlCol="0" anchor="ctr">
+            <a:normAutofit/>
+          </a:bodyPr>
+          <a:lstStyle/>
+          <a:p>
+            <a:pPr algn="ctr" indent="0" marL="0">
+              <a:buNone/>
+            </a:pPr>
+            <a:r>
+              <a:rPr lang="en-US" sz="3600" b="1" dirty="0">
+                <a:solidFill>
+                  <a:srgbClr val="990011"/>
+                </a:solidFill>
+                <a:latin typeface="Times New Roman" pitchFamily="34" charset="0"/>
+                <a:ea typeface="Times New Roman" pitchFamily="34" charset="-122"/>
+                <a:cs typeface="Times New Roman" pitchFamily="34" charset="-120"/>
+              </a:rPr>
+              <a:t>1. Identification of the Products</a:t>
+            </a:r>
+            <a:endParaRPr lang="en-US" sz="3600" dirty="0"/>
+          </a:p>
+        </p:txBody>
+      </p:sp>
+      <p:sp>
+        <p:nvSpPr>
+          <p:cNvPr id="4" name="Text 2"/>
+          <p:cNvSpPr/>
+          <p:nvPr/>
+        </p:nvSpPr>
+        <p:spPr>
+          <a:xfrm>
+            <a:off x="365760" y="1783080"/>
+            <a:ext cx="4846320" cy="4617720"/>
+          </a:xfrm>
+          <a:prstGeom prst="rect">
+            <a:avLst/>
+          </a:prstGeom>
+          <a:noFill/>
+          <a:ln/>
+        </p:spPr>
+        <p:txBody>
+          <a:bodyPr wrap="square" lIns="0" tIns="0" rIns="0" bIns="0" rtlCol="0" anchor="t"/>
+          <a:lstStyle/>
+          <a:p>
+            <a:pPr algn="l" indent="0" marL="0">
+              <a:spcAft>
+                <a:spcPts val="800"/>
+              </a:spcAft>
+              <a:buNone/>
+            </a:pPr>
+            <a:r>
+              <a:rPr lang="en-US" sz="3600" b="1" dirty="0">
+                <a:solidFill>
+                  <a:srgbClr val="111111"/>
+                </a:solidFill>
+                <a:latin typeface="Times New Roman" pitchFamily="34" charset="0"/>
+                <a:ea typeface="Times New Roman" pitchFamily="34" charset="-122"/>
+                <a:cs typeface="Times New Roman" pitchFamily="34" charset="-120"/>
+              </a:rPr>
+              <a:t>Shea nuts: </a:t>
+            </a:r>
+            <a:pPr algn="l" indent="0" marL="0">
+              <a:spcAft>
+                <a:spcPts val="800"/>
+              </a:spcAft>
+              <a:buNone/>
+            </a:pPr>
+            <a:r>
+              <a:rPr lang="en-US" sz="3600" dirty="0">
+                <a:solidFill>
+                  <a:srgbClr val="111111"/>
+                </a:solidFill>
+                <a:latin typeface="Times New Roman" pitchFamily="34" charset="0"/>
+                <a:ea typeface="Times New Roman" pitchFamily="34" charset="-122"/>
+                <a:cs typeface="Times New Roman" pitchFamily="34" charset="-120"/>
+              </a:rPr>
+              <a:t>They come from the shea tree of the savanna and give shea butter.</a:t>
+            </a:r>
+            <a:endParaRPr lang="en-US" sz="3600" dirty="0"/>
+          </a:p>
+        </p:txBody>
+      </p:sp>
       <p:pic>
         <p:nvPicPr>
-          <p:cNvPr id="3" name="Image 0" descr="/home/claude/f4/img/minesec_sheet.png">    </p:cNvPr>
+          <p:cNvPr id="5" name="Image 0" descr="/home/claude/f4/img/v2/f2t_shea_tree.jpg">    </p:cNvPr>
           <p:cNvPicPr>
             <a:picLocks noChangeAspect="1"/>
           </p:cNvPicPr>
@@ -14210,8 +14705,8 @@
         </p:blipFill>
         <p:spPr>
           <a:xfrm>
-            <a:off x="0" y="658368"/>
-            <a:ext cx="2468880" cy="5833872"/>
+            <a:off x="5349240" y="2071212"/>
+            <a:ext cx="6659575" cy="3693983"/>
           </a:xfrm>
           <a:prstGeom prst="rect">
             <a:avLst/>
@@ -14220,14 +14715,14 @@
       </p:pic>
       <p:sp>
         <p:nvSpPr>
-          <p:cNvPr id="4" name="Text 1"/>
+          <p:cNvPr id="6" name="Text 3"/>
           <p:cNvSpPr/>
           <p:nvPr/>
         </p:nvSpPr>
         <p:spPr>
           <a:xfrm>
-            <a:off x="2697480" y="1005840"/>
-            <a:ext cx="9174175" cy="731520"/>
+            <a:off x="5349240" y="6089904"/>
+            <a:ext cx="6659575" cy="347472"/>
           </a:xfrm>
           <a:prstGeom prst="rect">
             <a:avLst/>
@@ -14236,142 +14731,24 @@
           <a:ln/>
         </p:spPr>
         <p:txBody>
-          <a:bodyPr wrap="square" lIns="0" tIns="0" rIns="0" bIns="0" rtlCol="0" anchor="ctr">
-            <a:normAutofit/>
-          </a:bodyPr>
+          <a:bodyPr wrap="square" lIns="0" tIns="0" rIns="0" bIns="0" rtlCol="0" anchor="ctr"/>
           <a:lstStyle/>
           <a:p>
             <a:pPr algn="ctr" indent="0" marL="0">
               <a:buNone/>
             </a:pPr>
             <a:r>
-              <a:rPr lang="en-US" sz="3600" b="1" dirty="0">
-                <a:solidFill>
-                  <a:srgbClr val="990011"/>
+              <a:rPr lang="en-US" sz="1600" i="1" dirty="0">
+                <a:solidFill>
+                  <a:srgbClr val="555555"/>
                 </a:solidFill>
                 <a:latin typeface="Times New Roman" pitchFamily="34" charset="0"/>
                 <a:ea typeface="Times New Roman" pitchFamily="34" charset="-122"/>
                 <a:cs typeface="Times New Roman" pitchFamily="34" charset="-120"/>
               </a:rPr>
-              <a:t>2. Methods of Collection</a:t>
-            </a:r>
-            <a:endParaRPr lang="en-US" sz="3600" dirty="0"/>
-          </a:p>
-        </p:txBody>
-      </p:sp>
-      <p:sp>
-        <p:nvSpPr>
-          <p:cNvPr id="5" name="Text 2"/>
-          <p:cNvSpPr/>
-          <p:nvPr/>
-        </p:nvSpPr>
-        <p:spPr>
-          <a:xfrm>
-            <a:off x="2697480" y="1783080"/>
-            <a:ext cx="9174175" cy="4663440"/>
-          </a:xfrm>
-          <a:prstGeom prst="rect">
-            <a:avLst/>
-          </a:prstGeom>
-          <a:noFill/>
-          <a:ln/>
-        </p:spPr>
-        <p:txBody>
-          <a:bodyPr wrap="square" lIns="0" tIns="0" rIns="0" bIns="0" rtlCol="0" anchor="t"/>
-          <a:lstStyle/>
-          <a:p>
-            <a:pPr algn="l" indent="0" marL="0">
-              <a:spcAft>
-                <a:spcPts val="800"/>
-              </a:spcAft>
-              <a:buNone/>
-            </a:pPr>
-            <a:r>
-              <a:rPr lang="en-US" sz="4000" i="1" dirty="0">
-                <a:solidFill>
-                  <a:srgbClr val="111111"/>
-                </a:solidFill>
-                <a:latin typeface="Times New Roman" pitchFamily="34" charset="0"/>
-                <a:ea typeface="Times New Roman" pitchFamily="34" charset="-122"/>
-                <a:cs typeface="Times New Roman" pitchFamily="34" charset="-120"/>
-              </a:rPr>
-              <a:t>Wild products are collected in the following ways:</a:t>
-            </a:r>
-            <a:endParaRPr lang="en-US" sz="4000" dirty="0"/>
-          </a:p>
-          <a:p>
-            <a:pPr algn="l" indent="0" marL="0">
-              <a:spcAft>
-                <a:spcPts val="800"/>
-              </a:spcAft>
-              <a:buNone/>
-            </a:pPr>
-            <a:r>
-              <a:rPr lang="en-US" sz="4000" b="1" dirty="0">
-                <a:solidFill>
-                  <a:srgbClr val="111111"/>
-                </a:solidFill>
-                <a:latin typeface="Times New Roman" pitchFamily="34" charset="0"/>
-                <a:ea typeface="Times New Roman" pitchFamily="34" charset="-122"/>
-                <a:cs typeface="Times New Roman" pitchFamily="34" charset="-120"/>
-              </a:rPr>
-              <a:t>Picking: </a:t>
-            </a:r>
-            <a:pPr algn="l" indent="0" marL="0">
-              <a:spcAft>
-                <a:spcPts val="800"/>
-              </a:spcAft>
-              <a:buNone/>
-            </a:pPr>
-            <a:r>
-              <a:rPr lang="en-US" sz="4000" dirty="0">
-                <a:solidFill>
-                  <a:srgbClr val="111111"/>
-                </a:solidFill>
-                <a:latin typeface="Times New Roman" pitchFamily="34" charset="0"/>
-                <a:ea typeface="Times New Roman" pitchFamily="34" charset="-122"/>
-                <a:cs typeface="Times New Roman" pitchFamily="34" charset="-120"/>
-              </a:rPr>
-              <a:t>Fruits, nuts and leaves are picked from trees or the ground.</a:t>
-            </a:r>
-            <a:endParaRPr lang="en-US" sz="4000" dirty="0"/>
-          </a:p>
-          <a:p>
-            <a:pPr algn="l" indent="0" marL="0">
-              <a:spcAft>
-                <a:spcPts val="800"/>
-              </a:spcAft>
-              <a:buNone/>
-            </a:pPr>
-            <a:r>
-              <a:rPr lang="en-US" sz="4000" b="1" dirty="0">
-                <a:solidFill>
-                  <a:srgbClr val="111111"/>
-                </a:solidFill>
-                <a:latin typeface="Times New Roman" pitchFamily="34" charset="0"/>
-                <a:ea typeface="Times New Roman" pitchFamily="34" charset="-122"/>
-                <a:cs typeface="Times New Roman" pitchFamily="34" charset="-120"/>
-              </a:rPr>
-              <a:t>Processing: </a:t>
-            </a:r>
-            <a:pPr algn="l" indent="0" marL="0">
-              <a:spcAft>
-                <a:spcPts val="800"/>
-              </a:spcAft>
-              <a:buNone/>
-            </a:pPr>
-            <a:r>
-              <a:rPr lang="en-US" sz="4000" dirty="0">
-                <a:solidFill>
-                  <a:srgbClr val="111111"/>
-                </a:solidFill>
-                <a:latin typeface="Times New Roman" pitchFamily="34" charset="0"/>
-                <a:ea typeface="Times New Roman" pitchFamily="34" charset="-122"/>
-                <a:cs typeface="Times New Roman" pitchFamily="34" charset="-120"/>
-              </a:rPr>
-              <a:t>Products are dried, cracked or pressed, as shea nuts are made into butter.</a:t>
-            </a:r>
-            <a:endParaRPr lang="en-US" sz="4000" dirty="0"/>
+              <a:t>Illustration: a shea tree</a:t>
+            </a:r>
+            <a:endParaRPr lang="en-US" sz="1600" dirty="0"/>
           </a:p>
         </p:txBody>
       </p:sp>
@@ -14487,9 +14864,109 @@
           </a:p>
         </p:txBody>
       </p:sp>
+      <p:sp>
+        <p:nvSpPr>
+          <p:cNvPr id="3" name="Text 1"/>
+          <p:cNvSpPr/>
+          <p:nvPr/>
+        </p:nvSpPr>
+        <p:spPr>
+          <a:xfrm>
+            <a:off x="365760" y="1005840"/>
+            <a:ext cx="11460175" cy="731520"/>
+          </a:xfrm>
+          <a:prstGeom prst="rect">
+            <a:avLst/>
+          </a:prstGeom>
+          <a:noFill/>
+          <a:ln/>
+        </p:spPr>
+        <p:txBody>
+          <a:bodyPr wrap="square" lIns="0" tIns="0" rIns="0" bIns="0" rtlCol="0" anchor="ctr">
+            <a:normAutofit/>
+          </a:bodyPr>
+          <a:lstStyle/>
+          <a:p>
+            <a:pPr algn="ctr" indent="0" marL="0">
+              <a:buNone/>
+            </a:pPr>
+            <a:r>
+              <a:rPr lang="en-US" sz="3600" b="1" dirty="0">
+                <a:solidFill>
+                  <a:srgbClr val="990011"/>
+                </a:solidFill>
+                <a:latin typeface="Times New Roman" pitchFamily="34" charset="0"/>
+                <a:ea typeface="Times New Roman" pitchFamily="34" charset="-122"/>
+                <a:cs typeface="Times New Roman" pitchFamily="34" charset="-120"/>
+              </a:rPr>
+              <a:t>1. Identification of the Products</a:t>
+            </a:r>
+            <a:endParaRPr lang="en-US" sz="3600" dirty="0"/>
+          </a:p>
+        </p:txBody>
+      </p:sp>
+      <p:sp>
+        <p:nvSpPr>
+          <p:cNvPr id="4" name="Text 2"/>
+          <p:cNvSpPr/>
+          <p:nvPr/>
+        </p:nvSpPr>
+        <p:spPr>
+          <a:xfrm>
+            <a:off x="365760" y="1783080"/>
+            <a:ext cx="4846320" cy="4617720"/>
+          </a:xfrm>
+          <a:prstGeom prst="rect">
+            <a:avLst/>
+          </a:prstGeom>
+          <a:noFill/>
+          <a:ln/>
+        </p:spPr>
+        <p:txBody>
+          <a:bodyPr wrap="square" lIns="0" tIns="0" rIns="0" bIns="0" rtlCol="0" anchor="t"/>
+          <a:lstStyle/>
+          <a:p>
+            <a:pPr algn="l" indent="0" marL="0">
+              <a:spcAft>
+                <a:spcPts val="800"/>
+              </a:spcAft>
+              <a:buNone/>
+            </a:pPr>
+            <a:r>
+              <a:rPr lang="en-US" sz="3600" b="1" dirty="0">
+                <a:solidFill>
+                  <a:srgbClr val="111111"/>
+                </a:solidFill>
+                <a:latin typeface="Times New Roman" pitchFamily="34" charset="0"/>
+                <a:ea typeface="Times New Roman" pitchFamily="34" charset="-122"/>
+                <a:cs typeface="Times New Roman" pitchFamily="34" charset="-120"/>
+              </a:rPr>
+              <a:t>Honey and medicinal plants: </a:t>
+            </a:r>
+            <a:pPr algn="l" indent="0" marL="0">
+              <a:spcAft>
+                <a:spcPts val="800"/>
+              </a:spcAft>
+              <a:buNone/>
+            </a:pPr>
+            <a:r>
+              <a:rPr lang="en-US" sz="3600" dirty="0">
+                <a:solidFill>
+                  <a:srgbClr val="111111"/>
+                </a:solidFill>
+                <a:latin typeface="Times New Roman" pitchFamily="34" charset="0"/>
+                <a:ea typeface="Times New Roman" pitchFamily="34" charset="-122"/>
+                <a:cs typeface="Times New Roman" pitchFamily="34" charset="-120"/>
+              </a:rPr>
+              <a:t>Honey, mushrooms, barks and roots are also gathered.</a:t>
+            </a:r>
+            <a:endParaRPr lang="en-US" sz="3600" dirty="0"/>
+          </a:p>
+        </p:txBody>
+      </p:sp>
       <p:pic>
         <p:nvPicPr>
-          <p:cNvPr id="3" name="Image 0" descr="/home/claude/f4/img/minesec_sheet.png">    </p:cNvPr>
+          <p:cNvPr id="5" name="Image 0" descr="/home/claude/f4/img/v2/lsa_bee.jpg">    </p:cNvPr>
           <p:cNvPicPr>
             <a:picLocks noChangeAspect="1"/>
           </p:cNvPicPr>
@@ -14503,8 +14980,8 @@
         </p:blipFill>
         <p:spPr>
           <a:xfrm>
-            <a:off x="0" y="658368"/>
-            <a:ext cx="1463040" cy="5833872"/>
+            <a:off x="5349240" y="2071212"/>
+            <a:ext cx="6659575" cy="3693983"/>
           </a:xfrm>
           <a:prstGeom prst="rect">
             <a:avLst/>
@@ -14513,14 +14990,14 @@
       </p:pic>
       <p:sp>
         <p:nvSpPr>
-          <p:cNvPr id="4" name="Text 1"/>
+          <p:cNvPr id="6" name="Text 3"/>
           <p:cNvSpPr/>
           <p:nvPr/>
         </p:nvSpPr>
         <p:spPr>
           <a:xfrm>
-            <a:off x="1691640" y="1005840"/>
-            <a:ext cx="10180015" cy="731520"/>
+            <a:off x="5349240" y="6089904"/>
+            <a:ext cx="6659575" cy="347472"/>
           </a:xfrm>
           <a:prstGeom prst="rect">
             <a:avLst/>
@@ -14529,142 +15006,24 @@
           <a:ln/>
         </p:spPr>
         <p:txBody>
-          <a:bodyPr wrap="square" lIns="0" tIns="0" rIns="0" bIns="0" rtlCol="0" anchor="ctr">
-            <a:normAutofit/>
-          </a:bodyPr>
+          <a:bodyPr wrap="square" lIns="0" tIns="0" rIns="0" bIns="0" rtlCol="0" anchor="ctr"/>
           <a:lstStyle/>
           <a:p>
             <a:pPr algn="ctr" indent="0" marL="0">
               <a:buNone/>
             </a:pPr>
             <a:r>
-              <a:rPr lang="en-US" sz="3600" b="1" dirty="0">
-                <a:solidFill>
-                  <a:srgbClr val="990011"/>
+              <a:rPr lang="en-US" sz="1600" i="1" dirty="0">
+                <a:solidFill>
+                  <a:srgbClr val="555555"/>
                 </a:solidFill>
                 <a:latin typeface="Times New Roman" pitchFamily="34" charset="0"/>
                 <a:ea typeface="Times New Roman" pitchFamily="34" charset="-122"/>
                 <a:cs typeface="Times New Roman" pitchFamily="34" charset="-120"/>
               </a:rPr>
-              <a:t>3. Importance</a:t>
-            </a:r>
-            <a:endParaRPr lang="en-US" sz="3600" dirty="0"/>
-          </a:p>
-        </p:txBody>
-      </p:sp>
-      <p:sp>
-        <p:nvSpPr>
-          <p:cNvPr id="5" name="Text 2"/>
-          <p:cNvSpPr/>
-          <p:nvPr/>
-        </p:nvSpPr>
-        <p:spPr>
-          <a:xfrm>
-            <a:off x="1691640" y="1783080"/>
-            <a:ext cx="10180015" cy="4663440"/>
-          </a:xfrm>
-          <a:prstGeom prst="rect">
-            <a:avLst/>
-          </a:prstGeom>
-          <a:noFill/>
-          <a:ln/>
-        </p:spPr>
-        <p:txBody>
-          <a:bodyPr wrap="square" lIns="0" tIns="0" rIns="0" bIns="0" rtlCol="0" anchor="t"/>
-          <a:lstStyle/>
-          <a:p>
-            <a:pPr algn="l" indent="0" marL="0">
-              <a:spcAft>
-                <a:spcPts val="800"/>
-              </a:spcAft>
-              <a:buNone/>
-            </a:pPr>
-            <a:r>
-              <a:rPr lang="en-US" sz="4000" i="1" dirty="0">
-                <a:solidFill>
-                  <a:srgbClr val="111111"/>
-                </a:solidFill>
-                <a:latin typeface="Times New Roman" pitchFamily="34" charset="0"/>
-                <a:ea typeface="Times New Roman" pitchFamily="34" charset="-122"/>
-                <a:cs typeface="Times New Roman" pitchFamily="34" charset="-120"/>
-              </a:rPr>
-              <a:t>Wild products are important in the following ways:</a:t>
-            </a:r>
-            <a:endParaRPr lang="en-US" sz="4000" dirty="0"/>
-          </a:p>
-          <a:p>
-            <a:pPr algn="l" indent="0" marL="0">
-              <a:spcAft>
-                <a:spcPts val="800"/>
-              </a:spcAft>
-              <a:buNone/>
-            </a:pPr>
-            <a:r>
-              <a:rPr lang="en-US" sz="4000" b="1" dirty="0">
-                <a:solidFill>
-                  <a:srgbClr val="111111"/>
-                </a:solidFill>
-                <a:latin typeface="Times New Roman" pitchFamily="34" charset="0"/>
-                <a:ea typeface="Times New Roman" pitchFamily="34" charset="-122"/>
-                <a:cs typeface="Times New Roman" pitchFamily="34" charset="-120"/>
-              </a:rPr>
-              <a:t>Economic importance: </a:t>
-            </a:r>
-            <a:pPr algn="l" indent="0" marL="0">
-              <a:spcAft>
-                <a:spcPts val="800"/>
-              </a:spcAft>
-              <a:buNone/>
-            </a:pPr>
-            <a:r>
-              <a:rPr lang="en-US" sz="4000" dirty="0">
-                <a:solidFill>
-                  <a:srgbClr val="111111"/>
-                </a:solidFill>
-                <a:latin typeface="Times New Roman" pitchFamily="34" charset="0"/>
-                <a:ea typeface="Times New Roman" pitchFamily="34" charset="-122"/>
-                <a:cs typeface="Times New Roman" pitchFamily="34" charset="-120"/>
-              </a:rPr>
-              <a:t>They give income to gatherers and traders and some are exported.</a:t>
-            </a:r>
-            <a:endParaRPr lang="en-US" sz="4000" dirty="0"/>
-          </a:p>
-          <a:p>
-            <a:pPr algn="l" indent="0" marL="0">
-              <a:spcAft>
-                <a:spcPts val="800"/>
-              </a:spcAft>
-              <a:buNone/>
-            </a:pPr>
-            <a:r>
-              <a:rPr lang="en-US" sz="4000" b="1" dirty="0">
-                <a:solidFill>
-                  <a:srgbClr val="111111"/>
-                </a:solidFill>
-                <a:latin typeface="Times New Roman" pitchFamily="34" charset="0"/>
-                <a:ea typeface="Times New Roman" pitchFamily="34" charset="-122"/>
-                <a:cs typeface="Times New Roman" pitchFamily="34" charset="-120"/>
-              </a:rPr>
-              <a:t>Socio-cultural importance: </a:t>
-            </a:r>
-            <a:pPr algn="l" indent="0" marL="0">
-              <a:spcAft>
-                <a:spcPts val="800"/>
-              </a:spcAft>
-              <a:buNone/>
-            </a:pPr>
-            <a:r>
-              <a:rPr lang="en-US" sz="4000" dirty="0">
-                <a:solidFill>
-                  <a:srgbClr val="111111"/>
-                </a:solidFill>
-                <a:latin typeface="Times New Roman" pitchFamily="34" charset="0"/>
-                <a:ea typeface="Times New Roman" pitchFamily="34" charset="-122"/>
-                <a:cs typeface="Times New Roman" pitchFamily="34" charset="-120"/>
-              </a:rPr>
-              <a:t>They are used in food, ceremonies and traditional medicine.</a:t>
-            </a:r>
-            <a:endParaRPr lang="en-US" sz="4000" dirty="0"/>
+              <a:t>Illustration: a bee</a:t>
+            </a:r>
+            <a:endParaRPr lang="en-US" sz="1600" dirty="0"/>
           </a:p>
         </p:txBody>
       </p:sp>
@@ -15013,7 +15372,7 @@
                 <a:ea typeface="Calibri" pitchFamily="34" charset="-122"/>
                 <a:cs typeface="Calibri" pitchFamily="34" charset="-120"/>
               </a:rPr>
-              <a:t>FORMATIVE EVALUATION</a:t>
+              <a:t>BOARD SUMMARY</a:t>
             </a:r>
             <a:endParaRPr lang="en-US" sz="1400" dirty="0"/>
           </a:p>
@@ -15036,7 +15395,7 @@
         <p:spPr>
           <a:xfrm>
             <a:off x="0" y="658368"/>
-            <a:ext cx="5120640" cy="5833872"/>
+            <a:ext cx="3840480" cy="5833872"/>
           </a:xfrm>
           <a:prstGeom prst="rect">
             <a:avLst/>
@@ -15051,8 +15410,8 @@
         </p:nvSpPr>
         <p:spPr>
           <a:xfrm>
-            <a:off x="5349240" y="1005840"/>
-            <a:ext cx="6522415" cy="731520"/>
+            <a:off x="4069080" y="1005840"/>
+            <a:ext cx="7802575" cy="731520"/>
           </a:xfrm>
           <a:prstGeom prst="rect">
             <a:avLst/>
@@ -15078,7 +15437,7 @@
                 <a:ea typeface="Times New Roman" pitchFamily="34" charset="-122"/>
                 <a:cs typeface="Times New Roman" pitchFamily="34" charset="-120"/>
               </a:rPr>
-              <a:t>Evaluation 1</a:t>
+              <a:t>2. Methods of Collection and Processing</a:t>
             </a:r>
             <a:endParaRPr lang="en-US" sz="3600" dirty="0"/>
           </a:p>
@@ -15092,8 +15451,8 @@
         </p:nvSpPr>
         <p:spPr>
           <a:xfrm>
-            <a:off x="5349240" y="1783080"/>
-            <a:ext cx="6522415" cy="4663440"/>
+            <a:off x="4069080" y="1783080"/>
+            <a:ext cx="7802575" cy="4663440"/>
           </a:xfrm>
           <a:prstGeom prst="rect">
             <a:avLst/>
@@ -15112,7 +15471,7 @@
               <a:buNone/>
             </a:pPr>
             <a:r>
-              <a:rPr lang="en-US" sz="4000" dirty="0">
+              <a:rPr lang="en-US" sz="4000" i="1" dirty="0">
                 <a:solidFill>
                   <a:srgbClr val="111111"/>
                 </a:solidFill>
@@ -15120,7 +15479,81 @@
                 <a:ea typeface="Times New Roman" pitchFamily="34" charset="-122"/>
                 <a:cs typeface="Times New Roman" pitchFamily="34" charset="-120"/>
               </a:rPr>
-              <a:t>Name four wild products of Cameroon.</a:t>
+              <a:t>Wild products are collected and processed in the following ways:</a:t>
+            </a:r>
+            <a:endParaRPr lang="en-US" sz="4000" dirty="0"/>
+          </a:p>
+          <a:p>
+            <a:pPr algn="l" indent="0" marL="0">
+              <a:spcAft>
+                <a:spcPts val="800"/>
+              </a:spcAft>
+              <a:buNone/>
+            </a:pPr>
+            <a:r>
+              <a:rPr lang="en-US" sz="4000" b="1" dirty="0">
+                <a:solidFill>
+                  <a:srgbClr val="111111"/>
+                </a:solidFill>
+                <a:latin typeface="Times New Roman" pitchFamily="34" charset="0"/>
+                <a:ea typeface="Times New Roman" pitchFamily="34" charset="-122"/>
+                <a:cs typeface="Times New Roman" pitchFamily="34" charset="-120"/>
+              </a:rPr>
+              <a:t>Picking: </a:t>
+            </a:r>
+            <a:pPr algn="l" indent="0" marL="0">
+              <a:spcAft>
+                <a:spcPts val="800"/>
+              </a:spcAft>
+              <a:buNone/>
+            </a:pPr>
+            <a:r>
+              <a:rPr lang="en-US" sz="4000" dirty="0">
+                <a:solidFill>
+                  <a:srgbClr val="111111"/>
+                </a:solidFill>
+                <a:latin typeface="Times New Roman" pitchFamily="34" charset="0"/>
+                <a:ea typeface="Times New Roman" pitchFamily="34" charset="-122"/>
+                <a:cs typeface="Times New Roman" pitchFamily="34" charset="-120"/>
+              </a:rPr>
+              <a:t>Fruits, nuts and leaves are picked from trees or from the ground.</a:t>
+            </a:r>
+            <a:endParaRPr lang="en-US" sz="4000" dirty="0"/>
+          </a:p>
+          <a:p>
+            <a:pPr algn="l" indent="0" marL="0">
+              <a:spcAft>
+                <a:spcPts val="800"/>
+              </a:spcAft>
+              <a:buNone/>
+            </a:pPr>
+            <a:r>
+              <a:rPr lang="en-US" sz="4000" b="1" dirty="0">
+                <a:solidFill>
+                  <a:srgbClr val="111111"/>
+                </a:solidFill>
+                <a:latin typeface="Times New Roman" pitchFamily="34" charset="0"/>
+                <a:ea typeface="Times New Roman" pitchFamily="34" charset="-122"/>
+                <a:cs typeface="Times New Roman" pitchFamily="34" charset="-120"/>
+              </a:rPr>
+              <a:t>Harvesting honey: </a:t>
+            </a:r>
+            <a:pPr algn="l" indent="0" marL="0">
+              <a:spcAft>
+                <a:spcPts val="800"/>
+              </a:spcAft>
+              <a:buNone/>
+            </a:pPr>
+            <a:r>
+              <a:rPr lang="en-US" sz="4000" dirty="0">
+                <a:solidFill>
+                  <a:srgbClr val="111111"/>
+                </a:solidFill>
+                <a:latin typeface="Times New Roman" pitchFamily="34" charset="0"/>
+                <a:ea typeface="Times New Roman" pitchFamily="34" charset="-122"/>
+                <a:cs typeface="Times New Roman" pitchFamily="34" charset="-120"/>
+              </a:rPr>
+              <a:t>Honey is taken from wild hives, often with smoke.</a:t>
             </a:r>
             <a:endParaRPr lang="en-US" sz="4000" dirty="0"/>
           </a:p>
@@ -15232,7 +15665,7 @@
                 <a:ea typeface="Calibri" pitchFamily="34" charset="-122"/>
                 <a:cs typeface="Calibri" pitchFamily="34" charset="-120"/>
               </a:rPr>
-              <a:t>FORMATIVE EVALUATION</a:t>
+              <a:t>BOARD SUMMARY</a:t>
             </a:r>
             <a:endParaRPr lang="en-US" sz="1400" dirty="0"/>
           </a:p>
@@ -15297,7 +15730,7 @@
                 <a:ea typeface="Times New Roman" pitchFamily="34" charset="-122"/>
                 <a:cs typeface="Times New Roman" pitchFamily="34" charset="-120"/>
               </a:rPr>
-              <a:t>Expected Answer</a:t>
+              <a:t>2. Methods of Collection and Processing (continued)</a:t>
             </a:r>
             <a:endParaRPr lang="en-US" sz="3600" dirty="0"/>
           </a:p>
@@ -15331,7 +15764,7 @@
               <a:buNone/>
             </a:pPr>
             <a:r>
-              <a:rPr lang="en-US" sz="4000" dirty="0">
+              <a:rPr lang="en-US" sz="4000" b="1" dirty="0">
                 <a:solidFill>
                   <a:srgbClr val="111111"/>
                 </a:solidFill>
@@ -15339,7 +15772,61 @@
                 <a:ea typeface="Times New Roman" pitchFamily="34" charset="-122"/>
                 <a:cs typeface="Times New Roman" pitchFamily="34" charset="-120"/>
               </a:rPr>
-              <a:t>Eru, njangsa, bush mango and bitter cola.</a:t>
+              <a:t>Drying and cracking: </a:t>
+            </a:r>
+            <a:pPr algn="l" indent="0" marL="0">
+              <a:spcAft>
+                <a:spcPts val="800"/>
+              </a:spcAft>
+              <a:buNone/>
+            </a:pPr>
+            <a:r>
+              <a:rPr lang="en-US" sz="4000" dirty="0">
+                <a:solidFill>
+                  <a:srgbClr val="111111"/>
+                </a:solidFill>
+                <a:latin typeface="Times New Roman" pitchFamily="34" charset="0"/>
+                <a:ea typeface="Times New Roman" pitchFamily="34" charset="-122"/>
+                <a:cs typeface="Times New Roman" pitchFamily="34" charset="-120"/>
+              </a:rPr>
+              <a:t>Seeds and nuts are dried and cracked to remove the kernels.</a:t>
+            </a:r>
+            <a:endParaRPr lang="en-US" sz="4000" dirty="0"/>
+          </a:p>
+          <a:p>
+            <a:pPr algn="l" indent="0" marL="0">
+              <a:spcAft>
+                <a:spcPts val="800"/>
+              </a:spcAft>
+              <a:buNone/>
+            </a:pPr>
+            <a:r>
+              <a:rPr lang="en-US" sz="4000" b="1" dirty="0">
+                <a:solidFill>
+                  <a:srgbClr val="111111"/>
+                </a:solidFill>
+                <a:latin typeface="Times New Roman" pitchFamily="34" charset="0"/>
+                <a:ea typeface="Times New Roman" pitchFamily="34" charset="-122"/>
+                <a:cs typeface="Times New Roman" pitchFamily="34" charset="-120"/>
+              </a:rPr>
+              <a:t>Pressing and boiling: </a:t>
+            </a:r>
+            <a:pPr algn="l" indent="0" marL="0">
+              <a:spcAft>
+                <a:spcPts val="800"/>
+              </a:spcAft>
+              <a:buNone/>
+            </a:pPr>
+            <a:r>
+              <a:rPr lang="en-US" sz="4000" dirty="0">
+                <a:solidFill>
+                  <a:srgbClr val="111111"/>
+                </a:solidFill>
+                <a:latin typeface="Times New Roman" pitchFamily="34" charset="0"/>
+                <a:ea typeface="Times New Roman" pitchFamily="34" charset="-122"/>
+                <a:cs typeface="Times New Roman" pitchFamily="34" charset="-120"/>
+              </a:rPr>
+              <a:t>Shea nuts are crushed and boiled to make butter.</a:t>
             </a:r>
             <a:endParaRPr lang="en-US" sz="4000" dirty="0"/>
           </a:p>
@@ -15451,15 +15938,135 @@
                 <a:ea typeface="Calibri" pitchFamily="34" charset="-122"/>
                 <a:cs typeface="Calibri" pitchFamily="34" charset="-120"/>
               </a:rPr>
-              <a:t>FORMATIVE EVALUATION</a:t>
+              <a:t>BOARD SUMMARY</a:t>
             </a:r>
             <a:endParaRPr lang="en-US" sz="1400" dirty="0"/>
+          </a:p>
+        </p:txBody>
+      </p:sp>
+      <p:sp>
+        <p:nvSpPr>
+          <p:cNvPr id="3" name="Text 1"/>
+          <p:cNvSpPr/>
+          <p:nvPr/>
+        </p:nvSpPr>
+        <p:spPr>
+          <a:xfrm>
+            <a:off x="365760" y="1005840"/>
+            <a:ext cx="11460175" cy="731520"/>
+          </a:xfrm>
+          <a:prstGeom prst="rect">
+            <a:avLst/>
+          </a:prstGeom>
+          <a:noFill/>
+          <a:ln/>
+        </p:spPr>
+        <p:txBody>
+          <a:bodyPr wrap="square" lIns="0" tIns="0" rIns="0" bIns="0" rtlCol="0" anchor="ctr">
+            <a:normAutofit/>
+          </a:bodyPr>
+          <a:lstStyle/>
+          <a:p>
+            <a:pPr algn="ctr" indent="0" marL="0">
+              <a:buNone/>
+            </a:pPr>
+            <a:r>
+              <a:rPr lang="en-US" sz="3600" b="1" dirty="0">
+                <a:solidFill>
+                  <a:srgbClr val="990011"/>
+                </a:solidFill>
+                <a:latin typeface="Times New Roman" pitchFamily="34" charset="0"/>
+                <a:ea typeface="Times New Roman" pitchFamily="34" charset="-122"/>
+                <a:cs typeface="Times New Roman" pitchFamily="34" charset="-120"/>
+              </a:rPr>
+              <a:t>3. Socio-cultural and Economic Importance</a:t>
+            </a:r>
+            <a:endParaRPr lang="en-US" sz="3600" dirty="0"/>
+          </a:p>
+        </p:txBody>
+      </p:sp>
+      <p:sp>
+        <p:nvSpPr>
+          <p:cNvPr id="4" name="Text 2"/>
+          <p:cNvSpPr/>
+          <p:nvPr/>
+        </p:nvSpPr>
+        <p:spPr>
+          <a:xfrm>
+            <a:off x="365760" y="1783080"/>
+            <a:ext cx="4846320" cy="4617720"/>
+          </a:xfrm>
+          <a:prstGeom prst="rect">
+            <a:avLst/>
+          </a:prstGeom>
+          <a:noFill/>
+          <a:ln/>
+        </p:spPr>
+        <p:txBody>
+          <a:bodyPr wrap="square" lIns="0" tIns="0" rIns="0" bIns="0" rtlCol="0" anchor="t"/>
+          <a:lstStyle/>
+          <a:p>
+            <a:pPr algn="l" indent="0" marL="0">
+              <a:spcAft>
+                <a:spcPts val="800"/>
+              </a:spcAft>
+              <a:buNone/>
+            </a:pPr>
+            <a:r>
+              <a:rPr lang="en-US" sz="3600" i="1" dirty="0">
+                <a:solidFill>
+                  <a:srgbClr val="111111"/>
+                </a:solidFill>
+                <a:latin typeface="Times New Roman" pitchFamily="34" charset="0"/>
+                <a:ea typeface="Times New Roman" pitchFamily="34" charset="-122"/>
+                <a:cs typeface="Times New Roman" pitchFamily="34" charset="-120"/>
+              </a:rPr>
+              <a:t>Wild products are important in the following ways:</a:t>
+            </a:r>
+            <a:endParaRPr lang="en-US" sz="3600" dirty="0"/>
+          </a:p>
+          <a:p>
+            <a:pPr algn="l" indent="0" marL="0">
+              <a:spcAft>
+                <a:spcPts val="800"/>
+              </a:spcAft>
+              <a:buNone/>
+            </a:pPr>
+            <a:r>
+              <a:rPr lang="en-US" sz="3600" b="1" dirty="0">
+                <a:solidFill>
+                  <a:srgbClr val="111111"/>
+                </a:solidFill>
+                <a:latin typeface="Times New Roman" pitchFamily="34" charset="0"/>
+                <a:ea typeface="Times New Roman" pitchFamily="34" charset="-122"/>
+                <a:cs typeface="Times New Roman" pitchFamily="34" charset="-120"/>
+              </a:rPr>
+              <a:t>Income: </a:t>
+            </a:r>
+            <a:pPr algn="l" indent="0" marL="0">
+              <a:spcAft>
+                <a:spcPts val="800"/>
+              </a:spcAft>
+              <a:buNone/>
+            </a:pPr>
+            <a:r>
+              <a:rPr lang="en-US" sz="3600" dirty="0">
+                <a:solidFill>
+                  <a:srgbClr val="111111"/>
+                </a:solidFill>
+                <a:latin typeface="Times New Roman" pitchFamily="34" charset="0"/>
+                <a:ea typeface="Times New Roman" pitchFamily="34" charset="-122"/>
+                <a:cs typeface="Times New Roman" pitchFamily="34" charset="-120"/>
+              </a:rPr>
+              <a:t>They give money to gatherers and traders.</a:t>
+            </a:r>
+            <a:endParaRPr lang="en-US" sz="3600" dirty="0"/>
           </a:p>
         </p:txBody>
       </p:sp>
       <p:pic>
         <p:nvPicPr>
-          <p:cNvPr id="3" name="Image 0" descr="/home/claude/f4/img/minesec_sheet.png">    </p:cNvPr>
+          <p:cNvPr id="5" name="Image 0" descr="/home/claude/f4/img/v2/f2t_market.jpg">    </p:cNvPr>
           <p:cNvPicPr>
             <a:picLocks noChangeAspect="1"/>
           </p:cNvPicPr>
@@ -15473,8 +16080,8 @@
         </p:blipFill>
         <p:spPr>
           <a:xfrm>
-            <a:off x="0" y="658368"/>
-            <a:ext cx="5120640" cy="5833872"/>
+            <a:off x="5349240" y="2071212"/>
+            <a:ext cx="6659575" cy="3693983"/>
           </a:xfrm>
           <a:prstGeom prst="rect">
             <a:avLst/>
@@ -15483,14 +16090,14 @@
       </p:pic>
       <p:sp>
         <p:nvSpPr>
-          <p:cNvPr id="4" name="Text 1"/>
+          <p:cNvPr id="6" name="Text 3"/>
           <p:cNvSpPr/>
           <p:nvPr/>
         </p:nvSpPr>
         <p:spPr>
           <a:xfrm>
-            <a:off x="5349240" y="1005840"/>
-            <a:ext cx="6522415" cy="731520"/>
+            <a:off x="5349240" y="6089904"/>
+            <a:ext cx="6659575" cy="347472"/>
           </a:xfrm>
           <a:prstGeom prst="rect">
             <a:avLst/>
@@ -15499,68 +16106,24 @@
           <a:ln/>
         </p:spPr>
         <p:txBody>
-          <a:bodyPr wrap="square" lIns="0" tIns="0" rIns="0" bIns="0" rtlCol="0" anchor="ctr">
-            <a:normAutofit/>
-          </a:bodyPr>
+          <a:bodyPr wrap="square" lIns="0" tIns="0" rIns="0" bIns="0" rtlCol="0" anchor="ctr"/>
           <a:lstStyle/>
           <a:p>
             <a:pPr algn="ctr" indent="0" marL="0">
               <a:buNone/>
             </a:pPr>
             <a:r>
-              <a:rPr lang="en-US" sz="3600" b="1" dirty="0">
-                <a:solidFill>
-                  <a:srgbClr val="990011"/>
+              <a:rPr lang="en-US" sz="1600" i="1" dirty="0">
+                <a:solidFill>
+                  <a:srgbClr val="555555"/>
                 </a:solidFill>
                 <a:latin typeface="Times New Roman" pitchFamily="34" charset="0"/>
                 <a:ea typeface="Times New Roman" pitchFamily="34" charset="-122"/>
                 <a:cs typeface="Times New Roman" pitchFamily="34" charset="-120"/>
               </a:rPr>
-              <a:t>Evaluation 2</a:t>
-            </a:r>
-            <a:endParaRPr lang="en-US" sz="3600" dirty="0"/>
-          </a:p>
-        </p:txBody>
-      </p:sp>
-      <p:sp>
-        <p:nvSpPr>
-          <p:cNvPr id="5" name="Text 2"/>
-          <p:cNvSpPr/>
-          <p:nvPr/>
-        </p:nvSpPr>
-        <p:spPr>
-          <a:xfrm>
-            <a:off x="5349240" y="1783080"/>
-            <a:ext cx="6522415" cy="4663440"/>
-          </a:xfrm>
-          <a:prstGeom prst="rect">
-            <a:avLst/>
-          </a:prstGeom>
-          <a:noFill/>
-          <a:ln/>
-        </p:spPr>
-        <p:txBody>
-          <a:bodyPr wrap="square" lIns="0" tIns="0" rIns="0" bIns="0" rtlCol="0" anchor="t"/>
-          <a:lstStyle/>
-          <a:p>
-            <a:pPr algn="l" indent="0" marL="0">
-              <a:spcAft>
-                <a:spcPts val="800"/>
-              </a:spcAft>
-              <a:buNone/>
-            </a:pPr>
-            <a:r>
-              <a:rPr lang="en-US" sz="4000" dirty="0">
-                <a:solidFill>
-                  <a:srgbClr val="111111"/>
-                </a:solidFill>
-                <a:latin typeface="Times New Roman" pitchFamily="34" charset="0"/>
-                <a:ea typeface="Times New Roman" pitchFamily="34" charset="-122"/>
-                <a:cs typeface="Times New Roman" pitchFamily="34" charset="-120"/>
-              </a:rPr>
-              <a:t>Give one economic importance.</a:t>
-            </a:r>
-            <a:endParaRPr lang="en-US" sz="4000" dirty="0"/>
+              <a:t>Illustration: a market</a:t>
+            </a:r>
+            <a:endParaRPr lang="en-US" sz="1600" dirty="0"/>
           </a:p>
         </p:txBody>
       </p:sp>
@@ -15670,7 +16233,7 @@
                 <a:ea typeface="Calibri" pitchFamily="34" charset="-122"/>
                 <a:cs typeface="Calibri" pitchFamily="34" charset="-120"/>
               </a:rPr>
-              <a:t>FORMATIVE EVALUATION</a:t>
+              <a:t>BOARD SUMMARY</a:t>
             </a:r>
             <a:endParaRPr lang="en-US" sz="1400" dirty="0"/>
           </a:p>
@@ -15693,7 +16256,7 @@
         <p:spPr>
           <a:xfrm>
             <a:off x="0" y="658368"/>
-            <a:ext cx="5120640" cy="5833872"/>
+            <a:ext cx="2468880" cy="5833872"/>
           </a:xfrm>
           <a:prstGeom prst="rect">
             <a:avLst/>
@@ -15708,8 +16271,8 @@
         </p:nvSpPr>
         <p:spPr>
           <a:xfrm>
-            <a:off x="5349240" y="1005840"/>
-            <a:ext cx="6522415" cy="731520"/>
+            <a:off x="2697480" y="1005840"/>
+            <a:ext cx="9174175" cy="731520"/>
           </a:xfrm>
           <a:prstGeom prst="rect">
             <a:avLst/>
@@ -15735,7 +16298,7 @@
                 <a:ea typeface="Times New Roman" pitchFamily="34" charset="-122"/>
                 <a:cs typeface="Times New Roman" pitchFamily="34" charset="-120"/>
               </a:rPr>
-              <a:t>Expected Answer</a:t>
+              <a:t>3. Socio-cultural and Economic Importance</a:t>
             </a:r>
             <a:endParaRPr lang="en-US" sz="3600" dirty="0"/>
           </a:p>
@@ -15749,8 +16312,8 @@
         </p:nvSpPr>
         <p:spPr>
           <a:xfrm>
-            <a:off x="5349240" y="1783080"/>
-            <a:ext cx="6522415" cy="4663440"/>
+            <a:off x="2697480" y="1783080"/>
+            <a:ext cx="9174175" cy="4663440"/>
           </a:xfrm>
           <a:prstGeom prst="rect">
             <a:avLst/>
@@ -15769,7 +16332,7 @@
               <a:buNone/>
             </a:pPr>
             <a:r>
-              <a:rPr lang="en-US" sz="4000" dirty="0">
+              <a:rPr lang="en-US" sz="4000" b="1" dirty="0">
                 <a:solidFill>
                   <a:srgbClr val="111111"/>
                 </a:solidFill>
@@ -15777,7 +16340,98 @@
                 <a:ea typeface="Times New Roman" pitchFamily="34" charset="-122"/>
                 <a:cs typeface="Times New Roman" pitchFamily="34" charset="-120"/>
               </a:rPr>
-              <a:t>They give income to families.</a:t>
+              <a:t>Exports: </a:t>
+            </a:r>
+            <a:pPr algn="l" indent="0" marL="0">
+              <a:spcAft>
+                <a:spcPts val="800"/>
+              </a:spcAft>
+              <a:buNone/>
+            </a:pPr>
+            <a:r>
+              <a:rPr lang="en-US" sz="4000" dirty="0">
+                <a:solidFill>
+                  <a:srgbClr val="111111"/>
+                </a:solidFill>
+                <a:latin typeface="Times New Roman" pitchFamily="34" charset="0"/>
+                <a:ea typeface="Times New Roman" pitchFamily="34" charset="-122"/>
+                <a:cs typeface="Times New Roman" pitchFamily="34" charset="-120"/>
+              </a:rPr>
+              <a:t>Eru and other products are exported to Nigeria and Europe.</a:t>
+            </a:r>
+            <a:endParaRPr lang="en-US" sz="4000" dirty="0"/>
+          </a:p>
+          <a:p>
+            <a:pPr algn="l" indent="0" marL="0">
+              <a:spcAft>
+                <a:spcPts val="800"/>
+              </a:spcAft>
+              <a:buNone/>
+            </a:pPr>
+            <a:r>
+              <a:rPr lang="en-US" sz="4000" b="1" dirty="0">
+                <a:solidFill>
+                  <a:srgbClr val="111111"/>
+                </a:solidFill>
+                <a:latin typeface="Times New Roman" pitchFamily="34" charset="0"/>
+                <a:ea typeface="Times New Roman" pitchFamily="34" charset="-122"/>
+                <a:cs typeface="Times New Roman" pitchFamily="34" charset="-120"/>
+              </a:rPr>
+              <a:t>Food: </a:t>
+            </a:r>
+            <a:pPr algn="l" indent="0" marL="0">
+              <a:spcAft>
+                <a:spcPts val="800"/>
+              </a:spcAft>
+              <a:buNone/>
+            </a:pPr>
+            <a:r>
+              <a:rPr lang="en-US" sz="4000" dirty="0">
+                <a:solidFill>
+                  <a:srgbClr val="111111"/>
+                </a:solidFill>
+                <a:latin typeface="Times New Roman" pitchFamily="34" charset="0"/>
+                <a:ea typeface="Times New Roman" pitchFamily="34" charset="-122"/>
+                <a:cs typeface="Times New Roman" pitchFamily="34" charset="-120"/>
+              </a:rPr>
+              <a:t>They make local dishes rich and nutritious.</a:t>
+            </a:r>
+            <a:endParaRPr lang="en-US" sz="4000" dirty="0"/>
+          </a:p>
+          <a:p>
+            <a:pPr algn="l" indent="0" marL="0">
+              <a:spcAft>
+                <a:spcPts val="800"/>
+              </a:spcAft>
+              <a:buNone/>
+            </a:pPr>
+            <a:r>
+              <a:rPr lang="en-US" sz="4000" b="1" dirty="0">
+                <a:solidFill>
+                  <a:srgbClr val="111111"/>
+                </a:solidFill>
+                <a:latin typeface="Times New Roman" pitchFamily="34" charset="0"/>
+                <a:ea typeface="Times New Roman" pitchFamily="34" charset="-122"/>
+                <a:cs typeface="Times New Roman" pitchFamily="34" charset="-120"/>
+              </a:rPr>
+              <a:t>Ceremonies and medicine: </a:t>
+            </a:r>
+            <a:pPr algn="l" indent="0" marL="0">
+              <a:spcAft>
+                <a:spcPts val="800"/>
+              </a:spcAft>
+              <a:buNone/>
+            </a:pPr>
+            <a:r>
+              <a:rPr lang="en-US" sz="4000" dirty="0">
+                <a:solidFill>
+                  <a:srgbClr val="111111"/>
+                </a:solidFill>
+                <a:latin typeface="Times New Roman" pitchFamily="34" charset="0"/>
+                <a:ea typeface="Times New Roman" pitchFamily="34" charset="-122"/>
+                <a:cs typeface="Times New Roman" pitchFamily="34" charset="-120"/>
+              </a:rPr>
+              <a:t>Cola nuts are shared at ceremonies, and many plants are used as traditional medicine.</a:t>
             </a:r>
             <a:endParaRPr lang="en-US" sz="4000" dirty="0"/>
           </a:p>
@@ -15889,7 +16543,7 @@
                 <a:ea typeface="Calibri" pitchFamily="34" charset="-122"/>
                 <a:cs typeface="Calibri" pitchFamily="34" charset="-120"/>
               </a:rPr>
-              <a:t>REMEDIATION</a:t>
+              <a:t>FORMATIVE EVALUATION</a:t>
             </a:r>
             <a:endParaRPr lang="en-US" sz="1400" dirty="0"/>
           </a:p>
@@ -15912,7 +16566,7 @@
         <p:spPr>
           <a:xfrm>
             <a:off x="0" y="658368"/>
-            <a:ext cx="1463040" cy="5833872"/>
+            <a:ext cx="5120640" cy="5833872"/>
           </a:xfrm>
           <a:prstGeom prst="rect">
             <a:avLst/>
@@ -15927,8 +16581,8 @@
         </p:nvSpPr>
         <p:spPr>
           <a:xfrm>
-            <a:off x="1691640" y="1005840"/>
-            <a:ext cx="10180015" cy="731520"/>
+            <a:off x="5349240" y="1005840"/>
+            <a:ext cx="6522415" cy="731520"/>
           </a:xfrm>
           <a:prstGeom prst="rect">
             <a:avLst/>
@@ -15954,7 +16608,7 @@
                 <a:ea typeface="Times New Roman" pitchFamily="34" charset="-122"/>
                 <a:cs typeface="Times New Roman" pitchFamily="34" charset="-120"/>
               </a:rPr>
-              <a:t>Remediation</a:t>
+              <a:t>Evaluation 1</a:t>
             </a:r>
             <a:endParaRPr lang="en-US" sz="3600" dirty="0"/>
           </a:p>
@@ -15968,8 +16622,8 @@
         </p:nvSpPr>
         <p:spPr>
           <a:xfrm>
-            <a:off x="1691640" y="1783080"/>
-            <a:ext cx="10180015" cy="4663440"/>
+            <a:off x="5349240" y="1783080"/>
+            <a:ext cx="6522415" cy="4663440"/>
           </a:xfrm>
           <a:prstGeom prst="rect">
             <a:avLst/>
@@ -15988,7 +16642,7 @@
               <a:buNone/>
             </a:pPr>
             <a:r>
-              <a:rPr lang="en-US" sz="4000" b="1" dirty="0">
+              <a:rPr lang="en-US" sz="4000" dirty="0">
                 <a:solidFill>
                   <a:srgbClr val="111111"/>
                 </a:solidFill>
@@ -15996,73 +16650,7 @@
                 <a:ea typeface="Times New Roman" pitchFamily="34" charset="-122"/>
                 <a:cs typeface="Times New Roman" pitchFamily="34" charset="-120"/>
               </a:rPr>
-              <a:t>Fill in the blanks:</a:t>
-            </a:r>
-            <a:endParaRPr lang="en-US" sz="4000" dirty="0"/>
-          </a:p>
-          <a:p>
-            <a:pPr algn="l" marL="342900" indent="-342900">
-              <a:spcAft>
-                <a:spcPts val="800"/>
-              </a:spcAft>
-              <a:buSzPct val="100000"/>
-              <a:buFont typeface="+mj-lt"/>
-              <a:buAutoNum type="arabicPeriod" startAt="1"/>
-            </a:pPr>
-            <a:r>
-              <a:rPr lang="en-US" sz="4000" dirty="0">
-                <a:solidFill>
-                  <a:srgbClr val="111111"/>
-                </a:solidFill>
-                <a:latin typeface="Times New Roman" pitchFamily="34" charset="0"/>
-                <a:ea typeface="Times New Roman" pitchFamily="34" charset="-122"/>
-                <a:cs typeface="Times New Roman" pitchFamily="34" charset="-120"/>
-              </a:rPr>
-              <a:t>Shea butter comes from the ______ tree.</a:t>
-            </a:r>
-            <a:endParaRPr lang="en-US" sz="4000" dirty="0"/>
-          </a:p>
-          <a:p>
-            <a:pPr algn="l" marL="342900" indent="-342900">
-              <a:spcAft>
-                <a:spcPts val="800"/>
-              </a:spcAft>
-              <a:buSzPct val="100000"/>
-              <a:buFont typeface="+mj-lt"/>
-              <a:buAutoNum type="arabicPeriod" startAt="1"/>
-            </a:pPr>
-            <a:r>
-              <a:rPr lang="en-US" sz="4000" dirty="0">
-                <a:solidFill>
-                  <a:srgbClr val="111111"/>
-                </a:solidFill>
-                <a:latin typeface="Times New Roman" pitchFamily="34" charset="0"/>
-                <a:ea typeface="Times New Roman" pitchFamily="34" charset="-122"/>
-                <a:cs typeface="Times New Roman" pitchFamily="34" charset="-120"/>
-              </a:rPr>
-              <a:t>A leaf vegetable gathered in the forest is ______.</a:t>
-            </a:r>
-            <a:endParaRPr lang="en-US" sz="4000" dirty="0"/>
-          </a:p>
-          <a:p>
-            <a:pPr algn="l" marL="342900" indent="-342900">
-              <a:spcAft>
-                <a:spcPts val="800"/>
-              </a:spcAft>
-              <a:buSzPct val="100000"/>
-              <a:buFont typeface="+mj-lt"/>
-              <a:buAutoNum type="arabicPeriod" startAt="1"/>
-            </a:pPr>
-            <a:r>
-              <a:rPr lang="en-US" sz="4000" dirty="0">
-                <a:solidFill>
-                  <a:srgbClr val="111111"/>
-                </a:solidFill>
-                <a:latin typeface="Times New Roman" pitchFamily="34" charset="0"/>
-                <a:ea typeface="Times New Roman" pitchFamily="34" charset="-122"/>
-                <a:cs typeface="Times New Roman" pitchFamily="34" charset="-120"/>
-              </a:rPr>
-              <a:t>Wild products are used as traditional ______.</a:t>
+              <a:t>Name four wild products of Cameroon.</a:t>
             </a:r>
             <a:endParaRPr lang="en-US" sz="4000" dirty="0"/>
           </a:p>
@@ -16174,7 +16762,7 @@
                 <a:ea typeface="Calibri" pitchFamily="34" charset="-122"/>
                 <a:cs typeface="Calibri" pitchFamily="34" charset="-120"/>
               </a:rPr>
-              <a:t>HOMEWORK</a:t>
+              <a:t>FORMATIVE EVALUATION</a:t>
             </a:r>
             <a:endParaRPr lang="en-US" sz="1400" dirty="0"/>
           </a:p>
@@ -16239,7 +16827,7 @@
                 <a:ea typeface="Times New Roman" pitchFamily="34" charset="-122"/>
                 <a:cs typeface="Times New Roman" pitchFamily="34" charset="-120"/>
               </a:rPr>
-              <a:t>Homework</a:t>
+              <a:t>Expected Answer</a:t>
             </a:r>
             <a:endParaRPr lang="en-US" sz="3600" dirty="0"/>
           </a:p>
@@ -16281,7 +16869,7 @@
                 <a:ea typeface="Times New Roman" pitchFamily="34" charset="-122"/>
                 <a:cs typeface="Times New Roman" pitchFamily="34" charset="-120"/>
               </a:rPr>
-              <a:t>Visit the market and write the price of three wild products.</a:t>
+              <a:t>Eru, njangsa, bush mango and bitter cola.</a:t>
             </a:r>
             <a:endParaRPr lang="en-US" sz="4000" dirty="0"/>
           </a:p>
@@ -16393,7 +16981,7 @@
                 <a:ea typeface="Calibri" pitchFamily="34" charset="-122"/>
                 <a:cs typeface="Calibri" pitchFamily="34" charset="-120"/>
               </a:rPr>
-              <a:t>NEXT LESSON</a:t>
+              <a:t>FORMATIVE EVALUATION</a:t>
             </a:r>
             <a:endParaRPr lang="en-US" sz="1400" dirty="0"/>
           </a:p>
@@ -16458,7 +17046,7 @@
                 <a:ea typeface="Times New Roman" pitchFamily="34" charset="-122"/>
                 <a:cs typeface="Times New Roman" pitchFamily="34" charset="-120"/>
               </a:rPr>
-              <a:t>Next Lesson</a:t>
+              <a:t>Evaluation 2</a:t>
             </a:r>
             <a:endParaRPr lang="en-US" sz="3600" dirty="0"/>
           </a:p>
@@ -16482,17 +17070,17 @@
           <a:ln/>
         </p:spPr>
         <p:txBody>
-          <a:bodyPr wrap="square" lIns="0" tIns="0" rIns="0" bIns="0" rtlCol="0" anchor="ctr"/>
-          <a:lstStyle/>
-          <a:p>
-            <a:pPr algn="ctr" indent="0" marL="0">
+          <a:bodyPr wrap="square" lIns="0" tIns="0" rIns="0" bIns="0" rtlCol="0" anchor="t"/>
+          <a:lstStyle/>
+          <a:p>
+            <a:pPr algn="l" indent="0" marL="0">
               <a:spcAft>
                 <a:spcPts val="800"/>
               </a:spcAft>
               <a:buNone/>
             </a:pPr>
             <a:r>
-              <a:rPr lang="en-US" sz="4000" b="1" dirty="0">
+              <a:rPr lang="en-US" sz="4000" dirty="0">
                 <a:solidFill>
                   <a:srgbClr val="111111"/>
                 </a:solidFill>
@@ -16500,27 +17088,7 @@
                 <a:ea typeface="Times New Roman" pitchFamily="34" charset="-122"/>
                 <a:cs typeface="Times New Roman" pitchFamily="34" charset="-120"/>
               </a:rPr>
-              <a:t>Our next lesson will be on:</a:t>
-            </a:r>
-            <a:endParaRPr lang="en-US" sz="4000" dirty="0"/>
-          </a:p>
-          <a:p>
-            <a:pPr algn="ctr" indent="0" marL="0">
-              <a:spcAft>
-                <a:spcPts val="800"/>
-              </a:spcAft>
-              <a:buNone/>
-            </a:pPr>
-            <a:r>
-              <a:rPr lang="en-US" sz="4000" b="1" dirty="0">
-                <a:solidFill>
-                  <a:srgbClr val="990011"/>
-                </a:solidFill>
-                <a:latin typeface="Times New Roman" pitchFamily="34" charset="0"/>
-                <a:ea typeface="Times New Roman" pitchFamily="34" charset="-122"/>
-                <a:cs typeface="Times New Roman" pitchFamily="34" charset="-120"/>
-              </a:rPr>
-              <a:t>Practical Work 3: Identification of the Biological Resources of Cameroon</a:t>
+              <a:t>Give one economic importance.</a:t>
             </a:r>
             <a:endParaRPr lang="en-US" sz="4000" dirty="0"/>
           </a:p>
@@ -16632,6 +17200,1187 @@
                 <a:ea typeface="Calibri" pitchFamily="34" charset="-122"/>
                 <a:cs typeface="Calibri" pitchFamily="34" charset="-120"/>
               </a:rPr>
+              <a:t>FORMATIVE EVALUATION</a:t>
+            </a:r>
+            <a:endParaRPr lang="en-US" sz="1400" dirty="0"/>
+          </a:p>
+        </p:txBody>
+      </p:sp>
+      <p:pic>
+        <p:nvPicPr>
+          <p:cNvPr id="3" name="Image 0" descr="/home/claude/f4/img/minesec_sheet.png">    </p:cNvPr>
+          <p:cNvPicPr>
+            <a:picLocks noChangeAspect="1"/>
+          </p:cNvPicPr>
+          <p:nvPr/>
+        </p:nvPicPr>
+        <p:blipFill>
+          <a:blip r:embed="rId1"/>
+          <a:stretch>
+            <a:fillRect/>
+          </a:stretch>
+        </p:blipFill>
+        <p:spPr>
+          <a:xfrm>
+            <a:off x="0" y="658368"/>
+            <a:ext cx="5120640" cy="5833872"/>
+          </a:xfrm>
+          <a:prstGeom prst="rect">
+            <a:avLst/>
+          </a:prstGeom>
+        </p:spPr>
+      </p:pic>
+      <p:sp>
+        <p:nvSpPr>
+          <p:cNvPr id="4" name="Text 1"/>
+          <p:cNvSpPr/>
+          <p:nvPr/>
+        </p:nvSpPr>
+        <p:spPr>
+          <a:xfrm>
+            <a:off x="5349240" y="1005840"/>
+            <a:ext cx="6522415" cy="731520"/>
+          </a:xfrm>
+          <a:prstGeom prst="rect">
+            <a:avLst/>
+          </a:prstGeom>
+          <a:noFill/>
+          <a:ln/>
+        </p:spPr>
+        <p:txBody>
+          <a:bodyPr wrap="square" lIns="0" tIns="0" rIns="0" bIns="0" rtlCol="0" anchor="ctr">
+            <a:normAutofit/>
+          </a:bodyPr>
+          <a:lstStyle/>
+          <a:p>
+            <a:pPr algn="ctr" indent="0" marL="0">
+              <a:buNone/>
+            </a:pPr>
+            <a:r>
+              <a:rPr lang="en-US" sz="3600" b="1" dirty="0">
+                <a:solidFill>
+                  <a:srgbClr val="990011"/>
+                </a:solidFill>
+                <a:latin typeface="Times New Roman" pitchFamily="34" charset="0"/>
+                <a:ea typeface="Times New Roman" pitchFamily="34" charset="-122"/>
+                <a:cs typeface="Times New Roman" pitchFamily="34" charset="-120"/>
+              </a:rPr>
+              <a:t>Expected Answer</a:t>
+            </a:r>
+            <a:endParaRPr lang="en-US" sz="3600" dirty="0"/>
+          </a:p>
+        </p:txBody>
+      </p:sp>
+      <p:sp>
+        <p:nvSpPr>
+          <p:cNvPr id="5" name="Text 2"/>
+          <p:cNvSpPr/>
+          <p:nvPr/>
+        </p:nvSpPr>
+        <p:spPr>
+          <a:xfrm>
+            <a:off x="5349240" y="1783080"/>
+            <a:ext cx="6522415" cy="4663440"/>
+          </a:xfrm>
+          <a:prstGeom prst="rect">
+            <a:avLst/>
+          </a:prstGeom>
+          <a:noFill/>
+          <a:ln/>
+        </p:spPr>
+        <p:txBody>
+          <a:bodyPr wrap="square" lIns="0" tIns="0" rIns="0" bIns="0" rtlCol="0" anchor="t"/>
+          <a:lstStyle/>
+          <a:p>
+            <a:pPr algn="l" indent="0" marL="0">
+              <a:spcAft>
+                <a:spcPts val="800"/>
+              </a:spcAft>
+              <a:buNone/>
+            </a:pPr>
+            <a:r>
+              <a:rPr lang="en-US" sz="4000" dirty="0">
+                <a:solidFill>
+                  <a:srgbClr val="111111"/>
+                </a:solidFill>
+                <a:latin typeface="Times New Roman" pitchFamily="34" charset="0"/>
+                <a:ea typeface="Times New Roman" pitchFamily="34" charset="-122"/>
+                <a:cs typeface="Times New Roman" pitchFamily="34" charset="-120"/>
+              </a:rPr>
+              <a:t>They give income to families.</a:t>
+            </a:r>
+            <a:endParaRPr lang="en-US" sz="4000" dirty="0"/>
+          </a:p>
+        </p:txBody>
+      </p:sp>
+      <p:sp>
+        <p:nvSpPr>
+          <p:cNvPr id="25" name="Slide Number Placeholder 0"/>
+          <p:cNvSpPr>
+            <a:spLocks noGrp="1"/>
+          </p:cNvSpPr>
+          <p:nvPr>
+            <p:ph type="sldNum" sz="quarter" idx="4294967295"/>
+          </p:nvPr>
+        </p:nvSpPr>
+        <p:spPr>
+          <a:xfrm>
+            <a:off x="27432" y="91440"/>
+            <a:ext cx="585216" cy="475488"/>
+          </a:xfrm>
+          <a:prstGeom prst="rect">
+            <a:avLst/>
+          </a:prstGeom>
+          <a:extLst>
+            <a:ext uri="{C572A759-6A51-4108-AA02-DFA0A04FC94B}">
+              <ma14:wrappingTextBoxFlag xmlns:ma14="http://schemas.microsoft.com/office/mac/drawingml/2011/main" val="0"/>
+            </a:ext>
+          </a:extLst>
+        </p:spPr>
+        <p:txBody>
+          <a:bodyPr/>
+          <a:lstStyle>
+            <a:lvl1pPr>
+              <a:defRPr sz="2000">
+                <a:solidFill>
+                  <a:srgbClr val="FFFFFF"/>
+                </a:solidFill>
+                <a:latin typeface="Calibri"/>
+                <a:ea typeface="Calibri"/>
+                <a:cs typeface="Calibri"/>
+              </a:defRPr>
+            </a:lvl1pPr>
+          </a:lstStyle>
+          <a:p>
+            <a:pPr algn="ctr"/>
+            <a:fld id="{F7021451-1387-4CA6-816F-3879F97B5CBC}" type="slidenum">
+              <a:rPr b="1" lang="en-US"/>
+              <a:t>47</a:t>
+            </a:fld>
+            <a:endParaRPr lang="en-US"/>
+          </a:p>
+        </p:txBody>
+      </p:sp>
+    </p:spTree>
+  </p:cSld>
+  <p:clrMapOvr>
+    <a:masterClrMapping/>
+  </p:clrMapOvr>
+</p:sld>
+</file>
+
+<file path=ppt/slides/slide48.xml><?xml version="1.0" encoding="utf-8"?>
+<p:sld xmlns:a="http://schemas.openxmlformats.org/drawingml/2006/main" xmlns:r="http://schemas.openxmlformats.org/officeDocument/2006/relationships" xmlns:p="http://schemas.openxmlformats.org/presentationml/2006/main">
+  <p:cSld name="Slide 48">
+    <p:spTree>
+      <p:nvGrpSpPr>
+        <p:cNvPr id="1" name=""/>
+        <p:cNvGrpSpPr/>
+        <p:nvPr/>
+      </p:nvGrpSpPr>
+      <p:grpSpPr>
+        <a:xfrm>
+          <a:off x="0" y="0"/>
+          <a:ext cx="0" cy="0"/>
+          <a:chOff x="0" y="0"/>
+          <a:chExt cx="0" cy="0"/>
+        </a:xfrm>
+      </p:grpSpPr>
+      <p:sp>
+        <p:nvSpPr>
+          <p:cNvPr id="2" name="Text 0"/>
+          <p:cNvSpPr/>
+          <p:nvPr/>
+        </p:nvSpPr>
+        <p:spPr>
+          <a:xfrm>
+            <a:off x="457200" y="713232"/>
+            <a:ext cx="11368735" cy="274320"/>
+          </a:xfrm>
+          <a:prstGeom prst="rect">
+            <a:avLst/>
+          </a:prstGeom>
+          <a:noFill/>
+          <a:ln/>
+        </p:spPr>
+        <p:txBody>
+          <a:bodyPr wrap="square" lIns="0" tIns="0" rIns="0" bIns="0" rtlCol="0" anchor="ctr"/>
+          <a:lstStyle/>
+          <a:p>
+            <a:pPr algn="r" indent="0" marL="0">
+              <a:buNone/>
+            </a:pPr>
+            <a:r>
+              <a:rPr lang="en-US" sz="1400" b="1" dirty="0">
+                <a:solidFill>
+                  <a:srgbClr val="1C3F6E"/>
+                </a:solidFill>
+                <a:latin typeface="Calibri" pitchFamily="34" charset="0"/>
+                <a:ea typeface="Calibri" pitchFamily="34" charset="-122"/>
+                <a:cs typeface="Calibri" pitchFamily="34" charset="-120"/>
+              </a:rPr>
+              <a:t>REMEDIATION</a:t>
+            </a:r>
+            <a:endParaRPr lang="en-US" sz="1400" dirty="0"/>
+          </a:p>
+        </p:txBody>
+      </p:sp>
+      <p:pic>
+        <p:nvPicPr>
+          <p:cNvPr id="3" name="Image 0" descr="/home/claude/f4/img/minesec_sheet.png">    </p:cNvPr>
+          <p:cNvPicPr>
+            <a:picLocks noChangeAspect="1"/>
+          </p:cNvPicPr>
+          <p:nvPr/>
+        </p:nvPicPr>
+        <p:blipFill>
+          <a:blip r:embed="rId1"/>
+          <a:stretch>
+            <a:fillRect/>
+          </a:stretch>
+        </p:blipFill>
+        <p:spPr>
+          <a:xfrm>
+            <a:off x="0" y="658368"/>
+            <a:ext cx="1463040" cy="5833872"/>
+          </a:xfrm>
+          <a:prstGeom prst="rect">
+            <a:avLst/>
+          </a:prstGeom>
+        </p:spPr>
+      </p:pic>
+      <p:sp>
+        <p:nvSpPr>
+          <p:cNvPr id="4" name="Text 1"/>
+          <p:cNvSpPr/>
+          <p:nvPr/>
+        </p:nvSpPr>
+        <p:spPr>
+          <a:xfrm>
+            <a:off x="1691640" y="1005840"/>
+            <a:ext cx="10180015" cy="731520"/>
+          </a:xfrm>
+          <a:prstGeom prst="rect">
+            <a:avLst/>
+          </a:prstGeom>
+          <a:noFill/>
+          <a:ln/>
+        </p:spPr>
+        <p:txBody>
+          <a:bodyPr wrap="square" lIns="0" tIns="0" rIns="0" bIns="0" rtlCol="0" anchor="ctr">
+            <a:normAutofit/>
+          </a:bodyPr>
+          <a:lstStyle/>
+          <a:p>
+            <a:pPr algn="ctr" indent="0" marL="0">
+              <a:buNone/>
+            </a:pPr>
+            <a:r>
+              <a:rPr lang="en-US" sz="3600" b="1" dirty="0">
+                <a:solidFill>
+                  <a:srgbClr val="990011"/>
+                </a:solidFill>
+                <a:latin typeface="Times New Roman" pitchFamily="34" charset="0"/>
+                <a:ea typeface="Times New Roman" pitchFamily="34" charset="-122"/>
+                <a:cs typeface="Times New Roman" pitchFamily="34" charset="-120"/>
+              </a:rPr>
+              <a:t>Remediation</a:t>
+            </a:r>
+            <a:endParaRPr lang="en-US" sz="3600" dirty="0"/>
+          </a:p>
+        </p:txBody>
+      </p:sp>
+      <p:sp>
+        <p:nvSpPr>
+          <p:cNvPr id="5" name="Text 2"/>
+          <p:cNvSpPr/>
+          <p:nvPr/>
+        </p:nvSpPr>
+        <p:spPr>
+          <a:xfrm>
+            <a:off x="1691640" y="1783080"/>
+            <a:ext cx="10180015" cy="4663440"/>
+          </a:xfrm>
+          <a:prstGeom prst="rect">
+            <a:avLst/>
+          </a:prstGeom>
+          <a:noFill/>
+          <a:ln/>
+        </p:spPr>
+        <p:txBody>
+          <a:bodyPr wrap="square" lIns="0" tIns="0" rIns="0" bIns="0" rtlCol="0" anchor="t"/>
+          <a:lstStyle/>
+          <a:p>
+            <a:pPr algn="l" indent="0" marL="0">
+              <a:spcAft>
+                <a:spcPts val="800"/>
+              </a:spcAft>
+              <a:buNone/>
+            </a:pPr>
+            <a:r>
+              <a:rPr lang="en-US" sz="4000" b="1" dirty="0">
+                <a:solidFill>
+                  <a:srgbClr val="111111"/>
+                </a:solidFill>
+                <a:latin typeface="Times New Roman" pitchFamily="34" charset="0"/>
+                <a:ea typeface="Times New Roman" pitchFamily="34" charset="-122"/>
+                <a:cs typeface="Times New Roman" pitchFamily="34" charset="-120"/>
+              </a:rPr>
+              <a:t>Fill in the blanks:</a:t>
+            </a:r>
+            <a:endParaRPr lang="en-US" sz="4000" dirty="0"/>
+          </a:p>
+          <a:p>
+            <a:pPr algn="l" marL="342900" indent="-342900">
+              <a:spcAft>
+                <a:spcPts val="800"/>
+              </a:spcAft>
+              <a:buSzPct val="100000"/>
+              <a:buFont typeface="+mj-lt"/>
+              <a:buAutoNum type="arabicPeriod" startAt="1"/>
+            </a:pPr>
+            <a:r>
+              <a:rPr lang="en-US" sz="4000" dirty="0">
+                <a:solidFill>
+                  <a:srgbClr val="111111"/>
+                </a:solidFill>
+                <a:latin typeface="Times New Roman" pitchFamily="34" charset="0"/>
+                <a:ea typeface="Times New Roman" pitchFamily="34" charset="-122"/>
+                <a:cs typeface="Times New Roman" pitchFamily="34" charset="-120"/>
+              </a:rPr>
+              <a:t>Shea butter comes from the ______ tree.</a:t>
+            </a:r>
+            <a:endParaRPr lang="en-US" sz="4000" dirty="0"/>
+          </a:p>
+          <a:p>
+            <a:pPr algn="l" marL="342900" indent="-342900">
+              <a:spcAft>
+                <a:spcPts val="800"/>
+              </a:spcAft>
+              <a:buSzPct val="100000"/>
+              <a:buFont typeface="+mj-lt"/>
+              <a:buAutoNum type="arabicPeriod" startAt="1"/>
+            </a:pPr>
+            <a:r>
+              <a:rPr lang="en-US" sz="4000" dirty="0">
+                <a:solidFill>
+                  <a:srgbClr val="111111"/>
+                </a:solidFill>
+                <a:latin typeface="Times New Roman" pitchFamily="34" charset="0"/>
+                <a:ea typeface="Times New Roman" pitchFamily="34" charset="-122"/>
+                <a:cs typeface="Times New Roman" pitchFamily="34" charset="-120"/>
+              </a:rPr>
+              <a:t>A leaf vegetable gathered in the forest is ______.</a:t>
+            </a:r>
+            <a:endParaRPr lang="en-US" sz="4000" dirty="0"/>
+          </a:p>
+          <a:p>
+            <a:pPr algn="l" marL="342900" indent="-342900">
+              <a:spcAft>
+                <a:spcPts val="800"/>
+              </a:spcAft>
+              <a:buSzPct val="100000"/>
+              <a:buFont typeface="+mj-lt"/>
+              <a:buAutoNum type="arabicPeriod" startAt="1"/>
+            </a:pPr>
+            <a:r>
+              <a:rPr lang="en-US" sz="4000" dirty="0">
+                <a:solidFill>
+                  <a:srgbClr val="111111"/>
+                </a:solidFill>
+                <a:latin typeface="Times New Roman" pitchFamily="34" charset="0"/>
+                <a:ea typeface="Times New Roman" pitchFamily="34" charset="-122"/>
+                <a:cs typeface="Times New Roman" pitchFamily="34" charset="-120"/>
+              </a:rPr>
+              <a:t>Wild products are used as traditional ______.</a:t>
+            </a:r>
+            <a:endParaRPr lang="en-US" sz="4000" dirty="0"/>
+          </a:p>
+        </p:txBody>
+      </p:sp>
+      <p:sp>
+        <p:nvSpPr>
+          <p:cNvPr id="25" name="Slide Number Placeholder 0"/>
+          <p:cNvSpPr>
+            <a:spLocks noGrp="1"/>
+          </p:cNvSpPr>
+          <p:nvPr>
+            <p:ph type="sldNum" sz="quarter" idx="4294967295"/>
+          </p:nvPr>
+        </p:nvSpPr>
+        <p:spPr>
+          <a:xfrm>
+            <a:off x="27432" y="91440"/>
+            <a:ext cx="585216" cy="475488"/>
+          </a:xfrm>
+          <a:prstGeom prst="rect">
+            <a:avLst/>
+          </a:prstGeom>
+          <a:extLst>
+            <a:ext uri="{C572A759-6A51-4108-AA02-DFA0A04FC94B}">
+              <ma14:wrappingTextBoxFlag xmlns:ma14="http://schemas.microsoft.com/office/mac/drawingml/2011/main" val="0"/>
+            </a:ext>
+          </a:extLst>
+        </p:spPr>
+        <p:txBody>
+          <a:bodyPr/>
+          <a:lstStyle>
+            <a:lvl1pPr>
+              <a:defRPr sz="2000">
+                <a:solidFill>
+                  <a:srgbClr val="FFFFFF"/>
+                </a:solidFill>
+                <a:latin typeface="Calibri"/>
+                <a:ea typeface="Calibri"/>
+                <a:cs typeface="Calibri"/>
+              </a:defRPr>
+            </a:lvl1pPr>
+          </a:lstStyle>
+          <a:p>
+            <a:pPr algn="ctr"/>
+            <a:fld id="{F7021451-1387-4CA6-816F-3879F97B5CBC}" type="slidenum">
+              <a:rPr b="1" lang="en-US"/>
+              <a:t>48</a:t>
+            </a:fld>
+            <a:endParaRPr lang="en-US"/>
+          </a:p>
+        </p:txBody>
+      </p:sp>
+    </p:spTree>
+  </p:cSld>
+  <p:clrMapOvr>
+    <a:masterClrMapping/>
+  </p:clrMapOvr>
+</p:sld>
+</file>
+
+<file path=ppt/slides/slide49.xml><?xml version="1.0" encoding="utf-8"?>
+<p:sld xmlns:a="http://schemas.openxmlformats.org/drawingml/2006/main" xmlns:r="http://schemas.openxmlformats.org/officeDocument/2006/relationships" xmlns:p="http://schemas.openxmlformats.org/presentationml/2006/main">
+  <p:cSld name="Slide 49">
+    <p:spTree>
+      <p:nvGrpSpPr>
+        <p:cNvPr id="1" name=""/>
+        <p:cNvGrpSpPr/>
+        <p:nvPr/>
+      </p:nvGrpSpPr>
+      <p:grpSpPr>
+        <a:xfrm>
+          <a:off x="0" y="0"/>
+          <a:ext cx="0" cy="0"/>
+          <a:chOff x="0" y="0"/>
+          <a:chExt cx="0" cy="0"/>
+        </a:xfrm>
+      </p:grpSpPr>
+      <p:sp>
+        <p:nvSpPr>
+          <p:cNvPr id="2" name="Text 0"/>
+          <p:cNvSpPr/>
+          <p:nvPr/>
+        </p:nvSpPr>
+        <p:spPr>
+          <a:xfrm>
+            <a:off x="457200" y="713232"/>
+            <a:ext cx="11368735" cy="274320"/>
+          </a:xfrm>
+          <a:prstGeom prst="rect">
+            <a:avLst/>
+          </a:prstGeom>
+          <a:noFill/>
+          <a:ln/>
+        </p:spPr>
+        <p:txBody>
+          <a:bodyPr wrap="square" lIns="0" tIns="0" rIns="0" bIns="0" rtlCol="0" anchor="ctr"/>
+          <a:lstStyle/>
+          <a:p>
+            <a:pPr algn="r" indent="0" marL="0">
+              <a:buNone/>
+            </a:pPr>
+            <a:r>
+              <a:rPr lang="en-US" sz="1400" b="1" dirty="0">
+                <a:solidFill>
+                  <a:srgbClr val="1C3F6E"/>
+                </a:solidFill>
+                <a:latin typeface="Calibri" pitchFamily="34" charset="0"/>
+                <a:ea typeface="Calibri" pitchFamily="34" charset="-122"/>
+                <a:cs typeface="Calibri" pitchFamily="34" charset="-120"/>
+              </a:rPr>
+              <a:t>HOMEWORK</a:t>
+            </a:r>
+            <a:endParaRPr lang="en-US" sz="1400" dirty="0"/>
+          </a:p>
+        </p:txBody>
+      </p:sp>
+      <p:pic>
+        <p:nvPicPr>
+          <p:cNvPr id="3" name="Image 0" descr="/home/claude/f4/img/minesec_sheet.png">    </p:cNvPr>
+          <p:cNvPicPr>
+            <a:picLocks noChangeAspect="1"/>
+          </p:cNvPicPr>
+          <p:nvPr/>
+        </p:nvPicPr>
+        <p:blipFill>
+          <a:blip r:embed="rId1"/>
+          <a:stretch>
+            <a:fillRect/>
+          </a:stretch>
+        </p:blipFill>
+        <p:spPr>
+          <a:xfrm>
+            <a:off x="0" y="658368"/>
+            <a:ext cx="5120640" cy="5833872"/>
+          </a:xfrm>
+          <a:prstGeom prst="rect">
+            <a:avLst/>
+          </a:prstGeom>
+        </p:spPr>
+      </p:pic>
+      <p:sp>
+        <p:nvSpPr>
+          <p:cNvPr id="4" name="Text 1"/>
+          <p:cNvSpPr/>
+          <p:nvPr/>
+        </p:nvSpPr>
+        <p:spPr>
+          <a:xfrm>
+            <a:off x="5349240" y="1005840"/>
+            <a:ext cx="6522415" cy="731520"/>
+          </a:xfrm>
+          <a:prstGeom prst="rect">
+            <a:avLst/>
+          </a:prstGeom>
+          <a:noFill/>
+          <a:ln/>
+        </p:spPr>
+        <p:txBody>
+          <a:bodyPr wrap="square" lIns="0" tIns="0" rIns="0" bIns="0" rtlCol="0" anchor="ctr">
+            <a:normAutofit/>
+          </a:bodyPr>
+          <a:lstStyle/>
+          <a:p>
+            <a:pPr algn="ctr" indent="0" marL="0">
+              <a:buNone/>
+            </a:pPr>
+            <a:r>
+              <a:rPr lang="en-US" sz="3600" b="1" dirty="0">
+                <a:solidFill>
+                  <a:srgbClr val="990011"/>
+                </a:solidFill>
+                <a:latin typeface="Times New Roman" pitchFamily="34" charset="0"/>
+                <a:ea typeface="Times New Roman" pitchFamily="34" charset="-122"/>
+                <a:cs typeface="Times New Roman" pitchFamily="34" charset="-120"/>
+              </a:rPr>
+              <a:t>Homework</a:t>
+            </a:r>
+            <a:endParaRPr lang="en-US" sz="3600" dirty="0"/>
+          </a:p>
+        </p:txBody>
+      </p:sp>
+      <p:sp>
+        <p:nvSpPr>
+          <p:cNvPr id="5" name="Text 2"/>
+          <p:cNvSpPr/>
+          <p:nvPr/>
+        </p:nvSpPr>
+        <p:spPr>
+          <a:xfrm>
+            <a:off x="5349240" y="1783080"/>
+            <a:ext cx="6522415" cy="4663440"/>
+          </a:xfrm>
+          <a:prstGeom prst="rect">
+            <a:avLst/>
+          </a:prstGeom>
+          <a:noFill/>
+          <a:ln/>
+        </p:spPr>
+        <p:txBody>
+          <a:bodyPr wrap="square" lIns="0" tIns="0" rIns="0" bIns="0" rtlCol="0" anchor="t"/>
+          <a:lstStyle/>
+          <a:p>
+            <a:pPr algn="l" indent="0" marL="0">
+              <a:spcAft>
+                <a:spcPts val="800"/>
+              </a:spcAft>
+              <a:buNone/>
+            </a:pPr>
+            <a:r>
+              <a:rPr lang="en-US" sz="4000" dirty="0">
+                <a:solidFill>
+                  <a:srgbClr val="111111"/>
+                </a:solidFill>
+                <a:latin typeface="Times New Roman" pitchFamily="34" charset="0"/>
+                <a:ea typeface="Times New Roman" pitchFamily="34" charset="-122"/>
+                <a:cs typeface="Times New Roman" pitchFamily="34" charset="-120"/>
+              </a:rPr>
+              <a:t>Visit the market and write the price of three wild products.</a:t>
+            </a:r>
+            <a:endParaRPr lang="en-US" sz="4000" dirty="0"/>
+          </a:p>
+        </p:txBody>
+      </p:sp>
+      <p:sp>
+        <p:nvSpPr>
+          <p:cNvPr id="25" name="Slide Number Placeholder 0"/>
+          <p:cNvSpPr>
+            <a:spLocks noGrp="1"/>
+          </p:cNvSpPr>
+          <p:nvPr>
+            <p:ph type="sldNum" sz="quarter" idx="4294967295"/>
+          </p:nvPr>
+        </p:nvSpPr>
+        <p:spPr>
+          <a:xfrm>
+            <a:off x="27432" y="91440"/>
+            <a:ext cx="585216" cy="475488"/>
+          </a:xfrm>
+          <a:prstGeom prst="rect">
+            <a:avLst/>
+          </a:prstGeom>
+          <a:extLst>
+            <a:ext uri="{C572A759-6A51-4108-AA02-DFA0A04FC94B}">
+              <ma14:wrappingTextBoxFlag xmlns:ma14="http://schemas.microsoft.com/office/mac/drawingml/2011/main" val="0"/>
+            </a:ext>
+          </a:extLst>
+        </p:spPr>
+        <p:txBody>
+          <a:bodyPr/>
+          <a:lstStyle>
+            <a:lvl1pPr>
+              <a:defRPr sz="2000">
+                <a:solidFill>
+                  <a:srgbClr val="FFFFFF"/>
+                </a:solidFill>
+                <a:latin typeface="Calibri"/>
+                <a:ea typeface="Calibri"/>
+                <a:cs typeface="Calibri"/>
+              </a:defRPr>
+            </a:lvl1pPr>
+          </a:lstStyle>
+          <a:p>
+            <a:pPr algn="ctr"/>
+            <a:fld id="{F7021451-1387-4CA6-816F-3879F97B5CBC}" type="slidenum">
+              <a:rPr b="1" lang="en-US"/>
+              <a:t>49</a:t>
+            </a:fld>
+            <a:endParaRPr lang="en-US"/>
+          </a:p>
+        </p:txBody>
+      </p:sp>
+    </p:spTree>
+  </p:cSld>
+  <p:clrMapOvr>
+    <a:masterClrMapping/>
+  </p:clrMapOvr>
+</p:sld>
+</file>
+
+<file path=ppt/slides/slide5.xml><?xml version="1.0" encoding="utf-8"?>
+<p:sld xmlns:a="http://schemas.openxmlformats.org/drawingml/2006/main" xmlns:r="http://schemas.openxmlformats.org/officeDocument/2006/relationships" xmlns:p="http://schemas.openxmlformats.org/presentationml/2006/main">
+  <p:cSld name="Slide 5">
+    <p:spTree>
+      <p:nvGrpSpPr>
+        <p:cNvPr id="1" name=""/>
+        <p:cNvGrpSpPr/>
+        <p:nvPr/>
+      </p:nvGrpSpPr>
+      <p:grpSpPr>
+        <a:xfrm>
+          <a:off x="0" y="0"/>
+          <a:ext cx="0" cy="0"/>
+          <a:chOff x="0" y="0"/>
+          <a:chExt cx="0" cy="0"/>
+        </a:xfrm>
+      </p:grpSpPr>
+      <p:sp>
+        <p:nvSpPr>
+          <p:cNvPr id="2" name="Text 0"/>
+          <p:cNvSpPr/>
+          <p:nvPr/>
+        </p:nvSpPr>
+        <p:spPr>
+          <a:xfrm>
+            <a:off x="457200" y="713232"/>
+            <a:ext cx="11368735" cy="274320"/>
+          </a:xfrm>
+          <a:prstGeom prst="rect">
+            <a:avLst/>
+          </a:prstGeom>
+          <a:noFill/>
+          <a:ln/>
+        </p:spPr>
+        <p:txBody>
+          <a:bodyPr wrap="square" lIns="0" tIns="0" rIns="0" bIns="0" rtlCol="0" anchor="ctr"/>
+          <a:lstStyle/>
+          <a:p>
+            <a:pPr algn="r" indent="0" marL="0">
+              <a:buNone/>
+            </a:pPr>
+            <a:r>
+              <a:rPr lang="en-US" sz="1400" b="1" dirty="0">
+                <a:solidFill>
+                  <a:srgbClr val="1C3F6E"/>
+                </a:solidFill>
+                <a:latin typeface="Calibri" pitchFamily="34" charset="0"/>
+                <a:ea typeface="Calibri" pitchFamily="34" charset="-122"/>
+                <a:cs typeface="Calibri" pitchFamily="34" charset="-120"/>
+              </a:rPr>
+              <a:t>HOMEWORK CORRECTION</a:t>
+            </a:r>
+            <a:endParaRPr lang="en-US" sz="1400" dirty="0"/>
+          </a:p>
+        </p:txBody>
+      </p:sp>
+      <p:pic>
+        <p:nvPicPr>
+          <p:cNvPr id="3" name="Image 0" descr="/home/claude/f4/img/minesec_sheet.png">    </p:cNvPr>
+          <p:cNvPicPr>
+            <a:picLocks noChangeAspect="1"/>
+          </p:cNvPicPr>
+          <p:nvPr/>
+        </p:nvPicPr>
+        <p:blipFill>
+          <a:blip r:embed="rId1"/>
+          <a:stretch>
+            <a:fillRect/>
+          </a:stretch>
+        </p:blipFill>
+        <p:spPr>
+          <a:xfrm>
+            <a:off x="0" y="658368"/>
+            <a:ext cx="5120640" cy="5833872"/>
+          </a:xfrm>
+          <a:prstGeom prst="rect">
+            <a:avLst/>
+          </a:prstGeom>
+        </p:spPr>
+      </p:pic>
+      <p:sp>
+        <p:nvSpPr>
+          <p:cNvPr id="4" name="Text 1"/>
+          <p:cNvSpPr/>
+          <p:nvPr/>
+        </p:nvSpPr>
+        <p:spPr>
+          <a:xfrm>
+            <a:off x="5349240" y="1005840"/>
+            <a:ext cx="6522415" cy="731520"/>
+          </a:xfrm>
+          <a:prstGeom prst="rect">
+            <a:avLst/>
+          </a:prstGeom>
+          <a:noFill/>
+          <a:ln/>
+        </p:spPr>
+        <p:txBody>
+          <a:bodyPr wrap="square" lIns="0" tIns="0" rIns="0" bIns="0" rtlCol="0" anchor="ctr">
+            <a:normAutofit/>
+          </a:bodyPr>
+          <a:lstStyle/>
+          <a:p>
+            <a:pPr algn="ctr" indent="0" marL="0">
+              <a:buNone/>
+            </a:pPr>
+            <a:r>
+              <a:rPr lang="en-US" sz="3600" b="1" dirty="0">
+                <a:solidFill>
+                  <a:srgbClr val="990011"/>
+                </a:solidFill>
+                <a:latin typeface="Times New Roman" pitchFamily="34" charset="0"/>
+                <a:ea typeface="Times New Roman" pitchFamily="34" charset="-122"/>
+                <a:cs typeface="Times New Roman" pitchFamily="34" charset="-120"/>
+              </a:rPr>
+              <a:t>Correction: Possible Answer</a:t>
+            </a:r>
+            <a:endParaRPr lang="en-US" sz="3600" dirty="0"/>
+          </a:p>
+        </p:txBody>
+      </p:sp>
+      <p:sp>
+        <p:nvSpPr>
+          <p:cNvPr id="5" name="Text 2"/>
+          <p:cNvSpPr/>
+          <p:nvPr/>
+        </p:nvSpPr>
+        <p:spPr>
+          <a:xfrm>
+            <a:off x="5349240" y="1783080"/>
+            <a:ext cx="6522415" cy="4663440"/>
+          </a:xfrm>
+          <a:prstGeom prst="rect">
+            <a:avLst/>
+          </a:prstGeom>
+          <a:noFill/>
+          <a:ln/>
+        </p:spPr>
+        <p:txBody>
+          <a:bodyPr wrap="square" lIns="0" tIns="0" rIns="0" bIns="0" rtlCol="0" anchor="t"/>
+          <a:lstStyle/>
+          <a:p>
+            <a:pPr algn="l" indent="0" marL="0">
+              <a:spcAft>
+                <a:spcPts val="800"/>
+              </a:spcAft>
+              <a:buNone/>
+            </a:pPr>
+            <a:r>
+              <a:rPr lang="en-US" sz="4000" dirty="0">
+                <a:solidFill>
+                  <a:srgbClr val="111111"/>
+                </a:solidFill>
+                <a:latin typeface="Times New Roman" pitchFamily="34" charset="0"/>
+                <a:ea typeface="Times New Roman" pitchFamily="34" charset="-122"/>
+                <a:cs typeface="Times New Roman" pitchFamily="34" charset="-120"/>
+              </a:rPr>
+              <a:t>Answers vary. Example: about 3,000 to 5,000 FCFA a week for firewood or a bag of charcoal.</a:t>
+            </a:r>
+            <a:endParaRPr lang="en-US" sz="4000" dirty="0"/>
+          </a:p>
+        </p:txBody>
+      </p:sp>
+      <p:sp>
+        <p:nvSpPr>
+          <p:cNvPr id="25" name="Slide Number Placeholder 0"/>
+          <p:cNvSpPr>
+            <a:spLocks noGrp="1"/>
+          </p:cNvSpPr>
+          <p:nvPr>
+            <p:ph type="sldNum" sz="quarter" idx="4294967295"/>
+          </p:nvPr>
+        </p:nvSpPr>
+        <p:spPr>
+          <a:xfrm>
+            <a:off x="27432" y="91440"/>
+            <a:ext cx="585216" cy="475488"/>
+          </a:xfrm>
+          <a:prstGeom prst="rect">
+            <a:avLst/>
+          </a:prstGeom>
+          <a:extLst>
+            <a:ext uri="{C572A759-6A51-4108-AA02-DFA0A04FC94B}">
+              <ma14:wrappingTextBoxFlag xmlns:ma14="http://schemas.microsoft.com/office/mac/drawingml/2011/main" val="0"/>
+            </a:ext>
+          </a:extLst>
+        </p:spPr>
+        <p:txBody>
+          <a:bodyPr/>
+          <a:lstStyle>
+            <a:lvl1pPr>
+              <a:defRPr sz="2000">
+                <a:solidFill>
+                  <a:srgbClr val="FFFFFF"/>
+                </a:solidFill>
+                <a:latin typeface="Calibri"/>
+                <a:ea typeface="Calibri"/>
+                <a:cs typeface="Calibri"/>
+              </a:defRPr>
+            </a:lvl1pPr>
+          </a:lstStyle>
+          <a:p>
+            <a:pPr algn="ctr"/>
+            <a:fld id="{F7021451-1387-4CA6-816F-3879F97B5CBC}" type="slidenum">
+              <a:rPr b="1" lang="en-US"/>
+              <a:t>5</a:t>
+            </a:fld>
+            <a:endParaRPr lang="en-US"/>
+          </a:p>
+        </p:txBody>
+      </p:sp>
+    </p:spTree>
+  </p:cSld>
+  <p:clrMapOvr>
+    <a:masterClrMapping/>
+  </p:clrMapOvr>
+</p:sld>
+</file>
+
+<file path=ppt/slides/slide50.xml><?xml version="1.0" encoding="utf-8"?>
+<p:sld xmlns:a="http://schemas.openxmlformats.org/drawingml/2006/main" xmlns:r="http://schemas.openxmlformats.org/officeDocument/2006/relationships" xmlns:p="http://schemas.openxmlformats.org/presentationml/2006/main">
+  <p:cSld name="Slide 50">
+    <p:spTree>
+      <p:nvGrpSpPr>
+        <p:cNvPr id="1" name=""/>
+        <p:cNvGrpSpPr/>
+        <p:nvPr/>
+      </p:nvGrpSpPr>
+      <p:grpSpPr>
+        <a:xfrm>
+          <a:off x="0" y="0"/>
+          <a:ext cx="0" cy="0"/>
+          <a:chOff x="0" y="0"/>
+          <a:chExt cx="0" cy="0"/>
+        </a:xfrm>
+      </p:grpSpPr>
+      <p:sp>
+        <p:nvSpPr>
+          <p:cNvPr id="2" name="Text 0"/>
+          <p:cNvSpPr/>
+          <p:nvPr/>
+        </p:nvSpPr>
+        <p:spPr>
+          <a:xfrm>
+            <a:off x="457200" y="713232"/>
+            <a:ext cx="11368735" cy="274320"/>
+          </a:xfrm>
+          <a:prstGeom prst="rect">
+            <a:avLst/>
+          </a:prstGeom>
+          <a:noFill/>
+          <a:ln/>
+        </p:spPr>
+        <p:txBody>
+          <a:bodyPr wrap="square" lIns="0" tIns="0" rIns="0" bIns="0" rtlCol="0" anchor="ctr"/>
+          <a:lstStyle/>
+          <a:p>
+            <a:pPr algn="r" indent="0" marL="0">
+              <a:buNone/>
+            </a:pPr>
+            <a:r>
+              <a:rPr lang="en-US" sz="1400" b="1" dirty="0">
+                <a:solidFill>
+                  <a:srgbClr val="1C3F6E"/>
+                </a:solidFill>
+                <a:latin typeface="Calibri" pitchFamily="34" charset="0"/>
+                <a:ea typeface="Calibri" pitchFamily="34" charset="-122"/>
+                <a:cs typeface="Calibri" pitchFamily="34" charset="-120"/>
+              </a:rPr>
+              <a:t>NEXT LESSON</a:t>
+            </a:r>
+            <a:endParaRPr lang="en-US" sz="1400" dirty="0"/>
+          </a:p>
+        </p:txBody>
+      </p:sp>
+      <p:pic>
+        <p:nvPicPr>
+          <p:cNvPr id="3" name="Image 0" descr="/home/claude/f4/img/minesec_sheet.png">    </p:cNvPr>
+          <p:cNvPicPr>
+            <a:picLocks noChangeAspect="1"/>
+          </p:cNvPicPr>
+          <p:nvPr/>
+        </p:nvPicPr>
+        <p:blipFill>
+          <a:blip r:embed="rId1"/>
+          <a:stretch>
+            <a:fillRect/>
+          </a:stretch>
+        </p:blipFill>
+        <p:spPr>
+          <a:xfrm>
+            <a:off x="0" y="658368"/>
+            <a:ext cx="5120640" cy="5833872"/>
+          </a:xfrm>
+          <a:prstGeom prst="rect">
+            <a:avLst/>
+          </a:prstGeom>
+        </p:spPr>
+      </p:pic>
+      <p:sp>
+        <p:nvSpPr>
+          <p:cNvPr id="4" name="Text 1"/>
+          <p:cNvSpPr/>
+          <p:nvPr/>
+        </p:nvSpPr>
+        <p:spPr>
+          <a:xfrm>
+            <a:off x="5349240" y="1005840"/>
+            <a:ext cx="6522415" cy="731520"/>
+          </a:xfrm>
+          <a:prstGeom prst="rect">
+            <a:avLst/>
+          </a:prstGeom>
+          <a:noFill/>
+          <a:ln/>
+        </p:spPr>
+        <p:txBody>
+          <a:bodyPr wrap="square" lIns="0" tIns="0" rIns="0" bIns="0" rtlCol="0" anchor="ctr">
+            <a:normAutofit/>
+          </a:bodyPr>
+          <a:lstStyle/>
+          <a:p>
+            <a:pPr algn="ctr" indent="0" marL="0">
+              <a:buNone/>
+            </a:pPr>
+            <a:r>
+              <a:rPr lang="en-US" sz="3600" b="1" dirty="0">
+                <a:solidFill>
+                  <a:srgbClr val="990011"/>
+                </a:solidFill>
+                <a:latin typeface="Times New Roman" pitchFamily="34" charset="0"/>
+                <a:ea typeface="Times New Roman" pitchFamily="34" charset="-122"/>
+                <a:cs typeface="Times New Roman" pitchFamily="34" charset="-120"/>
+              </a:rPr>
+              <a:t>Next Lesson</a:t>
+            </a:r>
+            <a:endParaRPr lang="en-US" sz="3600" dirty="0"/>
+          </a:p>
+        </p:txBody>
+      </p:sp>
+      <p:sp>
+        <p:nvSpPr>
+          <p:cNvPr id="5" name="Text 2"/>
+          <p:cNvSpPr/>
+          <p:nvPr/>
+        </p:nvSpPr>
+        <p:spPr>
+          <a:xfrm>
+            <a:off x="5349240" y="1783080"/>
+            <a:ext cx="6522415" cy="4663440"/>
+          </a:xfrm>
+          <a:prstGeom prst="rect">
+            <a:avLst/>
+          </a:prstGeom>
+          <a:noFill/>
+          <a:ln/>
+        </p:spPr>
+        <p:txBody>
+          <a:bodyPr wrap="square" lIns="0" tIns="0" rIns="0" bIns="0" rtlCol="0" anchor="ctr"/>
+          <a:lstStyle/>
+          <a:p>
+            <a:pPr algn="ctr" indent="0" marL="0">
+              <a:spcAft>
+                <a:spcPts val="800"/>
+              </a:spcAft>
+              <a:buNone/>
+            </a:pPr>
+            <a:r>
+              <a:rPr lang="en-US" sz="4000" b="1" dirty="0">
+                <a:solidFill>
+                  <a:srgbClr val="111111"/>
+                </a:solidFill>
+                <a:latin typeface="Times New Roman" pitchFamily="34" charset="0"/>
+                <a:ea typeface="Times New Roman" pitchFamily="34" charset="-122"/>
+                <a:cs typeface="Times New Roman" pitchFamily="34" charset="-120"/>
+              </a:rPr>
+              <a:t>Our next lesson will be on:</a:t>
+            </a:r>
+            <a:endParaRPr lang="en-US" sz="4000" dirty="0"/>
+          </a:p>
+          <a:p>
+            <a:pPr algn="ctr" indent="0" marL="0">
+              <a:spcAft>
+                <a:spcPts val="800"/>
+              </a:spcAft>
+              <a:buNone/>
+            </a:pPr>
+            <a:r>
+              <a:rPr lang="en-US" sz="4000" b="1" dirty="0">
+                <a:solidFill>
+                  <a:srgbClr val="990011"/>
+                </a:solidFill>
+                <a:latin typeface="Times New Roman" pitchFamily="34" charset="0"/>
+                <a:ea typeface="Times New Roman" pitchFamily="34" charset="-122"/>
+                <a:cs typeface="Times New Roman" pitchFamily="34" charset="-120"/>
+              </a:rPr>
+              <a:t>Practical Work 3: Identification of the Biological Resources of Cameroon</a:t>
+            </a:r>
+            <a:endParaRPr lang="en-US" sz="4000" dirty="0"/>
+          </a:p>
+        </p:txBody>
+      </p:sp>
+      <p:sp>
+        <p:nvSpPr>
+          <p:cNvPr id="25" name="Slide Number Placeholder 0"/>
+          <p:cNvSpPr>
+            <a:spLocks noGrp="1"/>
+          </p:cNvSpPr>
+          <p:nvPr>
+            <p:ph type="sldNum" sz="quarter" idx="4294967295"/>
+          </p:nvPr>
+        </p:nvSpPr>
+        <p:spPr>
+          <a:xfrm>
+            <a:off x="27432" y="91440"/>
+            <a:ext cx="585216" cy="475488"/>
+          </a:xfrm>
+          <a:prstGeom prst="rect">
+            <a:avLst/>
+          </a:prstGeom>
+          <a:extLst>
+            <a:ext uri="{C572A759-6A51-4108-AA02-DFA0A04FC94B}">
+              <ma14:wrappingTextBoxFlag xmlns:ma14="http://schemas.microsoft.com/office/mac/drawingml/2011/main" val="0"/>
+            </a:ext>
+          </a:extLst>
+        </p:spPr>
+        <p:txBody>
+          <a:bodyPr/>
+          <a:lstStyle>
+            <a:lvl1pPr>
+              <a:defRPr sz="2000">
+                <a:solidFill>
+                  <a:srgbClr val="FFFFFF"/>
+                </a:solidFill>
+                <a:latin typeface="Calibri"/>
+                <a:ea typeface="Calibri"/>
+                <a:cs typeface="Calibri"/>
+              </a:defRPr>
+            </a:lvl1pPr>
+          </a:lstStyle>
+          <a:p>
+            <a:pPr algn="ctr"/>
+            <a:fld id="{F7021451-1387-4CA6-816F-3879F97B5CBC}" type="slidenum">
+              <a:rPr b="1" lang="en-US"/>
+              <a:t>50</a:t>
+            </a:fld>
+            <a:endParaRPr lang="en-US"/>
+          </a:p>
+        </p:txBody>
+      </p:sp>
+    </p:spTree>
+  </p:cSld>
+  <p:clrMapOvr>
+    <a:masterClrMapping/>
+  </p:clrMapOvr>
+</p:sld>
+</file>
+
+<file path=ppt/slides/slide51.xml><?xml version="1.0" encoding="utf-8"?>
+<p:sld xmlns:a="http://schemas.openxmlformats.org/drawingml/2006/main" xmlns:r="http://schemas.openxmlformats.org/officeDocument/2006/relationships" xmlns:p="http://schemas.openxmlformats.org/presentationml/2006/main">
+  <p:cSld name="Slide 51">
+    <p:spTree>
+      <p:nvGrpSpPr>
+        <p:cNvPr id="1" name=""/>
+        <p:cNvGrpSpPr/>
+        <p:nvPr/>
+      </p:nvGrpSpPr>
+      <p:grpSpPr>
+        <a:xfrm>
+          <a:off x="0" y="0"/>
+          <a:ext cx="0" cy="0"/>
+          <a:chOff x="0" y="0"/>
+          <a:chExt cx="0" cy="0"/>
+        </a:xfrm>
+      </p:grpSpPr>
+      <p:sp>
+        <p:nvSpPr>
+          <p:cNvPr id="2" name="Text 0"/>
+          <p:cNvSpPr/>
+          <p:nvPr/>
+        </p:nvSpPr>
+        <p:spPr>
+          <a:xfrm>
+            <a:off x="457200" y="713232"/>
+            <a:ext cx="11368735" cy="274320"/>
+          </a:xfrm>
+          <a:prstGeom prst="rect">
+            <a:avLst/>
+          </a:prstGeom>
+          <a:noFill/>
+          <a:ln/>
+        </p:spPr>
+        <p:txBody>
+          <a:bodyPr wrap="square" lIns="0" tIns="0" rIns="0" bIns="0" rtlCol="0" anchor="ctr"/>
+          <a:lstStyle/>
+          <a:p>
+            <a:pPr algn="r" indent="0" marL="0">
+              <a:buNone/>
+            </a:pPr>
+            <a:r>
+              <a:rPr lang="en-US" sz="1400" b="1" dirty="0">
+                <a:solidFill>
+                  <a:srgbClr val="1C3F6E"/>
+                </a:solidFill>
+                <a:latin typeface="Calibri" pitchFamily="34" charset="0"/>
+                <a:ea typeface="Calibri" pitchFamily="34" charset="-122"/>
+                <a:cs typeface="Calibri" pitchFamily="34" charset="-120"/>
+              </a:rPr>
               <a:t>BILINGUAL GAME</a:t>
             </a:r>
             <a:endParaRPr lang="en-US" sz="1400" dirty="0"/>
@@ -16679,7 +18428,7 @@
       </p:sp>
       <p:graphicFrame>
         <p:nvGraphicFramePr>
-          <p:cNvPr id="48" name="Table 0"/>
+          <p:cNvPr id="52" name="Table 0"/>
           <p:cNvGraphicFramePr>
             <a:graphicFrameLocks noGrp="1"/>
           </p:cNvGraphicFramePr>
@@ -17715,7 +19464,7 @@
             <a:pPr algn="ctr"/>
             <a:fld id="{F7021451-1387-4CA6-816F-3879F97B5CBC}" type="slidenum">
               <a:rPr b="1" lang="en-US"/>
-              <a:t>47</a:t>
+              <a:t>51</a:t>
             </a:fld>
             <a:endParaRPr lang="en-US"/>
           </a:p>
@@ -17729,9 +19478,9 @@
 </p:sld>
 </file>
 
-<file path=ppt/slides/slide48.xml><?xml version="1.0" encoding="utf-8"?>
+<file path=ppt/slides/slide52.xml><?xml version="1.0" encoding="utf-8"?>
 <p:sld xmlns:a="http://schemas.openxmlformats.org/drawingml/2006/main" xmlns:r="http://schemas.openxmlformats.org/officeDocument/2006/relationships" xmlns:p="http://schemas.openxmlformats.org/presentationml/2006/main">
-  <p:cSld name="Slide 48">
+  <p:cSld name="Slide 52">
     <p:spTree>
       <p:nvGrpSpPr>
         <p:cNvPr id="1" name=""/>
@@ -17826,7 +19575,7 @@
       </p:sp>
       <p:graphicFrame>
         <p:nvGraphicFramePr>
-          <p:cNvPr id="49" name="Table 0"/>
+          <p:cNvPr id="53" name="Table 0"/>
           <p:cNvGraphicFramePr>
             <a:graphicFrameLocks noGrp="1"/>
           </p:cNvGraphicFramePr>
@@ -18212,7 +19961,7 @@
                           <a:ea typeface="Calibri" pitchFamily="34" charset="-122"/>
                           <a:cs typeface="Calibri" pitchFamily="34" charset="-120"/>
                         </a:rPr>
-                        <a:t>Identify products gathered from the wild in Cameroon. Describe methods of collection. Explain their socio-cultural and economic importance.</a:t>
+                        <a:t>Identify products gathered from the wild in Cameroon. Describe the methods of collection and processing. Explain their socio-cultural and economic importance.</a:t>
                       </a:r>
                       <a:endParaRPr lang="en-US" sz="1600" dirty="0">
                         <a:latin typeface="Calibri" charset="0"/>
@@ -18448,7 +20197,7 @@
             <a:pPr algn="ctr"/>
             <a:fld id="{F7021451-1387-4CA6-816F-3879F97B5CBC}" type="slidenum">
               <a:rPr b="1" lang="en-US"/>
-              <a:t>48</a:t>
+              <a:t>52</a:t>
             </a:fld>
             <a:endParaRPr lang="en-US"/>
           </a:p>
@@ -18462,9 +20211,9 @@
 </p:sld>
 </file>
 
-<file path=ppt/slides/slide49.xml><?xml version="1.0" encoding="utf-8"?>
+<file path=ppt/slides/slide53.xml><?xml version="1.0" encoding="utf-8"?>
 <p:sld xmlns:a="http://schemas.openxmlformats.org/drawingml/2006/main" xmlns:r="http://schemas.openxmlformats.org/officeDocument/2006/relationships" xmlns:p="http://schemas.openxmlformats.org/presentationml/2006/main">
-  <p:cSld name="Slide 49">
+  <p:cSld name="Slide 53">
     <p:spTree>
       <p:nvGrpSpPr>
         <p:cNvPr id="1" name=""/>
@@ -18559,7 +20308,7 @@
       </p:sp>
       <p:graphicFrame>
         <p:nvGraphicFramePr>
-          <p:cNvPr id="50" name="Table 0"/>
+          <p:cNvPr id="54" name="Table 0"/>
           <p:cNvGraphicFramePr>
             <a:graphicFrameLocks noGrp="1"/>
           </p:cNvGraphicFramePr>
@@ -18669,7 +20418,7 @@
                           <a:ea typeface="Calibri" pitchFamily="34" charset="-122"/>
                           <a:cs typeface="Calibri" pitchFamily="34" charset="-120"/>
                         </a:rPr>
-                        <a:t>DEFINITIONS; Identification; Methods of Collection; Importance.</a:t>
+                        <a:t>DEFINITIONS; Identification of the Products; Methods of Collection and Processing; Socio-cultural and Economic Importance.</a:t>
                       </a:r>
                       <a:endParaRPr lang="en-US" sz="1600" dirty="0">
                         <a:latin typeface="Calibri" charset="0"/>
@@ -19319,7 +21068,7 @@
             <a:pPr algn="ctr"/>
             <a:fld id="{F7021451-1387-4CA6-816F-3879F97B5CBC}" type="slidenum">
               <a:rPr b="1" lang="en-US"/>
-              <a:t>49</a:t>
+              <a:t>53</a:t>
             </a:fld>
             <a:endParaRPr lang="en-US"/>
           </a:p>
@@ -19333,9 +21082,9 @@
 </p:sld>
 </file>
 
-<file path=ppt/slides/slide5.xml><?xml version="1.0" encoding="utf-8"?>
+<file path=ppt/slides/slide54.xml><?xml version="1.0" encoding="utf-8"?>
 <p:sld xmlns:a="http://schemas.openxmlformats.org/drawingml/2006/main" xmlns:r="http://schemas.openxmlformats.org/officeDocument/2006/relationships" xmlns:p="http://schemas.openxmlformats.org/presentationml/2006/main">
-  <p:cSld name="Slide 5">
+  <p:cSld name="Slide 54">
     <p:spTree>
       <p:nvGrpSpPr>
         <p:cNvPr id="1" name=""/>
@@ -19383,7 +21132,7 @@
                 <a:ea typeface="Calibri" pitchFamily="34" charset="-122"/>
                 <a:cs typeface="Calibri" pitchFamily="34" charset="-120"/>
               </a:rPr>
-              <a:t>HOMEWORK CORRECTION</a:t>
+              <a:t>TEACHER'S NOTE</a:t>
             </a:r>
             <a:endParaRPr lang="en-US" sz="1400" dirty="0"/>
           </a:p>
@@ -19406,7 +21155,7 @@
         <p:spPr>
           <a:xfrm>
             <a:off x="0" y="658368"/>
-            <a:ext cx="5120640" cy="5833872"/>
+            <a:ext cx="3840480" cy="5833872"/>
           </a:xfrm>
           <a:prstGeom prst="rect">
             <a:avLst/>
@@ -19421,8 +21170,8 @@
         </p:nvSpPr>
         <p:spPr>
           <a:xfrm>
-            <a:off x="5349240" y="1005840"/>
-            <a:ext cx="6522415" cy="731520"/>
+            <a:off x="4069080" y="1005840"/>
+            <a:ext cx="7802575" cy="731520"/>
           </a:xfrm>
           <a:prstGeom prst="rect">
             <a:avLst/>
@@ -19448,7 +21197,7 @@
                 <a:ea typeface="Times New Roman" pitchFamily="34" charset="-122"/>
                 <a:cs typeface="Times New Roman" pitchFamily="34" charset="-120"/>
               </a:rPr>
-              <a:t>Correction: Possible Answer</a:t>
+              <a:t>Teacher's Note</a:t>
             </a:r>
             <a:endParaRPr lang="en-US" sz="3600" dirty="0"/>
           </a:p>
@@ -19462,8 +21211,8 @@
         </p:nvSpPr>
         <p:spPr>
           <a:xfrm>
-            <a:off x="5349240" y="1783080"/>
-            <a:ext cx="6522415" cy="4663440"/>
+            <a:off x="4069080" y="1783080"/>
+            <a:ext cx="7802575" cy="4663440"/>
           </a:xfrm>
           <a:prstGeom prst="rect">
             <a:avLst/>
@@ -19475,24 +21224,130 @@
           <a:bodyPr wrap="square" lIns="0" tIns="0" rIns="0" bIns="0" rtlCol="0" anchor="t"/>
           <a:lstStyle/>
           <a:p>
-            <a:pPr algn="l" indent="0" marL="0">
+            <a:pPr algn="l" marL="342900" indent="-342900">
               <a:spcAft>
                 <a:spcPts val="800"/>
               </a:spcAft>
-              <a:buNone/>
+              <a:buSzPct val="100000"/>
+              <a:buChar char="•"/>
             </a:pPr>
             <a:r>
-              <a:rPr lang="en-US" sz="4000" dirty="0">
+              <a:rPr lang="en-US" sz="2000" dirty="0">
                 <a:solidFill>
                   <a:srgbClr val="111111"/>
                 </a:solidFill>
-                <a:latin typeface="Times New Roman" pitchFamily="34" charset="0"/>
-                <a:ea typeface="Times New Roman" pitchFamily="34" charset="-122"/>
-                <a:cs typeface="Times New Roman" pitchFamily="34" charset="-120"/>
+                <a:latin typeface="Calibri" pitchFamily="34" charset="0"/>
+                <a:ea typeface="Calibri" pitchFamily="34" charset="-122"/>
+                <a:cs typeface="Calibri" pitchFamily="34" charset="-120"/>
               </a:rPr>
-              <a:t>Answers vary. Example: about 3,000 to 5,000 FCFA a week for firewood or a bag of charcoal.</a:t>
-            </a:r>
-            <a:endParaRPr lang="en-US" sz="4000" dirty="0"/>
+              <a:t>Timing: Homework correction, plan, objectives 8 min | Recall, situation, action 10 min | 5 activities 30 min | Board summary (copying) 30 min | Evaluation, remediation 10 min | Homework, next lesson 5 min | Logbook 7 min</a:t>
+            </a:r>
+            <a:endParaRPr lang="en-US" sz="2000" dirty="0"/>
+          </a:p>
+          <a:p>
+            <a:pPr algn="l" marL="342900" indent="-342900">
+              <a:spcAft>
+                <a:spcPts val="800"/>
+              </a:spcAft>
+              <a:buSzPct val="100000"/>
+              <a:buChar char="•"/>
+            </a:pPr>
+            <a:r>
+              <a:rPr lang="en-US" sz="2000" dirty="0">
+                <a:solidFill>
+                  <a:srgbClr val="111111"/>
+                </a:solidFill>
+                <a:latin typeface="Calibri" pitchFamily="34" charset="0"/>
+                <a:ea typeface="Calibri" pitchFamily="34" charset="-122"/>
+                <a:cs typeface="Calibri" pitchFamily="34" charset="-120"/>
+              </a:rPr>
+              <a:t>Without the projector (Activity 1): bring examples from the market.</a:t>
+            </a:r>
+            <a:endParaRPr lang="en-US" sz="2000" dirty="0"/>
+          </a:p>
+          <a:p>
+            <a:pPr algn="l" marL="342900" indent="-342900">
+              <a:spcAft>
+                <a:spcPts val="800"/>
+              </a:spcAft>
+              <a:buSzPct val="100000"/>
+              <a:buChar char="•"/>
+            </a:pPr>
+            <a:r>
+              <a:rPr lang="en-US" sz="2000" dirty="0">
+                <a:solidFill>
+                  <a:srgbClr val="111111"/>
+                </a:solidFill>
+                <a:latin typeface="Calibri" pitchFamily="34" charset="0"/>
+                <a:ea typeface="Calibri" pitchFamily="34" charset="-122"/>
+                <a:cs typeface="Calibri" pitchFamily="34" charset="-120"/>
+              </a:rPr>
+              <a:t>Without the projector (Activity 2): describe shea butter.</a:t>
+            </a:r>
+            <a:endParaRPr lang="en-US" sz="2000" dirty="0"/>
+          </a:p>
+          <a:p>
+            <a:pPr algn="l" marL="342900" indent="-342900">
+              <a:spcAft>
+                <a:spcPts val="800"/>
+              </a:spcAft>
+              <a:buSzPct val="100000"/>
+              <a:buChar char="•"/>
+            </a:pPr>
+            <a:r>
+              <a:rPr lang="en-US" sz="2000" dirty="0">
+                <a:solidFill>
+                  <a:srgbClr val="111111"/>
+                </a:solidFill>
+                <a:latin typeface="Calibri" pitchFamily="34" charset="0"/>
+                <a:ea typeface="Calibri" pitchFamily="34" charset="-122"/>
+                <a:cs typeface="Calibri" pitchFamily="34" charset="-120"/>
+              </a:rPr>
+              <a:t>Without the projector (Activity 3): describe harvesting.</a:t>
+            </a:r>
+            <a:endParaRPr lang="en-US" sz="2000" dirty="0"/>
+          </a:p>
+          <a:p>
+            <a:pPr algn="l" marL="342900" indent="-342900">
+              <a:spcAft>
+                <a:spcPts val="800"/>
+              </a:spcAft>
+              <a:buSzPct val="100000"/>
+              <a:buChar char="•"/>
+            </a:pPr>
+            <a:r>
+              <a:rPr lang="en-US" sz="2000" dirty="0">
+                <a:solidFill>
+                  <a:srgbClr val="111111"/>
+                </a:solidFill>
+                <a:latin typeface="Calibri" pitchFamily="34" charset="0"/>
+                <a:ea typeface="Calibri" pitchFamily="34" charset="-122"/>
+                <a:cs typeface="Calibri" pitchFamily="34" charset="-120"/>
+              </a:rPr>
+              <a:t>Without the projector (Activity 4): list prices in the market.</a:t>
+            </a:r>
+            <a:endParaRPr lang="en-US" sz="2000" dirty="0"/>
+          </a:p>
+          <a:p>
+            <a:pPr algn="l" marL="342900" indent="-342900">
+              <a:spcAft>
+                <a:spcPts val="800"/>
+              </a:spcAft>
+              <a:buSzPct val="100000"/>
+              <a:buChar char="•"/>
+            </a:pPr>
+            <a:r>
+              <a:rPr lang="en-US" sz="2000" dirty="0">
+                <a:solidFill>
+                  <a:srgbClr val="111111"/>
+                </a:solidFill>
+                <a:latin typeface="Calibri" pitchFamily="34" charset="0"/>
+                <a:ea typeface="Calibri" pitchFamily="34" charset="-122"/>
+                <a:cs typeface="Calibri" pitchFamily="34" charset="-120"/>
+              </a:rPr>
+              <a:t>Without the projector (Activity 5): ask about cola nuts at ceremonies.</a:t>
+            </a:r>
+            <a:endParaRPr lang="en-US" sz="2000" dirty="0"/>
           </a:p>
         </p:txBody>
       </p:sp>
@@ -19538,7 +21393,7 @@
             <a:pPr algn="ctr"/>
             <a:fld id="{F7021451-1387-4CA6-816F-3879F97B5CBC}" type="slidenum">
               <a:rPr b="1" lang="en-US"/>
-              <a:t>5</a:t>
+              <a:t>54</a:t>
             </a:fld>
             <a:endParaRPr lang="en-US"/>
           </a:p>
@@ -19552,9 +21407,9 @@
 </p:sld>
 </file>
 
-<file path=ppt/slides/slide50.xml><?xml version="1.0" encoding="utf-8"?>
+<file path=ppt/slides/slide55.xml><?xml version="1.0" encoding="utf-8"?>
 <p:sld xmlns:a="http://schemas.openxmlformats.org/drawingml/2006/main" xmlns:r="http://schemas.openxmlformats.org/officeDocument/2006/relationships" xmlns:p="http://schemas.openxmlformats.org/presentationml/2006/main">
-  <p:cSld name="Slide 50">
+  <p:cSld name="Slide 55">
     <p:spTree>
       <p:nvGrpSpPr>
         <p:cNvPr id="1" name=""/>
@@ -19602,7 +21457,7 @@
                 <a:ea typeface="Calibri" pitchFamily="34" charset="-122"/>
                 <a:cs typeface="Calibri" pitchFamily="34" charset="-120"/>
               </a:rPr>
-              <a:t>TEACHER'S NOTE</a:t>
+              <a:t>REFERENCES</a:t>
             </a:r>
             <a:endParaRPr lang="en-US" sz="1400" dirty="0"/>
           </a:p>
@@ -19625,7 +21480,7 @@
         <p:spPr>
           <a:xfrm>
             <a:off x="0" y="658368"/>
-            <a:ext cx="3840480" cy="5833872"/>
+            <a:ext cx="1463040" cy="5833872"/>
           </a:xfrm>
           <a:prstGeom prst="rect">
             <a:avLst/>
@@ -19640,8 +21495,8 @@
         </p:nvSpPr>
         <p:spPr>
           <a:xfrm>
-            <a:off x="4069080" y="1005840"/>
-            <a:ext cx="7802575" cy="731520"/>
+            <a:off x="1691640" y="1005840"/>
+            <a:ext cx="10180015" cy="731520"/>
           </a:xfrm>
           <a:prstGeom prst="rect">
             <a:avLst/>
@@ -19667,7 +21522,7 @@
                 <a:ea typeface="Times New Roman" pitchFamily="34" charset="-122"/>
                 <a:cs typeface="Times New Roman" pitchFamily="34" charset="-120"/>
               </a:rPr>
-              <a:t>Teacher's Note</a:t>
+              <a:t>References</a:t>
             </a:r>
             <a:endParaRPr lang="en-US" sz="3600" dirty="0"/>
           </a:p>
@@ -19681,8 +21536,8 @@
         </p:nvSpPr>
         <p:spPr>
           <a:xfrm>
-            <a:off x="4069080" y="1783080"/>
-            <a:ext cx="7802575" cy="4663440"/>
+            <a:off x="1691640" y="1783080"/>
+            <a:ext cx="10180015" cy="4663440"/>
           </a:xfrm>
           <a:prstGeom prst="rect">
             <a:avLst/>
@@ -19702,7 +21557,7 @@
               <a:buChar char="•"/>
             </a:pPr>
             <a:r>
-              <a:rPr lang="en-US" sz="2000" dirty="0">
+              <a:rPr lang="en-US" sz="1800" dirty="0">
                 <a:solidFill>
                   <a:srgbClr val="111111"/>
                 </a:solidFill>
@@ -19710,9 +21565,9 @@
                 <a:ea typeface="Calibri" pitchFamily="34" charset="-122"/>
                 <a:cs typeface="Calibri" pitchFamily="34" charset="-120"/>
               </a:rPr>
-              <a:t>Timing: Homework correction, plan, objectives 8 min | Recall, situation, action 10 min | 5 activities 30 min | Board summary (copying) 30 min | Evaluation, remediation 10 min | Homework, next lesson 5 min | Logbook 7 min</a:t>
-            </a:r>
-            <a:endParaRPr lang="en-US" sz="2000" dirty="0"/>
+              <a:t>Geography Syllabus, Forms I–V, MINESEC (2023) — Form 2, Module 1: Man in his Environment.</a:t>
+            </a:r>
+            <a:endParaRPr lang="en-US" sz="1800" dirty="0"/>
           </a:p>
           <a:p>
             <a:pPr algn="l" marL="342900" indent="-342900">
@@ -19723,7 +21578,7 @@
               <a:buChar char="•"/>
             </a:pPr>
             <a:r>
-              <a:rPr lang="en-US" sz="2000" dirty="0">
+              <a:rPr lang="en-US" sz="1800" dirty="0">
                 <a:solidFill>
                   <a:srgbClr val="111111"/>
                 </a:solidFill>
@@ -19731,9 +21586,9 @@
                 <a:ea typeface="Calibri" pitchFamily="34" charset="-122"/>
                 <a:cs typeface="Calibri" pitchFamily="34" charset="-120"/>
               </a:rPr>
-              <a:t>Without the projector (Activity 1): bring examples from the market.</a:t>
-            </a:r>
-            <a:endParaRPr lang="en-US" sz="2000" dirty="0"/>
+              <a:t>Photo, Activity 1: “MEDICINE MARKET - SEOUL” by U.S. Army Korea (Historical Image Archive), CC BY-NC-ND 2.0, via Flickr (https://www.flickr.com/photos/28486074@N08/2920744660)</a:t>
+            </a:r>
+            <a:endParaRPr lang="en-US" sz="1800" dirty="0"/>
           </a:p>
           <a:p>
             <a:pPr algn="l" marL="342900" indent="-342900">
@@ -19744,7 +21599,7 @@
               <a:buChar char="•"/>
             </a:pPr>
             <a:r>
-              <a:rPr lang="en-US" sz="2000" dirty="0">
+              <a:rPr lang="en-US" sz="1800" dirty="0">
                 <a:solidFill>
                   <a:srgbClr val="111111"/>
                 </a:solidFill>
@@ -19752,9 +21607,9 @@
                 <a:ea typeface="Calibri" pitchFamily="34" charset="-122"/>
                 <a:cs typeface="Calibri" pitchFamily="34" charset="-120"/>
               </a:rPr>
-              <a:t>Without the projector (Activity 2): describe shea butter.</a:t>
-            </a:r>
-            <a:endParaRPr lang="en-US" sz="2000" dirty="0"/>
+              <a:t>Photo, Activity 2: “Female shea tree (Vitellaria paradoxa) in full flower” by Joel Abroad, CC BY-NC-SA 2.0, via Flickr (https://www.flickr.com/photos/40295335@N00/5603751456)</a:t>
+            </a:r>
+            <a:endParaRPr lang="en-US" sz="1800" dirty="0"/>
           </a:p>
           <a:p>
             <a:pPr algn="l" marL="342900" indent="-342900">
@@ -19765,7 +21620,7 @@
               <a:buChar char="•"/>
             </a:pPr>
             <a:r>
-              <a:rPr lang="en-US" sz="2000" dirty="0">
+              <a:rPr lang="en-US" sz="1800" dirty="0">
                 <a:solidFill>
                   <a:srgbClr val="111111"/>
                 </a:solidFill>
@@ -19773,9 +21628,9 @@
                 <a:ea typeface="Calibri" pitchFamily="34" charset="-122"/>
                 <a:cs typeface="Calibri" pitchFamily="34" charset="-120"/>
               </a:rPr>
-              <a:t>Without the projector (Activity 3): describe harvesting.</a:t>
-            </a:r>
-            <a:endParaRPr lang="en-US" sz="2000" dirty="0"/>
+              <a:t>Photo, Activity 3: “Bee pollinating flower” by tombayly13, CC BY-SA 2.0, via Flickr (https://www.flickr.com/photos/60174932@N05/5797724005)</a:t>
+            </a:r>
+            <a:endParaRPr lang="en-US" sz="1800" dirty="0"/>
           </a:p>
           <a:p>
             <a:pPr algn="l" marL="342900" indent="-342900">
@@ -19786,7 +21641,7 @@
               <a:buChar char="•"/>
             </a:pPr>
             <a:r>
-              <a:rPr lang="en-US" sz="2000" dirty="0">
+              <a:rPr lang="en-US" sz="1800" dirty="0">
                 <a:solidFill>
                   <a:srgbClr val="111111"/>
                 </a:solidFill>
@@ -19794,9 +21649,9 @@
                 <a:ea typeface="Calibri" pitchFamily="34" charset="-122"/>
                 <a:cs typeface="Calibri" pitchFamily="34" charset="-120"/>
               </a:rPr>
-              <a:t>Without the projector (Activity 4): list prices in the market.</a:t>
-            </a:r>
-            <a:endParaRPr lang="en-US" sz="2000" dirty="0"/>
+              <a:t>Photo, Activity 4: “Sandga Market in Douala, Cameroon” by The Advocacy Project, CC BY-NC-SA 2.0, via Flickr (https://www.flickr.com/photos/42487558@N00/3636438732)</a:t>
+            </a:r>
+            <a:endParaRPr lang="en-US" sz="1800" dirty="0"/>
           </a:p>
           <a:p>
             <a:pPr algn="l" marL="342900" indent="-342900">
@@ -19807,7 +21662,7 @@
               <a:buChar char="•"/>
             </a:pPr>
             <a:r>
-              <a:rPr lang="en-US" sz="2000" dirty="0">
+              <a:rPr lang="en-US" sz="1800" dirty="0">
                 <a:solidFill>
                   <a:srgbClr val="111111"/>
                 </a:solidFill>
@@ -19815,9 +21670,30 @@
                 <a:ea typeface="Calibri" pitchFamily="34" charset="-122"/>
                 <a:cs typeface="Calibri" pitchFamily="34" charset="-120"/>
               </a:rPr>
-              <a:t>Without the projector (Activity 5): ask about cola nuts at ceremonies.</a:t>
-            </a:r>
-            <a:endParaRPr lang="en-US" sz="2000" dirty="0"/>
+              <a:t>Photo, Activity 5: “Amazon 11” by CIAT International Center for Tropical Agriculture, CC BY-SA 2.0, via Flickr (https://www.flickr.com/photos/38476503@N08/5641587148)</a:t>
+            </a:r>
+            <a:endParaRPr lang="en-US" sz="1800" dirty="0"/>
+          </a:p>
+          <a:p>
+            <a:pPr algn="l" marL="342900" indent="-342900">
+              <a:spcAft>
+                <a:spcPts val="800"/>
+              </a:spcAft>
+              <a:buSzPct val="100000"/>
+              <a:buChar char="•"/>
+            </a:pPr>
+            <a:r>
+              <a:rPr lang="en-US" sz="1800" dirty="0">
+                <a:solidFill>
+                  <a:srgbClr val="111111"/>
+                </a:solidFill>
+                <a:latin typeface="Calibri" pitchFamily="34" charset="0"/>
+                <a:ea typeface="Calibri" pitchFamily="34" charset="-122"/>
+                <a:cs typeface="Calibri" pitchFamily="34" charset="-120"/>
+              </a:rPr>
+              <a:t>Diagrams and animations: drawn for this lesson (Geography Department).</a:t>
+            </a:r>
+            <a:endParaRPr lang="en-US" sz="1800" dirty="0"/>
           </a:p>
         </p:txBody>
       </p:sp>
@@ -19863,353 +21739,7 @@
             <a:pPr algn="ctr"/>
             <a:fld id="{F7021451-1387-4CA6-816F-3879F97B5CBC}" type="slidenum">
               <a:rPr b="1" lang="en-US"/>
-              <a:t>50</a:t>
-            </a:fld>
-            <a:endParaRPr lang="en-US"/>
-          </a:p>
-        </p:txBody>
-      </p:sp>
-    </p:spTree>
-  </p:cSld>
-  <p:clrMapOvr>
-    <a:masterClrMapping/>
-  </p:clrMapOvr>
-</p:sld>
-</file>
-
-<file path=ppt/slides/slide51.xml><?xml version="1.0" encoding="utf-8"?>
-<p:sld xmlns:a="http://schemas.openxmlformats.org/drawingml/2006/main" xmlns:r="http://schemas.openxmlformats.org/officeDocument/2006/relationships" xmlns:p="http://schemas.openxmlformats.org/presentationml/2006/main">
-  <p:cSld name="Slide 51">
-    <p:spTree>
-      <p:nvGrpSpPr>
-        <p:cNvPr id="1" name=""/>
-        <p:cNvGrpSpPr/>
-        <p:nvPr/>
-      </p:nvGrpSpPr>
-      <p:grpSpPr>
-        <a:xfrm>
-          <a:off x="0" y="0"/>
-          <a:ext cx="0" cy="0"/>
-          <a:chOff x="0" y="0"/>
-          <a:chExt cx="0" cy="0"/>
-        </a:xfrm>
-      </p:grpSpPr>
-      <p:sp>
-        <p:nvSpPr>
-          <p:cNvPr id="2" name="Text 0"/>
-          <p:cNvSpPr/>
-          <p:nvPr/>
-        </p:nvSpPr>
-        <p:spPr>
-          <a:xfrm>
-            <a:off x="457200" y="713232"/>
-            <a:ext cx="11368735" cy="274320"/>
-          </a:xfrm>
-          <a:prstGeom prst="rect">
-            <a:avLst/>
-          </a:prstGeom>
-          <a:noFill/>
-          <a:ln/>
-        </p:spPr>
-        <p:txBody>
-          <a:bodyPr wrap="square" lIns="0" tIns="0" rIns="0" bIns="0" rtlCol="0" anchor="ctr"/>
-          <a:lstStyle/>
-          <a:p>
-            <a:pPr algn="r" indent="0" marL="0">
-              <a:buNone/>
-            </a:pPr>
-            <a:r>
-              <a:rPr lang="en-US" sz="1400" b="1" dirty="0">
-                <a:solidFill>
-                  <a:srgbClr val="1C3F6E"/>
-                </a:solidFill>
-                <a:latin typeface="Calibri" pitchFamily="34" charset="0"/>
-                <a:ea typeface="Calibri" pitchFamily="34" charset="-122"/>
-                <a:cs typeface="Calibri" pitchFamily="34" charset="-120"/>
-              </a:rPr>
-              <a:t>REFERENCES</a:t>
-            </a:r>
-            <a:endParaRPr lang="en-US" sz="1400" dirty="0"/>
-          </a:p>
-        </p:txBody>
-      </p:sp>
-      <p:pic>
-        <p:nvPicPr>
-          <p:cNvPr id="3" name="Image 0" descr="/home/claude/f4/img/minesec_sheet.png">    </p:cNvPr>
-          <p:cNvPicPr>
-            <a:picLocks noChangeAspect="1"/>
-          </p:cNvPicPr>
-          <p:nvPr/>
-        </p:nvPicPr>
-        <p:blipFill>
-          <a:blip r:embed="rId1"/>
-          <a:stretch>
-            <a:fillRect/>
-          </a:stretch>
-        </p:blipFill>
-        <p:spPr>
-          <a:xfrm>
-            <a:off x="0" y="658368"/>
-            <a:ext cx="1463040" cy="5833872"/>
-          </a:xfrm>
-          <a:prstGeom prst="rect">
-            <a:avLst/>
-          </a:prstGeom>
-        </p:spPr>
-      </p:pic>
-      <p:sp>
-        <p:nvSpPr>
-          <p:cNvPr id="4" name="Text 1"/>
-          <p:cNvSpPr/>
-          <p:nvPr/>
-        </p:nvSpPr>
-        <p:spPr>
-          <a:xfrm>
-            <a:off x="1691640" y="1005840"/>
-            <a:ext cx="10180015" cy="731520"/>
-          </a:xfrm>
-          <a:prstGeom prst="rect">
-            <a:avLst/>
-          </a:prstGeom>
-          <a:noFill/>
-          <a:ln/>
-        </p:spPr>
-        <p:txBody>
-          <a:bodyPr wrap="square" lIns="0" tIns="0" rIns="0" bIns="0" rtlCol="0" anchor="ctr">
-            <a:normAutofit/>
-          </a:bodyPr>
-          <a:lstStyle/>
-          <a:p>
-            <a:pPr algn="ctr" indent="0" marL="0">
-              <a:buNone/>
-            </a:pPr>
-            <a:r>
-              <a:rPr lang="en-US" sz="3600" b="1" dirty="0">
-                <a:solidFill>
-                  <a:srgbClr val="990011"/>
-                </a:solidFill>
-                <a:latin typeface="Times New Roman" pitchFamily="34" charset="0"/>
-                <a:ea typeface="Times New Roman" pitchFamily="34" charset="-122"/>
-                <a:cs typeface="Times New Roman" pitchFamily="34" charset="-120"/>
-              </a:rPr>
-              <a:t>References</a:t>
-            </a:r>
-            <a:endParaRPr lang="en-US" sz="3600" dirty="0"/>
-          </a:p>
-        </p:txBody>
-      </p:sp>
-      <p:sp>
-        <p:nvSpPr>
-          <p:cNvPr id="5" name="Text 2"/>
-          <p:cNvSpPr/>
-          <p:nvPr/>
-        </p:nvSpPr>
-        <p:spPr>
-          <a:xfrm>
-            <a:off x="1691640" y="1783080"/>
-            <a:ext cx="10180015" cy="4663440"/>
-          </a:xfrm>
-          <a:prstGeom prst="rect">
-            <a:avLst/>
-          </a:prstGeom>
-          <a:noFill/>
-          <a:ln/>
-        </p:spPr>
-        <p:txBody>
-          <a:bodyPr wrap="square" lIns="0" tIns="0" rIns="0" bIns="0" rtlCol="0" anchor="t"/>
-          <a:lstStyle/>
-          <a:p>
-            <a:pPr algn="l" marL="342900" indent="-342900">
-              <a:spcAft>
-                <a:spcPts val="800"/>
-              </a:spcAft>
-              <a:buSzPct val="100000"/>
-              <a:buChar char="•"/>
-            </a:pPr>
-            <a:r>
-              <a:rPr lang="en-US" sz="1800" dirty="0">
-                <a:solidFill>
-                  <a:srgbClr val="111111"/>
-                </a:solidFill>
-                <a:latin typeface="Calibri" pitchFamily="34" charset="0"/>
-                <a:ea typeface="Calibri" pitchFamily="34" charset="-122"/>
-                <a:cs typeface="Calibri" pitchFamily="34" charset="-120"/>
-              </a:rPr>
-              <a:t>Geography Syllabus, Forms I–V, MINESEC (2023) — Form 2, Module 1: Man in his Environment.</a:t>
-            </a:r>
-            <a:endParaRPr lang="en-US" sz="1800" dirty="0"/>
-          </a:p>
-          <a:p>
-            <a:pPr algn="l" marL="342900" indent="-342900">
-              <a:spcAft>
-                <a:spcPts val="800"/>
-              </a:spcAft>
-              <a:buSzPct val="100000"/>
-              <a:buChar char="•"/>
-            </a:pPr>
-            <a:r>
-              <a:rPr lang="en-US" sz="1800" dirty="0">
-                <a:solidFill>
-                  <a:srgbClr val="111111"/>
-                </a:solidFill>
-                <a:latin typeface="Calibri" pitchFamily="34" charset="0"/>
-                <a:ea typeface="Calibri" pitchFamily="34" charset="-122"/>
-                <a:cs typeface="Calibri" pitchFamily="34" charset="-120"/>
-              </a:rPr>
-              <a:t>Photo, Activity 1: “MEDICINE MARKET - SEOUL” by U.S. Army Korea (Historical Image Archive), CC BY-NC-ND 2.0, via Flickr (https://www.flickr.com/photos/28486074@N08/2920744660)</a:t>
-            </a:r>
-            <a:endParaRPr lang="en-US" sz="1800" dirty="0"/>
-          </a:p>
-          <a:p>
-            <a:pPr algn="l" marL="342900" indent="-342900">
-              <a:spcAft>
-                <a:spcPts val="800"/>
-              </a:spcAft>
-              <a:buSzPct val="100000"/>
-              <a:buChar char="•"/>
-            </a:pPr>
-            <a:r>
-              <a:rPr lang="en-US" sz="1800" dirty="0">
-                <a:solidFill>
-                  <a:srgbClr val="111111"/>
-                </a:solidFill>
-                <a:latin typeface="Calibri" pitchFamily="34" charset="0"/>
-                <a:ea typeface="Calibri" pitchFamily="34" charset="-122"/>
-                <a:cs typeface="Calibri" pitchFamily="34" charset="-120"/>
-              </a:rPr>
-              <a:t>Photo, Activity 2: “Female shea tree (Vitellaria paradoxa) in full flower” by Joel Abroad, CC BY-NC-SA 2.0, via Flickr (https://www.flickr.com/photos/40295335@N00/5603751456)</a:t>
-            </a:r>
-            <a:endParaRPr lang="en-US" sz="1800" dirty="0"/>
-          </a:p>
-          <a:p>
-            <a:pPr algn="l" marL="342900" indent="-342900">
-              <a:spcAft>
-                <a:spcPts val="800"/>
-              </a:spcAft>
-              <a:buSzPct val="100000"/>
-              <a:buChar char="•"/>
-            </a:pPr>
-            <a:r>
-              <a:rPr lang="en-US" sz="1800" dirty="0">
-                <a:solidFill>
-                  <a:srgbClr val="111111"/>
-                </a:solidFill>
-                <a:latin typeface="Calibri" pitchFamily="34" charset="0"/>
-                <a:ea typeface="Calibri" pitchFamily="34" charset="-122"/>
-                <a:cs typeface="Calibri" pitchFamily="34" charset="-120"/>
-              </a:rPr>
-              <a:t>Photo, Activity 3: “Bee pollinating flower” by tombayly13, CC BY-SA 2.0, via Flickr (https://www.flickr.com/photos/60174932@N05/5797724005)</a:t>
-            </a:r>
-            <a:endParaRPr lang="en-US" sz="1800" dirty="0"/>
-          </a:p>
-          <a:p>
-            <a:pPr algn="l" marL="342900" indent="-342900">
-              <a:spcAft>
-                <a:spcPts val="800"/>
-              </a:spcAft>
-              <a:buSzPct val="100000"/>
-              <a:buChar char="•"/>
-            </a:pPr>
-            <a:r>
-              <a:rPr lang="en-US" sz="1800" dirty="0">
-                <a:solidFill>
-                  <a:srgbClr val="111111"/>
-                </a:solidFill>
-                <a:latin typeface="Calibri" pitchFamily="34" charset="0"/>
-                <a:ea typeface="Calibri" pitchFamily="34" charset="-122"/>
-                <a:cs typeface="Calibri" pitchFamily="34" charset="-120"/>
-              </a:rPr>
-              <a:t>Photo, Activity 4: “Sandga Market in Douala, Cameroon” by The Advocacy Project, CC BY-NC-SA 2.0, via Flickr (https://www.flickr.com/photos/42487558@N00/3636438732)</a:t>
-            </a:r>
-            <a:endParaRPr lang="en-US" sz="1800" dirty="0"/>
-          </a:p>
-          <a:p>
-            <a:pPr algn="l" marL="342900" indent="-342900">
-              <a:spcAft>
-                <a:spcPts val="800"/>
-              </a:spcAft>
-              <a:buSzPct val="100000"/>
-              <a:buChar char="•"/>
-            </a:pPr>
-            <a:r>
-              <a:rPr lang="en-US" sz="1800" dirty="0">
-                <a:solidFill>
-                  <a:srgbClr val="111111"/>
-                </a:solidFill>
-                <a:latin typeface="Calibri" pitchFamily="34" charset="0"/>
-                <a:ea typeface="Calibri" pitchFamily="34" charset="-122"/>
-                <a:cs typeface="Calibri" pitchFamily="34" charset="-120"/>
-              </a:rPr>
-              <a:t>Photo, Activity 5: “Amazon 11” by CIAT International Center for Tropical Agriculture, CC BY-SA 2.0, via Flickr (https://www.flickr.com/photos/38476503@N08/5641587148)</a:t>
-            </a:r>
-            <a:endParaRPr lang="en-US" sz="1800" dirty="0"/>
-          </a:p>
-          <a:p>
-            <a:pPr algn="l" marL="342900" indent="-342900">
-              <a:spcAft>
-                <a:spcPts val="800"/>
-              </a:spcAft>
-              <a:buSzPct val="100000"/>
-              <a:buChar char="•"/>
-            </a:pPr>
-            <a:r>
-              <a:rPr lang="en-US" sz="1800" dirty="0">
-                <a:solidFill>
-                  <a:srgbClr val="111111"/>
-                </a:solidFill>
-                <a:latin typeface="Calibri" pitchFamily="34" charset="0"/>
-                <a:ea typeface="Calibri" pitchFamily="34" charset="-122"/>
-                <a:cs typeface="Calibri" pitchFamily="34" charset="-120"/>
-              </a:rPr>
-              <a:t>Diagrams and animations: drawn for this lesson (Geography Department).</a:t>
-            </a:r>
-            <a:endParaRPr lang="en-US" sz="1800" dirty="0"/>
-          </a:p>
-        </p:txBody>
-      </p:sp>
-      <p:sp>
-        <p:nvSpPr>
-          <p:cNvPr id="25" name="Slide Number Placeholder 0"/>
-          <p:cNvSpPr>
-            <a:spLocks noGrp="1"/>
-          </p:cNvSpPr>
-          <p:nvPr>
-            <p:ph type="sldNum" sz="quarter" idx="4294967295"/>
-          </p:nvPr>
-        </p:nvSpPr>
-        <p:spPr>
-          <a:xfrm>
-            <a:off x="27432" y="91440"/>
-            <a:ext cx="585216" cy="475488"/>
-          </a:xfrm>
-          <a:prstGeom prst="rect">
-            <a:avLst/>
-          </a:prstGeom>
-          <a:extLst>
-            <a:ext uri="{C572A759-6A51-4108-AA02-DFA0A04FC94B}">
-              <ma14:wrappingTextBoxFlag xmlns:ma14="http://schemas.microsoft.com/office/mac/drawingml/2011/main" val="0"/>
-            </a:ext>
-          </a:extLst>
-        </p:spPr>
-        <p:txBody>
-          <a:bodyPr/>
-          <a:lstStyle>
-            <a:lvl1pPr>
-              <a:defRPr sz="2000">
-                <a:solidFill>
-                  <a:srgbClr val="FFFFFF"/>
-                </a:solidFill>
-                <a:latin typeface="Calibri"/>
-                <a:ea typeface="Calibri"/>
-                <a:cs typeface="Calibri"/>
-              </a:defRPr>
-            </a:lvl1pPr>
-          </a:lstStyle>
-          <a:p>
-            <a:pPr algn="ctr"/>
-            <a:fld id="{F7021451-1387-4CA6-816F-3879F97B5CBC}" type="slidenum">
-              <a:rPr b="1" lang="en-US"/>
-              <a:t>51</a:t>
+              <a:t>55</a:t>
             </a:fld>
             <a:endParaRPr lang="en-US"/>
           </a:p>
@@ -20755,7 +22285,7 @@
                 <a:ea typeface="Times New Roman" pitchFamily="34" charset="-122"/>
                 <a:cs typeface="Times New Roman" pitchFamily="34" charset="-120"/>
               </a:rPr>
-              <a:t>Describe methods of collection.</a:t>
+              <a:t>Describe the methods of collection and processing.</a:t>
             </a:r>
             <a:endParaRPr lang="en-US" sz="4000" dirty="0"/>
           </a:p>

--- a/lecons/F2/09_F2_M1_FS03_Products_Gathered_from_the_Wild_in_Cameroon.pptx
+++ b/lecons/F2/09_F2_M1_FS03_Products_Gathered_from_the_Wild_in_Cameroon.pptx
@@ -13523,7 +13523,7 @@
         <p:spPr>
           <a:xfrm>
             <a:off x="0" y="658368"/>
-            <a:ext cx="3840480" cy="5833872"/>
+            <a:ext cx="5120640" cy="5833872"/>
           </a:xfrm>
           <a:prstGeom prst="rect">
             <a:avLst/>
@@ -13538,8 +13538,8 @@
         </p:nvSpPr>
         <p:spPr>
           <a:xfrm>
-            <a:off x="4069080" y="1005840"/>
-            <a:ext cx="7802575" cy="731520"/>
+            <a:off x="5349240" y="1005840"/>
+            <a:ext cx="6522415" cy="731520"/>
           </a:xfrm>
           <a:prstGeom prst="rect">
             <a:avLst/>
@@ -13579,8 +13579,8 @@
         </p:nvSpPr>
         <p:spPr>
           <a:xfrm>
-            <a:off x="4069080" y="1783080"/>
-            <a:ext cx="7802575" cy="4663440"/>
+            <a:off x="5349240" y="1783080"/>
+            <a:ext cx="6522415" cy="4663440"/>
           </a:xfrm>
           <a:prstGeom prst="rect">
             <a:avLst/>
@@ -13599,7 +13599,7 @@
               <a:buNone/>
             </a:pPr>
             <a:r>
-              <a:rPr lang="en-US" sz="4000" b="1" dirty="0">
+              <a:rPr lang="en-US" sz="3200" b="1" dirty="0">
                 <a:solidFill>
                   <a:srgbClr val="111111"/>
                 </a:solidFill>
@@ -13609,7 +13609,7 @@
               </a:rPr>
               <a:t>Topic: Man in his Environment</a:t>
             </a:r>
-            <a:endParaRPr lang="en-US" sz="4000" dirty="0"/>
+            <a:endParaRPr lang="en-US" sz="3200" dirty="0"/>
           </a:p>
           <a:p>
             <a:pPr algn="l" indent="0" marL="0">
@@ -13619,7 +13619,7 @@
               <a:buNone/>
             </a:pPr>
             <a:r>
-              <a:rPr lang="en-US" sz="4000" b="1" dirty="0">
+              <a:rPr lang="en-US" sz="3200" b="1" dirty="0">
                 <a:solidFill>
                   <a:srgbClr val="111111"/>
                 </a:solidFill>
@@ -13629,7 +13629,7 @@
               </a:rPr>
               <a:t>Sub-topic: Exploitation of Resources in the Natural Environment</a:t>
             </a:r>
-            <a:endParaRPr lang="en-US" sz="4000" dirty="0"/>
+            <a:endParaRPr lang="en-US" sz="3200" dirty="0"/>
           </a:p>
           <a:p>
             <a:pPr algn="l" indent="0" marL="0">
@@ -13639,7 +13639,7 @@
               <a:buNone/>
             </a:pPr>
             <a:r>
-              <a:rPr lang="en-US" sz="4000" b="1" dirty="0">
+              <a:rPr lang="en-US" sz="3200" b="1" dirty="0">
                 <a:solidFill>
                   <a:srgbClr val="990011"/>
                 </a:solidFill>
@@ -13649,7 +13649,7 @@
               </a:rPr>
               <a:t>Further Study 3: Products Gathered from the Wild in Cameroon</a:t>
             </a:r>
-            <a:endParaRPr lang="en-US" sz="4000" dirty="0"/>
+            <a:endParaRPr lang="en-US" sz="3200" dirty="0"/>
           </a:p>
         </p:txBody>
       </p:sp>

--- a/lecons/F2/09_F2_M1_FS03_Products_Gathered_from_the_Wild_in_Cameroon.pptx
+++ b/lecons/F2/09_F2_M1_FS03_Products_Gathered_from_the_Wild_in_Cameroon.pptx
@@ -3460,7 +3460,7 @@
           <a:p>
             <a:r>
               <a:rPr lang="en-US" dirty="0"/>
-              <a:t>Before we start the new lesson, let us correct the homework I gave you at the end of Further Study 2: The Firewood Crisis. The question was: Ask your family how much they spend on firewood or charcoal each week. Take out your exercise books.</a:t>
+              <a:t>Before we start the new lesson, let us correct the homework I gave you at the end of Further Study 2: The Firewood Crisis. The question was: Name three products gathered from the wild in Cameroon. Take out your exercise books.</a:t>
             </a:r>
             <a:endParaRPr lang="en-US" dirty="0"/>
           </a:p>
@@ -4340,7 +4340,7 @@
           <a:p>
             <a:r>
               <a:rPr lang="en-US" dirty="0"/>
-              <a:t>For your homework: Visit the market and write the price of three wild products. We shall correct it at the beginning of our next lesson.</a:t>
+              <a:t>For your homework: Name two plant resources and two animal resources of Cameroon. We shall correct it at the beginning of our next lesson.</a:t>
             </a:r>
             <a:endParaRPr lang="en-US" dirty="0"/>
           </a:p>
@@ -4428,7 +4428,7 @@
           <a:p>
             <a:r>
               <a:rPr lang="en-US" dirty="0"/>
-              <a:t>Here is a good answer. Answers vary. Example: about 3,000 to 5,000 FCFA a week for firewood or a bag of charcoal. Compare it with your own answer and correct your work in red.</a:t>
+              <a:t>Here is a good answer. Eru, njangsa and bush mango (also bitter cola, shea nuts and honey). Compare it with your own answer and correct your work in red.</a:t>
             </a:r>
             <a:endParaRPr lang="en-US" dirty="0"/>
           </a:p>
@@ -15260,7 +15260,7 @@
                 <a:ea typeface="Times New Roman" pitchFamily="34" charset="-122"/>
                 <a:cs typeface="Times New Roman" pitchFamily="34" charset="-120"/>
               </a:rPr>
-              <a:t>Ask your family how much they spend on firewood or charcoal each week.</a:t>
+              <a:t>Name three products gathered from the wild in Cameroon.</a:t>
             </a:r>
             <a:endParaRPr lang="en-US" sz="4000" dirty="0"/>
           </a:p>
@@ -17811,7 +17811,7 @@
                 <a:ea typeface="Times New Roman" pitchFamily="34" charset="-122"/>
                 <a:cs typeface="Times New Roman" pitchFamily="34" charset="-120"/>
               </a:rPr>
-              <a:t>Visit the market and write the price of three wild products.</a:t>
+              <a:t>Name two plant resources and two animal resources of Cameroon.</a:t>
             </a:r>
             <a:endParaRPr lang="en-US" sz="4000" dirty="0"/>
           </a:p>
@@ -18030,7 +18030,7 @@
                 <a:ea typeface="Times New Roman" pitchFamily="34" charset="-122"/>
                 <a:cs typeface="Times New Roman" pitchFamily="34" charset="-120"/>
               </a:rPr>
-              <a:t>Answers vary. Example: about 3,000 to 5,000 FCFA a week for firewood or a bag of charcoal.</a:t>
+              <a:t>Eru, njangsa and bush mango (also bitter cola, shea nuts and honey).</a:t>
             </a:r>
             <a:endParaRPr lang="en-US" sz="4000" dirty="0"/>
           </a:p>
@@ -20694,7 +20694,7 @@
                           <a:ea typeface="Calibri" pitchFamily="34" charset="-122"/>
                           <a:cs typeface="Calibri" pitchFamily="34" charset="-120"/>
                         </a:rPr>
-                        <a:t>Visit the market and write the price of three wild products.</a:t>
+                        <a:t>Name two plant resources and two animal resources of Cameroon.</a:t>
                       </a:r>
                       <a:endParaRPr lang="en-US" sz="1600" dirty="0">
                         <a:latin typeface="Calibri" charset="0"/>
